--- a/Agripals-Investor-Deck.pptx
+++ b/Agripals-Investor-Deck.pptx
@@ -12,6 +12,7 @@
     <p:sldId id="260" r:id="rId6"/>
     <p:sldId id="261" r:id="rId7"/>
     <p:sldId id="262" r:id="rId8"/>
+    <p:sldId id="272" r:id="rId23"/>
     <p:sldId id="263" r:id="rId9"/>
     <p:sldId id="264" r:id="rId10"/>
     <p:sldId id="270" r:id="rId21"/>
@@ -2053,6 +2054,10 @@
           </a:solidFill>
           <a:ln/>
         </p:spPr>
+        <p:txBody>
+          <a:bodyPr/>
+          <a:p/>
+        </p:txBody>
       </p:sp>
       <p:sp>
         <p:nvSpPr>
@@ -2087,7 +2092,7 @@
                 <a:ea typeface="Calibri" pitchFamily="34" charset="-122"/>
                 <a:cs typeface="Calibri" pitchFamily="34" charset="-120"/>
               </a:rPr>
-              <a:t>✦ BLEEDING-EDGE AI × AGRICULTURE</a:t>
+              <a:t>✦ ONLINE-ONLY · AI-NATIVE FOOD WHOLESALER</a:t>
             </a:r>
             <a:endParaRPr lang="en-US" sz="1300" dirty="0"/>
           </a:p>
@@ -2191,7 +2196,7 @@
                 <a:ea typeface="Calibri" pitchFamily="34" charset="-122"/>
                 <a:cs typeface="Calibri" pitchFamily="34" charset="-120"/>
               </a:rPr>
-              <a:t>Agripals connects restaurants directly with the farms that grow, catch and grade their food — cutting the markup, restoring provenance, and rebuilding the route from farm to plate.</a:t>
+              <a:t>An online-only, AI-native food wholesaler. Agripals connects restaurants directly with the farms that grow, catch and grade their food — all over text — cutting the markup and rebuilding the route from farm to plate.</a:t>
             </a:r>
             <a:endParaRPr lang="en-US" sz="1650" dirty="0"/>
           </a:p>
@@ -2325,7 +2330,7 @@
                 <a:ea typeface="Calibri" pitchFamily="34" charset="-122"/>
                 <a:cs typeface="Calibri" pitchFamily="34" charset="-120"/>
               </a:rPr>
-              <a:t>BUSINESS MODEL</a:t>
+              <a:t>GO TO MARKET</a:t>
             </a:r>
             <a:endParaRPr lang="en-US" sz="1250" dirty="0"/>
           </a:p>
@@ -2367,7 +2372,7 @@
                 <a:ea typeface="Calibri" pitchFamily="34" charset="-122"/>
                 <a:cs typeface="Calibri" pitchFamily="34" charset="-120"/>
               </a:rPr>
-              <a:t>We earn when food moves: 5% of every order.</a:t>
+              <a:t>One city. One product. One clear proof point.</a:t>
             </a:r>
             <a:endParaRPr lang="en-US" sz="3400" dirty="0"/>
           </a:p>
@@ -2409,7 +2414,7 @@
                 <a:ea typeface="Calibri" pitchFamily="34" charset="-122"/>
                 <a:cs typeface="Calibri" pitchFamily="34" charset="-120"/>
               </a:rPr>
-              <a:t>Simple, aligned economics. Agripals takes a small cut of everything it moves — and the cheaper it makes food, the more that moves.</a:t>
+              <a:t>San Francisco oysters — direct from Northern California farms into SF restaurants — then expand the same rails outward.</a:t>
             </a:r>
             <a:endParaRPr lang="en-US" sz="1600" dirty="0"/>
           </a:p>
@@ -2544,7 +2549,7 @@
                 <a:ea typeface="Calibri" pitchFamily="34" charset="-122"/>
                 <a:cs typeface="Calibri" pitchFamily="34" charset="-120"/>
               </a:rPr>
-              <a:t>Take rate</a:t>
+              <a:t>Phase 1</a:t>
             </a:r>
             <a:endParaRPr lang="en-US" sz="1100" dirty="0"/>
           </a:p>
@@ -2583,7 +2588,7 @@
                 <a:ea typeface="Calibri" pitchFamily="34" charset="-122"/>
                 <a:cs typeface="Calibri" pitchFamily="34" charset="-120"/>
               </a:rPr>
-              <a:t>5% of every order</a:t>
+              <a:t>SF oysters</a:t>
             </a:r>
             <a:endParaRPr lang="en-US" sz="1550" dirty="0"/>
           </a:p>
@@ -2625,7 +2630,7 @@
                 <a:ea typeface="Calibri" pitchFamily="34" charset="-122"/>
                 <a:cs typeface="Calibri" pitchFamily="34" charset="-120"/>
               </a:rPr>
-              <a:t>Agripals takes ~5% of each order's value (GMV). No subscription — we only earn when the kitchen saves.</a:t>
+              <a:t>~10 oyster farmers, 10–20 restaurants, one reliable cold-chain logistics partner.</a:t>
             </a:r>
             <a:endParaRPr lang="en-US" sz="1280" dirty="0"/>
           </a:p>
@@ -2760,7 +2765,7 @@
                 <a:ea typeface="Calibri" pitchFamily="34" charset="-122"/>
                 <a:cs typeface="Calibri" pitchFamily="34" charset="-120"/>
               </a:rPr>
-              <a:t>Credit float</a:t>
+              <a:t>Phase 2</a:t>
             </a:r>
             <a:endParaRPr lang="en-US" sz="1100" dirty="0"/>
           </a:p>
@@ -2799,7 +2804,7 @@
                 <a:ea typeface="Calibri" pitchFamily="34" charset="-122"/>
                 <a:cs typeface="Calibri" pitchFamily="34" charset="-120"/>
               </a:rPr>
-              <a:t>We finance the middle</a:t>
+              <a:t>More direct seafood</a:t>
             </a:r>
             <a:endParaRPr lang="en-US" sz="1550" dirty="0"/>
           </a:p>
@@ -2841,7 +2846,7 @@
                 <a:ea typeface="Calibri" pitchFamily="34" charset="-122"/>
                 <a:cs typeface="Calibri" pitchFamily="34" charset="-120"/>
               </a:rPr>
-              <a:t>Farms don't want to carry credit. We pay them on delivery and bill kitchens on terms — earning a financing margin.</a:t>
+              <a:t>Shrimp, lobster, crab and other gradable products where freshness and provenance matter.</a:t>
             </a:r>
             <a:endParaRPr lang="en-US" sz="1280" dirty="0"/>
           </a:p>
@@ -2976,7 +2981,7 @@
                 <a:ea typeface="Calibri" pitchFamily="34" charset="-122"/>
                 <a:cs typeface="Calibri" pitchFamily="34" charset="-120"/>
               </a:rPr>
-              <a:t>Network data</a:t>
+              <a:t>Phase 3</a:t>
             </a:r>
             <a:endParaRPr lang="en-US" sz="1100" dirty="0"/>
           </a:p>
@@ -3015,7 +3020,7 @@
                 <a:ea typeface="Calibri" pitchFamily="34" charset="-122"/>
                 <a:cs typeface="Calibri" pitchFamily="34" charset="-120"/>
               </a:rPr>
-              <a:t>It compounds</a:t>
+              <a:t>Direct import / export</a:t>
             </a:r>
             <a:endParaRPr lang="en-US" sz="1550" dirty="0"/>
           </a:p>
@@ -3057,7 +3062,7 @@
                 <a:ea typeface="Calibri" pitchFamily="34" charset="-122"/>
                 <a:cs typeface="Calibri" pitchFamily="34" charset="-120"/>
               </a:rPr>
-              <a:t>Every order sharpens pricing, grading and demand — better matches over time, and a moat that widens with volume.</a:t>
+              <a:t>Cut exporters and importers too, with AI coordinating documents, routing and compliance.</a:t>
             </a:r>
             <a:endParaRPr lang="en-US" sz="1280" dirty="0"/>
           </a:p>
@@ -3150,6 +3155,887 @@
 </file>
 
 <file path=ppt/slides/slide11.xml><?xml version="1.0" encoding="utf-8"?>
+<p:sld xmlns:a="http://schemas.openxmlformats.org/drawingml/2006/main" xmlns:r="http://schemas.openxmlformats.org/officeDocument/2006/relationships" xmlns:p="http://schemas.openxmlformats.org/presentationml/2006/main">
+  <p:cSld name="Slide 9">
+    <p:bg>
+      <p:bgPr>
+        <a:solidFill>
+          <a:srgbClr val="F4F7F6"/>
+        </a:solidFill>
+      </p:bgPr>
+    </p:bg>
+    <p:spTree>
+      <p:nvGrpSpPr>
+        <p:cNvPr id="1" name=""/>
+        <p:cNvGrpSpPr/>
+        <p:nvPr/>
+      </p:nvGrpSpPr>
+      <p:grpSpPr>
+        <a:xfrm>
+          <a:off x="0" y="0"/>
+          <a:ext cx="0" cy="0"/>
+          <a:chOff x="0" y="0"/>
+          <a:chExt cx="0" cy="0"/>
+        </a:xfrm>
+      </p:grpSpPr>
+      <p:sp>
+        <p:nvSpPr>
+          <p:cNvPr id="2" name="Text 0"/>
+          <p:cNvSpPr/>
+          <p:nvPr/>
+        </p:nvSpPr>
+        <p:spPr>
+          <a:xfrm>
+            <a:off x="658368" y="457200"/>
+            <a:ext cx="8229600" cy="320040"/>
+          </a:xfrm>
+          <a:prstGeom prst="rect">
+            <a:avLst/>
+          </a:prstGeom>
+          <a:noFill/>
+          <a:ln/>
+        </p:spPr>
+        <p:txBody>
+          <a:bodyPr wrap="square" lIns="0" tIns="0" rIns="0" bIns="0" rtlCol="0" anchor="ctr"/>
+          <a:lstStyle/>
+          <a:p>
+            <a:pPr algn="l" indent="0" marL="0">
+              <a:buNone/>
+            </a:pPr>
+            <a:r>
+              <a:rPr lang="en-US" sz="1250" b="1" spc="300" kern="0" dirty="0">
+                <a:solidFill>
+                  <a:srgbClr val="37A278"/>
+                </a:solidFill>
+                <a:latin typeface="Calibri" pitchFamily="34" charset="0"/>
+                <a:ea typeface="Calibri" pitchFamily="34" charset="-122"/>
+                <a:cs typeface="Calibri" pitchFamily="34" charset="-120"/>
+              </a:rPr>
+              <a:t>BUSINESS MODEL</a:t>
+            </a:r>
+            <a:endParaRPr lang="en-US" sz="1250" dirty="0"/>
+          </a:p>
+        </p:txBody>
+      </p:sp>
+      <p:sp>
+        <p:nvSpPr>
+          <p:cNvPr id="3" name="Text 1"/>
+          <p:cNvSpPr/>
+          <p:nvPr/>
+        </p:nvSpPr>
+        <p:spPr>
+          <a:xfrm>
+            <a:off x="658368" y="841248"/>
+            <a:ext cx="10872216" cy="1051560"/>
+          </a:xfrm>
+          <a:prstGeom prst="rect">
+            <a:avLst/>
+          </a:prstGeom>
+          <a:noFill/>
+          <a:ln/>
+        </p:spPr>
+        <p:txBody>
+          <a:bodyPr wrap="square" lIns="0" tIns="0" rIns="0" bIns="0" rtlCol="0" anchor="ctr"/>
+          <a:lstStyle/>
+          <a:p>
+            <a:pPr algn="l" indent="0" marL="0">
+              <a:lnSpc>
+                <a:spcPct val="100000"/>
+              </a:lnSpc>
+              <a:buNone/>
+            </a:pPr>
+            <a:r>
+              <a:rPr lang="en-US" sz="3400" b="1" dirty="0">
+                <a:solidFill>
+                  <a:srgbClr val="123024"/>
+                </a:solidFill>
+                <a:latin typeface="Calibri" pitchFamily="34" charset="0"/>
+                <a:ea typeface="Calibri" pitchFamily="34" charset="-122"/>
+                <a:cs typeface="Calibri" pitchFamily="34" charset="-120"/>
+              </a:rPr>
+              <a:t>We earn when food moves: 5% of every order.</a:t>
+            </a:r>
+            <a:endParaRPr lang="en-US" sz="3400" dirty="0"/>
+          </a:p>
+        </p:txBody>
+      </p:sp>
+      <p:sp>
+        <p:nvSpPr>
+          <p:cNvPr id="4" name="Text 2"/>
+          <p:cNvSpPr/>
+          <p:nvPr/>
+        </p:nvSpPr>
+        <p:spPr>
+          <a:xfrm>
+            <a:off x="658368" y="1828800"/>
+            <a:ext cx="10607040" cy="640080"/>
+          </a:xfrm>
+          <a:prstGeom prst="rect">
+            <a:avLst/>
+          </a:prstGeom>
+          <a:noFill/>
+          <a:ln/>
+        </p:spPr>
+        <p:txBody>
+          <a:bodyPr wrap="square" lIns="0" tIns="0" rIns="0" bIns="0" rtlCol="0" anchor="ctr"/>
+          <a:lstStyle/>
+          <a:p>
+            <a:pPr indent="0" marL="0">
+              <a:lnSpc>
+                <a:spcPct val="115000"/>
+              </a:lnSpc>
+              <a:buNone/>
+            </a:pPr>
+            <a:r>
+              <a:rPr lang="en-US" sz="1600" dirty="0">
+                <a:solidFill>
+                  <a:srgbClr val="12201A"/>
+                </a:solidFill>
+                <a:latin typeface="Calibri" pitchFamily="34" charset="0"/>
+                <a:ea typeface="Calibri" pitchFamily="34" charset="-122"/>
+                <a:cs typeface="Calibri" pitchFamily="34" charset="-120"/>
+              </a:rPr>
+              <a:t>Simple, aligned economics. Agripals takes a small cut of everything it moves — and the cheaper it makes food, the more that moves.</a:t>
+            </a:r>
+            <a:endParaRPr lang="en-US" sz="1600" dirty="0"/>
+          </a:p>
+        </p:txBody>
+      </p:sp>
+      <p:sp>
+        <p:nvSpPr>
+          <p:cNvPr id="5" name="Shape 3"/>
+          <p:cNvSpPr/>
+          <p:nvPr/>
+        </p:nvSpPr>
+        <p:spPr>
+          <a:xfrm>
+            <a:off x="658368" y="2743200"/>
+            <a:ext cx="3383280" cy="3017520"/>
+          </a:xfrm>
+          <a:prstGeom prst="roundRect">
+            <a:avLst>
+              <a:gd name="adj" fmla="val 4242"/>
+            </a:avLst>
+          </a:prstGeom>
+          <a:solidFill>
+            <a:srgbClr val="FFFFFF"/>
+          </a:solidFill>
+          <a:ln/>
+          <a:effectLst>
+            <a:outerShdw sx="100000" sy="100000" kx="0" ky="0" algn="bl" rotWithShape="0" blurRad="127000" dist="38100" dir="5400000">
+              <a:srgbClr val="1B3A2E">
+                <a:alpha val="16000"/>
+              </a:srgbClr>
+            </a:outerShdw>
+          </a:effectLst>
+        </p:spPr>
+        <p:txBody>
+          <a:bodyPr/>
+          <a:p/>
+        </p:txBody>
+      </p:sp>
+      <p:sp>
+        <p:nvSpPr>
+          <p:cNvPr id="6" name="Shape 4"/>
+          <p:cNvSpPr/>
+          <p:nvPr/>
+        </p:nvSpPr>
+        <p:spPr>
+          <a:xfrm>
+            <a:off x="978408" y="3090672"/>
+            <a:ext cx="777240" cy="777240"/>
+          </a:xfrm>
+          <a:prstGeom prst="ellipse">
+            <a:avLst/>
+          </a:prstGeom>
+          <a:solidFill>
+            <a:srgbClr val="2E8564"/>
+          </a:solidFill>
+          <a:ln/>
+        </p:spPr>
+        <p:txBody>
+          <a:bodyPr/>
+          <a:p/>
+        </p:txBody>
+      </p:sp>
+      <p:sp>
+        <p:nvSpPr>
+          <p:cNvPr id="7" name="Text 5"/>
+          <p:cNvSpPr/>
+          <p:nvPr/>
+        </p:nvSpPr>
+        <p:spPr>
+          <a:xfrm>
+            <a:off x="978408" y="3090672"/>
+            <a:ext cx="777240" cy="777240"/>
+          </a:xfrm>
+          <a:prstGeom prst="rect">
+            <a:avLst/>
+          </a:prstGeom>
+          <a:noFill/>
+          <a:ln/>
+        </p:spPr>
+        <p:txBody>
+          <a:bodyPr wrap="square" lIns="0" tIns="0" rIns="0" bIns="0" rtlCol="0" anchor="ctr"/>
+          <a:lstStyle/>
+          <a:p>
+            <a:pPr algn="ctr" indent="0" marL="0">
+              <a:buNone/>
+            </a:pPr>
+            <a:r>
+              <a:rPr lang="en-US" sz="3000" b="1" dirty="0">
+                <a:solidFill>
+                  <a:srgbClr val="FFFFFF"/>
+                </a:solidFill>
+                <a:latin typeface="Calibri" pitchFamily="34" charset="0"/>
+                <a:ea typeface="Calibri" pitchFamily="34" charset="-122"/>
+                <a:cs typeface="Calibri" pitchFamily="34" charset="-120"/>
+              </a:rPr>
+              <a:t>1</a:t>
+            </a:r>
+            <a:endParaRPr lang="en-US" sz="3000" dirty="0"/>
+          </a:p>
+        </p:txBody>
+      </p:sp>
+      <p:sp>
+        <p:nvSpPr>
+          <p:cNvPr id="8" name="Text 6"/>
+          <p:cNvSpPr/>
+          <p:nvPr/>
+        </p:nvSpPr>
+        <p:spPr>
+          <a:xfrm>
+            <a:off x="1892808" y="3154680"/>
+            <a:ext cx="1920240" cy="320040"/>
+          </a:xfrm>
+          <a:prstGeom prst="rect">
+            <a:avLst/>
+          </a:prstGeom>
+          <a:noFill/>
+          <a:ln/>
+        </p:spPr>
+        <p:txBody>
+          <a:bodyPr wrap="square" lIns="0" tIns="0" rIns="0" bIns="0" rtlCol="0" anchor="ctr"/>
+          <a:lstStyle/>
+          <a:p>
+            <a:pPr indent="0" marL="0">
+              <a:buNone/>
+            </a:pPr>
+            <a:r>
+              <a:rPr lang="en-US" sz="1100" b="1" spc="100" kern="0" dirty="0">
+                <a:solidFill>
+                  <a:srgbClr val="68786F"/>
+                </a:solidFill>
+                <a:latin typeface="Calibri" pitchFamily="34" charset="0"/>
+                <a:ea typeface="Calibri" pitchFamily="34" charset="-122"/>
+                <a:cs typeface="Calibri" pitchFamily="34" charset="-120"/>
+              </a:rPr>
+              <a:t>Take rate</a:t>
+            </a:r>
+            <a:endParaRPr lang="en-US" sz="1100" dirty="0"/>
+          </a:p>
+        </p:txBody>
+      </p:sp>
+      <p:sp>
+        <p:nvSpPr>
+          <p:cNvPr id="9" name="Text 7"/>
+          <p:cNvSpPr/>
+          <p:nvPr/>
+        </p:nvSpPr>
+        <p:spPr>
+          <a:xfrm>
+            <a:off x="1892808" y="3429000"/>
+            <a:ext cx="1920240" cy="457200"/>
+          </a:xfrm>
+          <a:prstGeom prst="rect">
+            <a:avLst/>
+          </a:prstGeom>
+          <a:noFill/>
+          <a:ln/>
+        </p:spPr>
+        <p:txBody>
+          <a:bodyPr wrap="square" lIns="0" tIns="0" rIns="0" bIns="0" rtlCol="0" anchor="ctr"/>
+          <a:lstStyle/>
+          <a:p>
+            <a:pPr indent="0" marL="0">
+              <a:buNone/>
+            </a:pPr>
+            <a:r>
+              <a:rPr lang="en-US" sz="1550" b="1" dirty="0">
+                <a:solidFill>
+                  <a:srgbClr val="123024"/>
+                </a:solidFill>
+                <a:latin typeface="Calibri" pitchFamily="34" charset="0"/>
+                <a:ea typeface="Calibri" pitchFamily="34" charset="-122"/>
+                <a:cs typeface="Calibri" pitchFamily="34" charset="-120"/>
+              </a:rPr>
+              <a:t>5% of every order</a:t>
+            </a:r>
+            <a:endParaRPr lang="en-US" sz="1550" dirty="0"/>
+          </a:p>
+        </p:txBody>
+      </p:sp>
+      <p:sp>
+        <p:nvSpPr>
+          <p:cNvPr id="10" name="Text 8"/>
+          <p:cNvSpPr/>
+          <p:nvPr/>
+        </p:nvSpPr>
+        <p:spPr>
+          <a:xfrm>
+            <a:off x="978408" y="4251960"/>
+            <a:ext cx="2743200" cy="1280160"/>
+          </a:xfrm>
+          <a:prstGeom prst="rect">
+            <a:avLst/>
+          </a:prstGeom>
+          <a:noFill/>
+          <a:ln/>
+        </p:spPr>
+        <p:txBody>
+          <a:bodyPr wrap="square" lIns="0" tIns="0" rIns="0" bIns="0" rtlCol="0" anchor="ctr"/>
+          <a:lstStyle/>
+          <a:p>
+            <a:pPr indent="0" marL="0">
+              <a:lnSpc>
+                <a:spcPct val="118000"/>
+              </a:lnSpc>
+              <a:buNone/>
+            </a:pPr>
+            <a:r>
+              <a:rPr lang="en-US" sz="1280" dirty="0">
+                <a:solidFill>
+                  <a:srgbClr val="68786F"/>
+                </a:solidFill>
+                <a:latin typeface="Calibri" pitchFamily="34" charset="0"/>
+                <a:ea typeface="Calibri" pitchFamily="34" charset="-122"/>
+                <a:cs typeface="Calibri" pitchFamily="34" charset="-120"/>
+              </a:rPr>
+              <a:t>Agripals takes ~5% of each order's value (GMV). No subscription — we only earn when the kitchen saves.</a:t>
+            </a:r>
+            <a:endParaRPr lang="en-US" sz="1280" dirty="0"/>
+          </a:p>
+        </p:txBody>
+      </p:sp>
+      <p:sp>
+        <p:nvSpPr>
+          <p:cNvPr id="11" name="Shape 9"/>
+          <p:cNvSpPr/>
+          <p:nvPr/>
+        </p:nvSpPr>
+        <p:spPr>
+          <a:xfrm>
+            <a:off x="4334256" y="2743200"/>
+            <a:ext cx="3383280" cy="3017520"/>
+          </a:xfrm>
+          <a:prstGeom prst="roundRect">
+            <a:avLst>
+              <a:gd name="adj" fmla="val 4242"/>
+            </a:avLst>
+          </a:prstGeom>
+          <a:solidFill>
+            <a:srgbClr val="FFFFFF"/>
+          </a:solidFill>
+          <a:ln/>
+          <a:effectLst>
+            <a:outerShdw sx="100000" sy="100000" kx="0" ky="0" algn="bl" rotWithShape="0" blurRad="127000" dist="38100" dir="5400000">
+              <a:srgbClr val="1B3A2E">
+                <a:alpha val="16000"/>
+              </a:srgbClr>
+            </a:outerShdw>
+          </a:effectLst>
+        </p:spPr>
+        <p:txBody>
+          <a:bodyPr/>
+          <a:p/>
+        </p:txBody>
+      </p:sp>
+      <p:sp>
+        <p:nvSpPr>
+          <p:cNvPr id="12" name="Shape 10"/>
+          <p:cNvSpPr/>
+          <p:nvPr/>
+        </p:nvSpPr>
+        <p:spPr>
+          <a:xfrm>
+            <a:off x="4654296" y="3090672"/>
+            <a:ext cx="777240" cy="777240"/>
+          </a:xfrm>
+          <a:prstGeom prst="ellipse">
+            <a:avLst/>
+          </a:prstGeom>
+          <a:solidFill>
+            <a:srgbClr val="37A278"/>
+          </a:solidFill>
+          <a:ln/>
+        </p:spPr>
+        <p:txBody>
+          <a:bodyPr/>
+          <a:p/>
+        </p:txBody>
+      </p:sp>
+      <p:sp>
+        <p:nvSpPr>
+          <p:cNvPr id="13" name="Text 11"/>
+          <p:cNvSpPr/>
+          <p:nvPr/>
+        </p:nvSpPr>
+        <p:spPr>
+          <a:xfrm>
+            <a:off x="4654296" y="3090672"/>
+            <a:ext cx="777240" cy="777240"/>
+          </a:xfrm>
+          <a:prstGeom prst="rect">
+            <a:avLst/>
+          </a:prstGeom>
+          <a:noFill/>
+          <a:ln/>
+        </p:spPr>
+        <p:txBody>
+          <a:bodyPr wrap="square" lIns="0" tIns="0" rIns="0" bIns="0" rtlCol="0" anchor="ctr"/>
+          <a:lstStyle/>
+          <a:p>
+            <a:pPr algn="ctr" indent="0" marL="0">
+              <a:buNone/>
+            </a:pPr>
+            <a:r>
+              <a:rPr lang="en-US" sz="3000" b="1" dirty="0">
+                <a:solidFill>
+                  <a:srgbClr val="FFFFFF"/>
+                </a:solidFill>
+                <a:latin typeface="Calibri" pitchFamily="34" charset="0"/>
+                <a:ea typeface="Calibri" pitchFamily="34" charset="-122"/>
+                <a:cs typeface="Calibri" pitchFamily="34" charset="-120"/>
+              </a:rPr>
+              <a:t>2</a:t>
+            </a:r>
+            <a:endParaRPr lang="en-US" sz="3000" dirty="0"/>
+          </a:p>
+        </p:txBody>
+      </p:sp>
+      <p:sp>
+        <p:nvSpPr>
+          <p:cNvPr id="14" name="Text 12"/>
+          <p:cNvSpPr/>
+          <p:nvPr/>
+        </p:nvSpPr>
+        <p:spPr>
+          <a:xfrm>
+            <a:off x="5568696" y="3154680"/>
+            <a:ext cx="1920240" cy="320040"/>
+          </a:xfrm>
+          <a:prstGeom prst="rect">
+            <a:avLst/>
+          </a:prstGeom>
+          <a:noFill/>
+          <a:ln/>
+        </p:spPr>
+        <p:txBody>
+          <a:bodyPr wrap="square" lIns="0" tIns="0" rIns="0" bIns="0" rtlCol="0" anchor="ctr"/>
+          <a:lstStyle/>
+          <a:p>
+            <a:pPr indent="0" marL="0">
+              <a:buNone/>
+            </a:pPr>
+            <a:r>
+              <a:rPr lang="en-US" sz="1100" b="1" spc="100" kern="0" dirty="0">
+                <a:solidFill>
+                  <a:srgbClr val="68786F"/>
+                </a:solidFill>
+                <a:latin typeface="Calibri" pitchFamily="34" charset="0"/>
+                <a:ea typeface="Calibri" pitchFamily="34" charset="-122"/>
+                <a:cs typeface="Calibri" pitchFamily="34" charset="-120"/>
+              </a:rPr>
+              <a:t>Credit float</a:t>
+            </a:r>
+            <a:endParaRPr lang="en-US" sz="1100" dirty="0"/>
+          </a:p>
+        </p:txBody>
+      </p:sp>
+      <p:sp>
+        <p:nvSpPr>
+          <p:cNvPr id="15" name="Text 13"/>
+          <p:cNvSpPr/>
+          <p:nvPr/>
+        </p:nvSpPr>
+        <p:spPr>
+          <a:xfrm>
+            <a:off x="5568696" y="3429000"/>
+            <a:ext cx="1920240" cy="457200"/>
+          </a:xfrm>
+          <a:prstGeom prst="rect">
+            <a:avLst/>
+          </a:prstGeom>
+          <a:noFill/>
+          <a:ln/>
+        </p:spPr>
+        <p:txBody>
+          <a:bodyPr wrap="square" lIns="0" tIns="0" rIns="0" bIns="0" rtlCol="0" anchor="ctr"/>
+          <a:lstStyle/>
+          <a:p>
+            <a:pPr indent="0" marL="0">
+              <a:buNone/>
+            </a:pPr>
+            <a:r>
+              <a:rPr lang="en-US" sz="1550" b="1" dirty="0">
+                <a:solidFill>
+                  <a:srgbClr val="123024"/>
+                </a:solidFill>
+                <a:latin typeface="Calibri" pitchFamily="34" charset="0"/>
+                <a:ea typeface="Calibri" pitchFamily="34" charset="-122"/>
+                <a:cs typeface="Calibri" pitchFamily="34" charset="-120"/>
+              </a:rPr>
+              <a:t>We finance the middle</a:t>
+            </a:r>
+            <a:endParaRPr lang="en-US" sz="1550" dirty="0"/>
+          </a:p>
+        </p:txBody>
+      </p:sp>
+      <p:sp>
+        <p:nvSpPr>
+          <p:cNvPr id="16" name="Text 14"/>
+          <p:cNvSpPr/>
+          <p:nvPr/>
+        </p:nvSpPr>
+        <p:spPr>
+          <a:xfrm>
+            <a:off x="4654296" y="4251960"/>
+            <a:ext cx="2743200" cy="1280160"/>
+          </a:xfrm>
+          <a:prstGeom prst="rect">
+            <a:avLst/>
+          </a:prstGeom>
+          <a:noFill/>
+          <a:ln/>
+        </p:spPr>
+        <p:txBody>
+          <a:bodyPr wrap="square" lIns="0" tIns="0" rIns="0" bIns="0" rtlCol="0" anchor="ctr"/>
+          <a:lstStyle/>
+          <a:p>
+            <a:pPr indent="0" marL="0">
+              <a:lnSpc>
+                <a:spcPct val="118000"/>
+              </a:lnSpc>
+              <a:buNone/>
+            </a:pPr>
+            <a:r>
+              <a:rPr lang="en-US" sz="1280" dirty="0">
+                <a:solidFill>
+                  <a:srgbClr val="68786F"/>
+                </a:solidFill>
+                <a:latin typeface="Calibri" pitchFamily="34" charset="0"/>
+                <a:ea typeface="Calibri" pitchFamily="34" charset="-122"/>
+                <a:cs typeface="Calibri" pitchFamily="34" charset="-120"/>
+              </a:rPr>
+              <a:t>Farms don't want to carry credit. We pay them on delivery and bill kitchens on terms — earning a financing margin.</a:t>
+            </a:r>
+            <a:endParaRPr lang="en-US" sz="1280" dirty="0"/>
+          </a:p>
+        </p:txBody>
+      </p:sp>
+      <p:sp>
+        <p:nvSpPr>
+          <p:cNvPr id="17" name="Shape 15"/>
+          <p:cNvSpPr/>
+          <p:nvPr/>
+        </p:nvSpPr>
+        <p:spPr>
+          <a:xfrm>
+            <a:off x="8010144" y="2743200"/>
+            <a:ext cx="3383280" cy="3017520"/>
+          </a:xfrm>
+          <a:prstGeom prst="roundRect">
+            <a:avLst>
+              <a:gd name="adj" fmla="val 4242"/>
+            </a:avLst>
+          </a:prstGeom>
+          <a:solidFill>
+            <a:srgbClr val="FFFFFF"/>
+          </a:solidFill>
+          <a:ln/>
+          <a:effectLst>
+            <a:outerShdw sx="100000" sy="100000" kx="0" ky="0" algn="bl" rotWithShape="0" blurRad="127000" dist="38100" dir="5400000">
+              <a:srgbClr val="1B3A2E">
+                <a:alpha val="16000"/>
+              </a:srgbClr>
+            </a:outerShdw>
+          </a:effectLst>
+        </p:spPr>
+        <p:txBody>
+          <a:bodyPr/>
+          <a:p/>
+        </p:txBody>
+      </p:sp>
+      <p:sp>
+        <p:nvSpPr>
+          <p:cNvPr id="18" name="Shape 16"/>
+          <p:cNvSpPr/>
+          <p:nvPr/>
+        </p:nvSpPr>
+        <p:spPr>
+          <a:xfrm>
+            <a:off x="8330184" y="3090672"/>
+            <a:ext cx="777240" cy="777240"/>
+          </a:xfrm>
+          <a:prstGeom prst="ellipse">
+            <a:avLst/>
+          </a:prstGeom>
+          <a:solidFill>
+            <a:srgbClr val="4CC499"/>
+          </a:solidFill>
+          <a:ln/>
+        </p:spPr>
+        <p:txBody>
+          <a:bodyPr/>
+          <a:p/>
+        </p:txBody>
+      </p:sp>
+      <p:sp>
+        <p:nvSpPr>
+          <p:cNvPr id="19" name="Text 17"/>
+          <p:cNvSpPr/>
+          <p:nvPr/>
+        </p:nvSpPr>
+        <p:spPr>
+          <a:xfrm>
+            <a:off x="8330184" y="3090672"/>
+            <a:ext cx="777240" cy="777240"/>
+          </a:xfrm>
+          <a:prstGeom prst="rect">
+            <a:avLst/>
+          </a:prstGeom>
+          <a:noFill/>
+          <a:ln/>
+        </p:spPr>
+        <p:txBody>
+          <a:bodyPr wrap="square" lIns="0" tIns="0" rIns="0" bIns="0" rtlCol="0" anchor="ctr"/>
+          <a:lstStyle/>
+          <a:p>
+            <a:pPr algn="ctr" indent="0" marL="0">
+              <a:buNone/>
+            </a:pPr>
+            <a:r>
+              <a:rPr lang="en-US" sz="3000" b="1" dirty="0">
+                <a:solidFill>
+                  <a:srgbClr val="FFFFFF"/>
+                </a:solidFill>
+                <a:latin typeface="Calibri" pitchFamily="34" charset="0"/>
+                <a:ea typeface="Calibri" pitchFamily="34" charset="-122"/>
+                <a:cs typeface="Calibri" pitchFamily="34" charset="-120"/>
+              </a:rPr>
+              <a:t>3</a:t>
+            </a:r>
+            <a:endParaRPr lang="en-US" sz="3000" dirty="0"/>
+          </a:p>
+        </p:txBody>
+      </p:sp>
+      <p:sp>
+        <p:nvSpPr>
+          <p:cNvPr id="20" name="Text 18"/>
+          <p:cNvSpPr/>
+          <p:nvPr/>
+        </p:nvSpPr>
+        <p:spPr>
+          <a:xfrm>
+            <a:off x="9244584" y="3154680"/>
+            <a:ext cx="1920240" cy="320040"/>
+          </a:xfrm>
+          <a:prstGeom prst="rect">
+            <a:avLst/>
+          </a:prstGeom>
+          <a:noFill/>
+          <a:ln/>
+        </p:spPr>
+        <p:txBody>
+          <a:bodyPr wrap="square" lIns="0" tIns="0" rIns="0" bIns="0" rtlCol="0" anchor="ctr"/>
+          <a:lstStyle/>
+          <a:p>
+            <a:pPr indent="0" marL="0">
+              <a:buNone/>
+            </a:pPr>
+            <a:r>
+              <a:rPr lang="en-US" sz="1100" b="1" spc="100" kern="0" dirty="0">
+                <a:solidFill>
+                  <a:srgbClr val="68786F"/>
+                </a:solidFill>
+                <a:latin typeface="Calibri" pitchFamily="34" charset="0"/>
+                <a:ea typeface="Calibri" pitchFamily="34" charset="-122"/>
+                <a:cs typeface="Calibri" pitchFamily="34" charset="-120"/>
+              </a:rPr>
+              <a:t>Network data</a:t>
+            </a:r>
+            <a:endParaRPr lang="en-US" sz="1100" dirty="0"/>
+          </a:p>
+        </p:txBody>
+      </p:sp>
+      <p:sp>
+        <p:nvSpPr>
+          <p:cNvPr id="21" name="Text 19"/>
+          <p:cNvSpPr/>
+          <p:nvPr/>
+        </p:nvSpPr>
+        <p:spPr>
+          <a:xfrm>
+            <a:off x="9244584" y="3429000"/>
+            <a:ext cx="1920240" cy="457200"/>
+          </a:xfrm>
+          <a:prstGeom prst="rect">
+            <a:avLst/>
+          </a:prstGeom>
+          <a:noFill/>
+          <a:ln/>
+        </p:spPr>
+        <p:txBody>
+          <a:bodyPr wrap="square" lIns="0" tIns="0" rIns="0" bIns="0" rtlCol="0" anchor="ctr"/>
+          <a:lstStyle/>
+          <a:p>
+            <a:pPr indent="0" marL="0">
+              <a:buNone/>
+            </a:pPr>
+            <a:r>
+              <a:rPr lang="en-US" sz="1550" b="1" dirty="0">
+                <a:solidFill>
+                  <a:srgbClr val="123024"/>
+                </a:solidFill>
+                <a:latin typeface="Calibri" pitchFamily="34" charset="0"/>
+                <a:ea typeface="Calibri" pitchFamily="34" charset="-122"/>
+                <a:cs typeface="Calibri" pitchFamily="34" charset="-120"/>
+              </a:rPr>
+              <a:t>It compounds</a:t>
+            </a:r>
+            <a:endParaRPr lang="en-US" sz="1550" dirty="0"/>
+          </a:p>
+        </p:txBody>
+      </p:sp>
+      <p:sp>
+        <p:nvSpPr>
+          <p:cNvPr id="22" name="Text 20"/>
+          <p:cNvSpPr/>
+          <p:nvPr/>
+        </p:nvSpPr>
+        <p:spPr>
+          <a:xfrm>
+            <a:off x="8330184" y="4251960"/>
+            <a:ext cx="2743200" cy="1280160"/>
+          </a:xfrm>
+          <a:prstGeom prst="rect">
+            <a:avLst/>
+          </a:prstGeom>
+          <a:noFill/>
+          <a:ln/>
+        </p:spPr>
+        <p:txBody>
+          <a:bodyPr wrap="square" lIns="0" tIns="0" rIns="0" bIns="0" rtlCol="0" anchor="ctr"/>
+          <a:lstStyle/>
+          <a:p>
+            <a:pPr indent="0" marL="0">
+              <a:lnSpc>
+                <a:spcPct val="118000"/>
+              </a:lnSpc>
+              <a:buNone/>
+            </a:pPr>
+            <a:r>
+              <a:rPr lang="en-US" sz="1280" dirty="0">
+                <a:solidFill>
+                  <a:srgbClr val="68786F"/>
+                </a:solidFill>
+                <a:latin typeface="Calibri" pitchFamily="34" charset="0"/>
+                <a:ea typeface="Calibri" pitchFamily="34" charset="-122"/>
+                <a:cs typeface="Calibri" pitchFamily="34" charset="-120"/>
+              </a:rPr>
+              <a:t>Every order sharpens pricing, grading and demand — better matches over time, and a moat that widens with volume.</a:t>
+            </a:r>
+            <a:endParaRPr lang="en-US" sz="1280" dirty="0"/>
+          </a:p>
+        </p:txBody>
+      </p:sp>
+      <p:sp>
+        <p:nvSpPr>
+          <p:cNvPr id="23" name="Text 21"/>
+          <p:cNvSpPr/>
+          <p:nvPr/>
+        </p:nvSpPr>
+        <p:spPr>
+          <a:xfrm>
+            <a:off x="11183112" y="6355080"/>
+            <a:ext cx="548640" cy="274320"/>
+          </a:xfrm>
+          <a:prstGeom prst="rect">
+            <a:avLst/>
+          </a:prstGeom>
+          <a:noFill/>
+          <a:ln/>
+        </p:spPr>
+        <p:txBody>
+          <a:bodyPr wrap="square" lIns="0" tIns="0" rIns="0" bIns="0" rtlCol="0" anchor="ctr"/>
+          <a:lstStyle/>
+          <a:p>
+            <a:pPr algn="r" indent="0" marL="0">
+              <a:buNone/>
+            </a:pPr>
+            <a:r>
+              <a:rPr lang="en-US" sz="1000" dirty="0">
+                <a:solidFill>
+                  <a:srgbClr val="68786F"/>
+                </a:solidFill>
+                <a:latin typeface="Calibri" pitchFamily="34" charset="0"/>
+                <a:ea typeface="Calibri" pitchFamily="34" charset="-122"/>
+                <a:cs typeface="Calibri" pitchFamily="34" charset="-120"/>
+              </a:rPr>
+              <a:t>11</a:t>
+            </a:r>
+            <a:endParaRPr lang="en-US" sz="1000" dirty="0"/>
+          </a:p>
+        </p:txBody>
+      </p:sp>
+      <p:sp>
+        <p:nvSpPr>
+          <p:cNvPr id="24" name="Text 22"/>
+          <p:cNvSpPr/>
+          <p:nvPr/>
+        </p:nvSpPr>
+        <p:spPr>
+          <a:xfrm>
+            <a:off x="658368" y="6355080"/>
+            <a:ext cx="2743200" cy="274320"/>
+          </a:xfrm>
+          <a:prstGeom prst="rect">
+            <a:avLst/>
+          </a:prstGeom>
+          <a:noFill/>
+          <a:ln/>
+        </p:spPr>
+        <p:txBody>
+          <a:bodyPr wrap="square" lIns="0" tIns="0" rIns="0" bIns="0" rtlCol="0" anchor="ctr"/>
+          <a:lstStyle/>
+          <a:p>
+            <a:pPr indent="0" marL="0">
+              <a:buNone/>
+            </a:pPr>
+            <a:r>
+              <a:rPr lang="en-US" sz="1000" b="1" dirty="0">
+                <a:solidFill>
+                  <a:srgbClr val="68786F"/>
+                </a:solidFill>
+                <a:latin typeface="Calibri" pitchFamily="34" charset="0"/>
+                <a:ea typeface="Calibri" pitchFamily="34" charset="-122"/>
+                <a:cs typeface="Calibri" pitchFamily="34" charset="-120"/>
+              </a:rPr>
+              <a:t>Agripals</a:t>
+            </a:r>
+            <a:endParaRPr lang="en-US" sz="1000" dirty="0"/>
+          </a:p>
+        </p:txBody>
+      </p:sp>
+    </p:spTree>
+  </p:cSld>
+  <p:clrMapOvr>
+    <a:masterClrMapping/>
+  </p:clrMapOvr>
+</p:sld>
+</file>
+
+<file path=ppt/slides/slide12.xml><?xml version="1.0" encoding="utf-8"?>
 <p:sld xmlns:a="http://schemas.openxmlformats.org/drawingml/2006/main" xmlns:r="http://schemas.openxmlformats.org/officeDocument/2006/relationships" xmlns:p="http://schemas.openxmlformats.org/presentationml/2006/main">
   <p:cSld name="Slide 3">
     <p:bg>
@@ -3767,7 +4653,7 @@
                 <a:ea typeface="Calibri" pitchFamily="34" charset="-122"/>
                 <a:cs typeface="Calibri" pitchFamily="34" charset="-120"/>
               </a:rPr>
-              <a:t>11</a:t>
+              <a:t>12</a:t>
             </a:r>
             <a:endParaRPr lang="en-US" sz="1000" dirty="0"/>
           </a:p>
@@ -3820,7 +4706,7 @@
 </p:sld>
 </file>
 
-<file path=ppt/slides/slide12.xml><?xml version="1.0" encoding="utf-8"?>
+<file path=ppt/slides/slide13.xml><?xml version="1.0" encoding="utf-8"?>
 <p:sld xmlns:a="http://schemas.openxmlformats.org/drawingml/2006/main" xmlns:r="http://schemas.openxmlformats.org/officeDocument/2006/relationships" xmlns:p="http://schemas.openxmlformats.org/presentationml/2006/main">
   <p:cSld name="Slide 10">
     <p:bg>
@@ -4350,7 +5236,7 @@
                 <a:ea typeface="Calibri" pitchFamily="34" charset="-122"/>
                 <a:cs typeface="Calibri" pitchFamily="34" charset="-120"/>
               </a:rPr>
-              <a:t>12</a:t>
+              <a:t>13</a:t>
             </a:r>
             <a:endParaRPr lang="en-US" sz="1000" dirty="0"/>
           </a:p>
@@ -4403,7 +5289,7 @@
 </p:sld>
 </file>
 
-<file path=ppt/slides/slide13.xml><?xml version="1.0" encoding="utf-8"?>
+<file path=ppt/slides/slide14.xml><?xml version="1.0" encoding="utf-8"?>
 <p:sld xmlns:a="http://schemas.openxmlformats.org/drawingml/2006/main" xmlns:r="http://schemas.openxmlformats.org/officeDocument/2006/relationships" xmlns:p="http://schemas.openxmlformats.org/presentationml/2006/main">
   <p:cSld name="Slide 11">
     <p:bg>
@@ -5067,7 +5953,7 @@
                 <a:ea typeface="Calibri" pitchFamily="34" charset="-122"/>
                 <a:cs typeface="Calibri" pitchFamily="34" charset="-120"/>
               </a:rPr>
-              <a:t>13</a:t>
+              <a:t>14</a:t>
             </a:r>
             <a:endParaRPr lang="en-US" sz="1000" dirty="0"/>
           </a:p>
@@ -5120,7 +6006,7 @@
 </p:sld>
 </file>
 
-<file path=ppt/slides/slide14.xml><?xml version="1.0" encoding="utf-8"?>
+<file path=ppt/slides/slide15.xml><?xml version="1.0" encoding="utf-8"?>
 <p:sld xmlns:a="http://schemas.openxmlformats.org/drawingml/2006/main" xmlns:r="http://schemas.openxmlformats.org/officeDocument/2006/relationships" xmlns:p="http://schemas.openxmlformats.org/presentationml/2006/main">
   <p:cSld name="Slide 12">
     <p:bg>
@@ -5674,7 +6560,7 @@
                 <a:ea typeface="Calibri" pitchFamily="34" charset="-122"/>
                 <a:cs typeface="Calibri" pitchFamily="34" charset="-120"/>
               </a:rPr>
-              <a:t>14</a:t>
+              <a:t>15</a:t>
             </a:r>
             <a:endParaRPr lang="en-US" sz="1000" dirty="0"/>
           </a:p>
@@ -5727,7 +6613,7 @@
 </p:sld>
 </file>
 
-<file path=ppt/slides/slide15.xml><?xml version="1.0" encoding="utf-8"?>
+<file path=ppt/slides/slide16.xml><?xml version="1.0" encoding="utf-8"?>
 <p:sld xmlns:a="http://schemas.openxmlformats.org/drawingml/2006/main" xmlns:r="http://schemas.openxmlformats.org/officeDocument/2006/relationships" xmlns:p="http://schemas.openxmlformats.org/presentationml/2006/main">
   <p:cSld name="Slide 13">
     <p:bg>
@@ -6351,7 +7237,7 @@
                 <a:ea typeface="Calibri" pitchFamily="34" charset="-122"/>
                 <a:cs typeface="Calibri" pitchFamily="34" charset="-120"/>
               </a:rPr>
-              <a:t>15</a:t>
+              <a:t>16</a:t>
             </a:r>
             <a:endParaRPr lang="en-US" sz="1000" dirty="0"/>
           </a:p>
@@ -6404,7 +7290,7 @@
 </p:sld>
 </file>
 
-<file path=ppt/slides/slide16.xml><?xml version="1.0" encoding="utf-8"?>
+<file path=ppt/slides/slide17.xml><?xml version="1.0" encoding="utf-8"?>
 <p:sld xmlns:a="http://schemas.openxmlformats.org/drawingml/2006/main" xmlns:r="http://schemas.openxmlformats.org/officeDocument/2006/relationships" xmlns:p="http://schemas.openxmlformats.org/presentationml/2006/main">
   <p:cSld name="Slide 14">
     <p:bg>
@@ -10480,6 +11366,887 @@
 
 <file path=ppt/slides/slide8.xml><?xml version="1.0" encoding="utf-8"?>
 <p:sld xmlns:a="http://schemas.openxmlformats.org/drawingml/2006/main" xmlns:r="http://schemas.openxmlformats.org/officeDocument/2006/relationships" xmlns:p="http://schemas.openxmlformats.org/presentationml/2006/main">
+  <p:cSld name="Slide 9">
+    <p:bg>
+      <p:bgPr>
+        <a:solidFill>
+          <a:srgbClr val="F4F7F6"/>
+        </a:solidFill>
+      </p:bgPr>
+    </p:bg>
+    <p:spTree>
+      <p:nvGrpSpPr>
+        <p:cNvPr id="1" name=""/>
+        <p:cNvGrpSpPr/>
+        <p:nvPr/>
+      </p:nvGrpSpPr>
+      <p:grpSpPr>
+        <a:xfrm>
+          <a:off x="0" y="0"/>
+          <a:ext cx="0" cy="0"/>
+          <a:chOff x="0" y="0"/>
+          <a:chExt cx="0" cy="0"/>
+        </a:xfrm>
+      </p:grpSpPr>
+      <p:sp>
+        <p:nvSpPr>
+          <p:cNvPr id="2" name="Text 0"/>
+          <p:cNvSpPr/>
+          <p:nvPr/>
+        </p:nvSpPr>
+        <p:spPr>
+          <a:xfrm>
+            <a:off x="658368" y="457200"/>
+            <a:ext cx="8229600" cy="320040"/>
+          </a:xfrm>
+          <a:prstGeom prst="rect">
+            <a:avLst/>
+          </a:prstGeom>
+          <a:noFill/>
+          <a:ln/>
+        </p:spPr>
+        <p:txBody>
+          <a:bodyPr wrap="square" lIns="0" tIns="0" rIns="0" bIns="0" rtlCol="0" anchor="ctr"/>
+          <a:lstStyle/>
+          <a:p>
+            <a:pPr algn="l" indent="0" marL="0">
+              <a:buNone/>
+            </a:pPr>
+            <a:r>
+              <a:rPr lang="en-US" sz="1250" b="1" spc="300" kern="0" dirty="0">
+                <a:solidFill>
+                  <a:srgbClr val="37A278"/>
+                </a:solidFill>
+                <a:latin typeface="Calibri" pitchFamily="34" charset="0"/>
+                <a:ea typeface="Calibri" pitchFamily="34" charset="-122"/>
+                <a:cs typeface="Calibri" pitchFamily="34" charset="-120"/>
+              </a:rPr>
+              <a:t>THE UNLOCK</a:t>
+            </a:r>
+            <a:endParaRPr lang="en-US" sz="1250" dirty="0"/>
+          </a:p>
+        </p:txBody>
+      </p:sp>
+      <p:sp>
+        <p:nvSpPr>
+          <p:cNvPr id="3" name="Text 1"/>
+          <p:cNvSpPr/>
+          <p:nvPr/>
+        </p:nvSpPr>
+        <p:spPr>
+          <a:xfrm>
+            <a:off x="658368" y="841248"/>
+            <a:ext cx="10872216" cy="1051560"/>
+          </a:xfrm>
+          <a:prstGeom prst="rect">
+            <a:avLst/>
+          </a:prstGeom>
+          <a:noFill/>
+          <a:ln/>
+        </p:spPr>
+        <p:txBody>
+          <a:bodyPr wrap="square" lIns="0" tIns="0" rIns="0" bIns="0" rtlCol="0" anchor="ctr"/>
+          <a:lstStyle/>
+          <a:p>
+            <a:pPr algn="l" indent="0" marL="0">
+              <a:lnSpc>
+                <a:spcPct val="100000"/>
+              </a:lnSpc>
+              <a:buNone/>
+            </a:pPr>
+            <a:r>
+              <a:rPr lang="en-US" sz="3400" b="1" dirty="0">
+                <a:solidFill>
+                  <a:srgbClr val="123024"/>
+                </a:solidFill>
+                <a:latin typeface="Calibri" pitchFamily="34" charset="0"/>
+                <a:ea typeface="Calibri" pitchFamily="34" charset="-122"/>
+                <a:cs typeface="Calibri" pitchFamily="34" charset="-120"/>
+              </a:rPr>
+              <a:t>An online-only, AI-native wholesaler.</a:t>
+            </a:r>
+            <a:endParaRPr lang="en-US" sz="3400" dirty="0"/>
+          </a:p>
+        </p:txBody>
+      </p:sp>
+      <p:sp>
+        <p:nvSpPr>
+          <p:cNvPr id="4" name="Text 2"/>
+          <p:cNvSpPr/>
+          <p:nvPr/>
+        </p:nvSpPr>
+        <p:spPr>
+          <a:xfrm>
+            <a:off x="658368" y="1828800"/>
+            <a:ext cx="10607040" cy="640080"/>
+          </a:xfrm>
+          <a:prstGeom prst="rect">
+            <a:avLst/>
+          </a:prstGeom>
+          <a:noFill/>
+          <a:ln/>
+        </p:spPr>
+        <p:txBody>
+          <a:bodyPr wrap="square" lIns="0" tIns="0" rIns="0" bIns="0" rtlCol="0" anchor="ctr"/>
+          <a:lstStyle/>
+          <a:p>
+            <a:pPr indent="0" marL="0">
+              <a:lnSpc>
+                <a:spcPct val="115000"/>
+              </a:lnSpc>
+              <a:buNone/>
+            </a:pPr>
+            <a:r>
+              <a:rPr lang="en-US" sz="1600" dirty="0">
+                <a:solidFill>
+                  <a:srgbClr val="12201A"/>
+                </a:solidFill>
+                <a:latin typeface="Calibri" pitchFamily="34" charset="0"/>
+                <a:ea typeface="Calibri" pitchFamily="34" charset="-122"/>
+                <a:cs typeface="Calibri" pitchFamily="34" charset="-120"/>
+              </a:rPr>
+              <a:t>Wholesalers doubled the price because they owned the last mile and forced chefs onto software they hated. Two AI shifts remove that moat — so we run it all online, with zero trucks and zero warehouses.</a:t>
+            </a:r>
+            <a:endParaRPr lang="en-US" sz="1600" dirty="0"/>
+          </a:p>
+        </p:txBody>
+      </p:sp>
+      <p:sp>
+        <p:nvSpPr>
+          <p:cNvPr id="5" name="Shape 3"/>
+          <p:cNvSpPr/>
+          <p:nvPr/>
+        </p:nvSpPr>
+        <p:spPr>
+          <a:xfrm>
+            <a:off x="658368" y="2743200"/>
+            <a:ext cx="3383280" cy="3017520"/>
+          </a:xfrm>
+          <a:prstGeom prst="roundRect">
+            <a:avLst>
+              <a:gd name="adj" fmla="val 4242"/>
+            </a:avLst>
+          </a:prstGeom>
+          <a:solidFill>
+            <a:srgbClr val="FFFFFF"/>
+          </a:solidFill>
+          <a:ln/>
+          <a:effectLst>
+            <a:outerShdw sx="100000" sy="100000" kx="0" ky="0" algn="bl" rotWithShape="0" blurRad="127000" dist="38100" dir="5400000">
+              <a:srgbClr val="1B3A2E">
+                <a:alpha val="16000"/>
+              </a:srgbClr>
+            </a:outerShdw>
+          </a:effectLst>
+        </p:spPr>
+        <p:txBody>
+          <a:bodyPr/>
+          <a:p/>
+        </p:txBody>
+      </p:sp>
+      <p:sp>
+        <p:nvSpPr>
+          <p:cNvPr id="6" name="Shape 4"/>
+          <p:cNvSpPr/>
+          <p:nvPr/>
+        </p:nvSpPr>
+        <p:spPr>
+          <a:xfrm>
+            <a:off x="978408" y="3090672"/>
+            <a:ext cx="777240" cy="777240"/>
+          </a:xfrm>
+          <a:prstGeom prst="ellipse">
+            <a:avLst/>
+          </a:prstGeom>
+          <a:solidFill>
+            <a:srgbClr val="2E8564"/>
+          </a:solidFill>
+          <a:ln/>
+        </p:spPr>
+        <p:txBody>
+          <a:bodyPr/>
+          <a:p/>
+        </p:txBody>
+      </p:sp>
+      <p:sp>
+        <p:nvSpPr>
+          <p:cNvPr id="7" name="Text 5"/>
+          <p:cNvSpPr/>
+          <p:nvPr/>
+        </p:nvSpPr>
+        <p:spPr>
+          <a:xfrm>
+            <a:off x="978408" y="3090672"/>
+            <a:ext cx="777240" cy="777240"/>
+          </a:xfrm>
+          <a:prstGeom prst="rect">
+            <a:avLst/>
+          </a:prstGeom>
+          <a:noFill/>
+          <a:ln/>
+        </p:spPr>
+        <p:txBody>
+          <a:bodyPr wrap="square" lIns="0" tIns="0" rIns="0" bIns="0" rtlCol="0" anchor="ctr"/>
+          <a:lstStyle/>
+          <a:p>
+            <a:pPr algn="ctr" indent="0" marL="0">
+              <a:buNone/>
+            </a:pPr>
+            <a:r>
+              <a:rPr lang="en-US" sz="3000" b="1" dirty="0">
+                <a:solidFill>
+                  <a:srgbClr val="FFFFFF"/>
+                </a:solidFill>
+                <a:latin typeface="Calibri" pitchFamily="34" charset="0"/>
+                <a:ea typeface="Calibri" pitchFamily="34" charset="-122"/>
+                <a:cs typeface="Calibri" pitchFamily="34" charset="-120"/>
+              </a:rPr>
+              <a:t>1</a:t>
+            </a:r>
+            <a:endParaRPr lang="en-US" sz="3000" dirty="0"/>
+          </a:p>
+        </p:txBody>
+      </p:sp>
+      <p:sp>
+        <p:nvSpPr>
+          <p:cNvPr id="8" name="Text 6"/>
+          <p:cNvSpPr/>
+          <p:nvPr/>
+        </p:nvSpPr>
+        <p:spPr>
+          <a:xfrm>
+            <a:off x="1892808" y="3154680"/>
+            <a:ext cx="1920240" cy="320040"/>
+          </a:xfrm>
+          <a:prstGeom prst="rect">
+            <a:avLst/>
+          </a:prstGeom>
+          <a:noFill/>
+          <a:ln/>
+        </p:spPr>
+        <p:txBody>
+          <a:bodyPr wrap="square" lIns="0" tIns="0" rIns="0" bIns="0" rtlCol="0" anchor="ctr"/>
+          <a:lstStyle/>
+          <a:p>
+            <a:pPr indent="0" marL="0">
+              <a:buNone/>
+            </a:pPr>
+            <a:r>
+              <a:rPr lang="en-US" sz="1100" b="1" spc="100" kern="0" dirty="0">
+                <a:solidFill>
+                  <a:srgbClr val="68786F"/>
+                </a:solidFill>
+                <a:latin typeface="Calibri" pitchFamily="34" charset="0"/>
+                <a:ea typeface="Calibri" pitchFamily="34" charset="-122"/>
+                <a:cs typeface="Calibri" pitchFamily="34" charset="-120"/>
+              </a:rPr>
+              <a:t>The wedge</a:t>
+            </a:r>
+            <a:endParaRPr lang="en-US" sz="1100" dirty="0"/>
+          </a:p>
+        </p:txBody>
+      </p:sp>
+      <p:sp>
+        <p:nvSpPr>
+          <p:cNvPr id="9" name="Text 7"/>
+          <p:cNvSpPr/>
+          <p:nvPr/>
+        </p:nvSpPr>
+        <p:spPr>
+          <a:xfrm>
+            <a:off x="1892808" y="3429000"/>
+            <a:ext cx="1920240" cy="457200"/>
+          </a:xfrm>
+          <a:prstGeom prst="rect">
+            <a:avLst/>
+          </a:prstGeom>
+          <a:noFill/>
+          <a:ln/>
+        </p:spPr>
+        <p:txBody>
+          <a:bodyPr wrap="square" lIns="0" tIns="0" rIns="0" bIns="0" rtlCol="0" anchor="ctr"/>
+          <a:lstStyle/>
+          <a:p>
+            <a:pPr indent="0" marL="0">
+              <a:buNone/>
+            </a:pPr>
+            <a:r>
+              <a:rPr lang="en-US" sz="1550" b="1" dirty="0">
+                <a:solidFill>
+                  <a:srgbClr val="123024"/>
+                </a:solidFill>
+                <a:latin typeface="Calibri" pitchFamily="34" charset="0"/>
+                <a:ea typeface="Calibri" pitchFamily="34" charset="-122"/>
+                <a:cs typeface="Calibri" pitchFamily="34" charset="-120"/>
+              </a:rPr>
+              <a:t>Everyone runs on text</a:t>
+            </a:r>
+            <a:endParaRPr lang="en-US" sz="1550" dirty="0"/>
+          </a:p>
+        </p:txBody>
+      </p:sp>
+      <p:sp>
+        <p:nvSpPr>
+          <p:cNvPr id="10" name="Text 8"/>
+          <p:cNvSpPr/>
+          <p:nvPr/>
+        </p:nvSpPr>
+        <p:spPr>
+          <a:xfrm>
+            <a:off x="978408" y="4251960"/>
+            <a:ext cx="2743200" cy="1280160"/>
+          </a:xfrm>
+          <a:prstGeom prst="rect">
+            <a:avLst/>
+          </a:prstGeom>
+          <a:noFill/>
+          <a:ln/>
+        </p:spPr>
+        <p:txBody>
+          <a:bodyPr wrap="square" lIns="0" tIns="0" rIns="0" bIns="0" rtlCol="0" anchor="ctr"/>
+          <a:lstStyle/>
+          <a:p>
+            <a:pPr indent="0" marL="0">
+              <a:lnSpc>
+                <a:spcPct val="118000"/>
+              </a:lnSpc>
+              <a:buNone/>
+            </a:pPr>
+            <a:r>
+              <a:rPr lang="en-US" sz="1280" dirty="0">
+                <a:solidFill>
+                  <a:srgbClr val="68786F"/>
+                </a:solidFill>
+                <a:latin typeface="Calibri" pitchFamily="34" charset="0"/>
+                <a:ea typeface="Calibri" pitchFamily="34" charset="-122"/>
+                <a:cs typeface="Calibri" pitchFamily="34" charset="-120"/>
+              </a:rPr>
+              <a:t>Farms, drivers and chefs already coordinate their whole day by text. Agripals meets them there — no portal, no app to learn.</a:t>
+            </a:r>
+            <a:endParaRPr lang="en-US" sz="1280" dirty="0"/>
+          </a:p>
+        </p:txBody>
+      </p:sp>
+      <p:sp>
+        <p:nvSpPr>
+          <p:cNvPr id="11" name="Shape 9"/>
+          <p:cNvSpPr/>
+          <p:nvPr/>
+        </p:nvSpPr>
+        <p:spPr>
+          <a:xfrm>
+            <a:off x="4334256" y="2743200"/>
+            <a:ext cx="3383280" cy="3017520"/>
+          </a:xfrm>
+          <a:prstGeom prst="roundRect">
+            <a:avLst>
+              <a:gd name="adj" fmla="val 4242"/>
+            </a:avLst>
+          </a:prstGeom>
+          <a:solidFill>
+            <a:srgbClr val="FFFFFF"/>
+          </a:solidFill>
+          <a:ln/>
+          <a:effectLst>
+            <a:outerShdw sx="100000" sy="100000" kx="0" ky="0" algn="bl" rotWithShape="0" blurRad="127000" dist="38100" dir="5400000">
+              <a:srgbClr val="1B3A2E">
+                <a:alpha val="16000"/>
+              </a:srgbClr>
+            </a:outerShdw>
+          </a:effectLst>
+        </p:spPr>
+        <p:txBody>
+          <a:bodyPr/>
+          <a:p/>
+        </p:txBody>
+      </p:sp>
+      <p:sp>
+        <p:nvSpPr>
+          <p:cNvPr id="12" name="Shape 10"/>
+          <p:cNvSpPr/>
+          <p:nvPr/>
+        </p:nvSpPr>
+        <p:spPr>
+          <a:xfrm>
+            <a:off x="4654296" y="3090672"/>
+            <a:ext cx="777240" cy="777240"/>
+          </a:xfrm>
+          <a:prstGeom prst="ellipse">
+            <a:avLst/>
+          </a:prstGeom>
+          <a:solidFill>
+            <a:srgbClr val="37A278"/>
+          </a:solidFill>
+          <a:ln/>
+        </p:spPr>
+        <p:txBody>
+          <a:bodyPr/>
+          <a:p/>
+        </p:txBody>
+      </p:sp>
+      <p:sp>
+        <p:nvSpPr>
+          <p:cNvPr id="13" name="Text 11"/>
+          <p:cNvSpPr/>
+          <p:nvPr/>
+        </p:nvSpPr>
+        <p:spPr>
+          <a:xfrm>
+            <a:off x="4654296" y="3090672"/>
+            <a:ext cx="777240" cy="777240"/>
+          </a:xfrm>
+          <a:prstGeom prst="rect">
+            <a:avLst/>
+          </a:prstGeom>
+          <a:noFill/>
+          <a:ln/>
+        </p:spPr>
+        <p:txBody>
+          <a:bodyPr wrap="square" lIns="0" tIns="0" rIns="0" bIns="0" rtlCol="0" anchor="ctr"/>
+          <a:lstStyle/>
+          <a:p>
+            <a:pPr algn="ctr" indent="0" marL="0">
+              <a:buNone/>
+            </a:pPr>
+            <a:r>
+              <a:rPr lang="en-US" sz="3000" b="1" dirty="0">
+                <a:solidFill>
+                  <a:srgbClr val="FFFFFF"/>
+                </a:solidFill>
+                <a:latin typeface="Calibri" pitchFamily="34" charset="0"/>
+                <a:ea typeface="Calibri" pitchFamily="34" charset="-122"/>
+                <a:cs typeface="Calibri" pitchFamily="34" charset="-120"/>
+              </a:rPr>
+              <a:t>2</a:t>
+            </a:r>
+            <a:endParaRPr lang="en-US" sz="3000" dirty="0"/>
+          </a:p>
+        </p:txBody>
+      </p:sp>
+      <p:sp>
+        <p:nvSpPr>
+          <p:cNvPr id="14" name="Text 12"/>
+          <p:cNvSpPr/>
+          <p:nvPr/>
+        </p:nvSpPr>
+        <p:spPr>
+          <a:xfrm>
+            <a:off x="5568696" y="3154680"/>
+            <a:ext cx="1920240" cy="320040"/>
+          </a:xfrm>
+          <a:prstGeom prst="rect">
+            <a:avLst/>
+          </a:prstGeom>
+          <a:noFill/>
+          <a:ln/>
+        </p:spPr>
+        <p:txBody>
+          <a:bodyPr wrap="square" lIns="0" tIns="0" rIns="0" bIns="0" rtlCol="0" anchor="ctr"/>
+          <a:lstStyle/>
+          <a:p>
+            <a:pPr indent="0" marL="0">
+              <a:buNone/>
+            </a:pPr>
+            <a:r>
+              <a:rPr lang="en-US" sz="1100" b="1" spc="100" kern="0" dirty="0">
+                <a:solidFill>
+                  <a:srgbClr val="68786F"/>
+                </a:solidFill>
+                <a:latin typeface="Calibri" pitchFamily="34" charset="0"/>
+                <a:ea typeface="Calibri" pitchFamily="34" charset="-122"/>
+                <a:cs typeface="Calibri" pitchFamily="34" charset="-120"/>
+              </a:rPr>
+              <a:t>Unlock 1</a:t>
+            </a:r>
+            <a:endParaRPr lang="en-US" sz="1100" dirty="0"/>
+          </a:p>
+        </p:txBody>
+      </p:sp>
+      <p:sp>
+        <p:nvSpPr>
+          <p:cNvPr id="15" name="Text 13"/>
+          <p:cNvSpPr/>
+          <p:nvPr/>
+        </p:nvSpPr>
+        <p:spPr>
+          <a:xfrm>
+            <a:off x="5568696" y="3429000"/>
+            <a:ext cx="1920240" cy="457200"/>
+          </a:xfrm>
+          <a:prstGeom prst="rect">
+            <a:avLst/>
+          </a:prstGeom>
+          <a:noFill/>
+          <a:ln/>
+        </p:spPr>
+        <p:txBody>
+          <a:bodyPr wrap="square" lIns="0" tIns="0" rIns="0" bIns="0" rtlCol="0" anchor="ctr"/>
+          <a:lstStyle/>
+          <a:p>
+            <a:pPr indent="0" marL="0">
+              <a:buNone/>
+            </a:pPr>
+            <a:r>
+              <a:rPr lang="en-US" sz="1550" b="1" dirty="0">
+                <a:solidFill>
+                  <a:srgbClr val="123024"/>
+                </a:solidFill>
+                <a:latin typeface="Calibri" pitchFamily="34" charset="0"/>
+                <a:ea typeface="Calibri" pitchFamily="34" charset="-122"/>
+                <a:cs typeface="Calibri" pitchFamily="34" charset="-120"/>
+              </a:rPr>
+              <a:t>Texts become orders</a:t>
+            </a:r>
+            <a:endParaRPr lang="en-US" sz="1550" dirty="0"/>
+          </a:p>
+        </p:txBody>
+      </p:sp>
+      <p:sp>
+        <p:nvSpPr>
+          <p:cNvPr id="16" name="Text 14"/>
+          <p:cNvSpPr/>
+          <p:nvPr/>
+        </p:nvSpPr>
+        <p:spPr>
+          <a:xfrm>
+            <a:off x="4654296" y="4251960"/>
+            <a:ext cx="2743200" cy="1280160"/>
+          </a:xfrm>
+          <a:prstGeom prst="rect">
+            <a:avLst/>
+          </a:prstGeom>
+          <a:noFill/>
+          <a:ln/>
+        </p:spPr>
+        <p:txBody>
+          <a:bodyPr wrap="square" lIns="0" tIns="0" rIns="0" bIns="0" rtlCol="0" anchor="ctr"/>
+          <a:lstStyle/>
+          <a:p>
+            <a:pPr indent="0" marL="0">
+              <a:lnSpc>
+                <a:spcPct val="118000"/>
+              </a:lnSpc>
+              <a:buNone/>
+            </a:pPr>
+            <a:r>
+              <a:rPr lang="en-US" sz="1280" dirty="0">
+                <a:solidFill>
+                  <a:srgbClr val="68786F"/>
+                </a:solidFill>
+                <a:latin typeface="Calibri" pitchFamily="34" charset="0"/>
+                <a:ea typeface="Calibri" pitchFamily="34" charset="-122"/>
+                <a:cs typeface="Calibri" pitchFamily="34" charset="-120"/>
+              </a:rPr>
+              <a:t>AI turns the messy back-and-forth of texts into clean, structured orders — like an Uber Eats ticket. Chefs stop typing into systems.</a:t>
+            </a:r>
+            <a:endParaRPr lang="en-US" sz="1280" dirty="0"/>
+          </a:p>
+        </p:txBody>
+      </p:sp>
+      <p:sp>
+        <p:nvSpPr>
+          <p:cNvPr id="17" name="Shape 15"/>
+          <p:cNvSpPr/>
+          <p:nvPr/>
+        </p:nvSpPr>
+        <p:spPr>
+          <a:xfrm>
+            <a:off x="8010144" y="2743200"/>
+            <a:ext cx="3383280" cy="3017520"/>
+          </a:xfrm>
+          <a:prstGeom prst="roundRect">
+            <a:avLst>
+              <a:gd name="adj" fmla="val 4242"/>
+            </a:avLst>
+          </a:prstGeom>
+          <a:solidFill>
+            <a:srgbClr val="FFFFFF"/>
+          </a:solidFill>
+          <a:ln/>
+          <a:effectLst>
+            <a:outerShdw sx="100000" sy="100000" kx="0" ky="0" algn="bl" rotWithShape="0" blurRad="127000" dist="38100" dir="5400000">
+              <a:srgbClr val="1B3A2E">
+                <a:alpha val="16000"/>
+              </a:srgbClr>
+            </a:outerShdw>
+          </a:effectLst>
+        </p:spPr>
+        <p:txBody>
+          <a:bodyPr/>
+          <a:p/>
+        </p:txBody>
+      </p:sp>
+      <p:sp>
+        <p:nvSpPr>
+          <p:cNvPr id="18" name="Shape 16"/>
+          <p:cNvSpPr/>
+          <p:nvPr/>
+        </p:nvSpPr>
+        <p:spPr>
+          <a:xfrm>
+            <a:off x="8330184" y="3090672"/>
+            <a:ext cx="777240" cy="777240"/>
+          </a:xfrm>
+          <a:prstGeom prst="ellipse">
+            <a:avLst/>
+          </a:prstGeom>
+          <a:solidFill>
+            <a:srgbClr val="4CC499"/>
+          </a:solidFill>
+          <a:ln/>
+        </p:spPr>
+        <p:txBody>
+          <a:bodyPr/>
+          <a:p/>
+        </p:txBody>
+      </p:sp>
+      <p:sp>
+        <p:nvSpPr>
+          <p:cNvPr id="19" name="Text 17"/>
+          <p:cNvSpPr/>
+          <p:nvPr/>
+        </p:nvSpPr>
+        <p:spPr>
+          <a:xfrm>
+            <a:off x="8330184" y="3090672"/>
+            <a:ext cx="777240" cy="777240"/>
+          </a:xfrm>
+          <a:prstGeom prst="rect">
+            <a:avLst/>
+          </a:prstGeom>
+          <a:noFill/>
+          <a:ln/>
+        </p:spPr>
+        <p:txBody>
+          <a:bodyPr wrap="square" lIns="0" tIns="0" rIns="0" bIns="0" rtlCol="0" anchor="ctr"/>
+          <a:lstStyle/>
+          <a:p>
+            <a:pPr algn="ctr" indent="0" marL="0">
+              <a:buNone/>
+            </a:pPr>
+            <a:r>
+              <a:rPr lang="en-US" sz="3000" b="1" dirty="0">
+                <a:solidFill>
+                  <a:srgbClr val="FFFFFF"/>
+                </a:solidFill>
+                <a:latin typeface="Calibri" pitchFamily="34" charset="0"/>
+                <a:ea typeface="Calibri" pitchFamily="34" charset="-122"/>
+                <a:cs typeface="Calibri" pitchFamily="34" charset="-120"/>
+              </a:rPr>
+              <a:t>3</a:t>
+            </a:r>
+            <a:endParaRPr lang="en-US" sz="3000" dirty="0"/>
+          </a:p>
+        </p:txBody>
+      </p:sp>
+      <p:sp>
+        <p:nvSpPr>
+          <p:cNvPr id="20" name="Text 18"/>
+          <p:cNvSpPr/>
+          <p:nvPr/>
+        </p:nvSpPr>
+        <p:spPr>
+          <a:xfrm>
+            <a:off x="9244584" y="3154680"/>
+            <a:ext cx="1920240" cy="320040"/>
+          </a:xfrm>
+          <a:prstGeom prst="rect">
+            <a:avLst/>
+          </a:prstGeom>
+          <a:noFill/>
+          <a:ln/>
+        </p:spPr>
+        <p:txBody>
+          <a:bodyPr wrap="square" lIns="0" tIns="0" rIns="0" bIns="0" rtlCol="0" anchor="ctr"/>
+          <a:lstStyle/>
+          <a:p>
+            <a:pPr indent="0" marL="0">
+              <a:buNone/>
+            </a:pPr>
+            <a:r>
+              <a:rPr lang="en-US" sz="1100" b="1" spc="100" kern="0" dirty="0">
+                <a:solidFill>
+                  <a:srgbClr val="68786F"/>
+                </a:solidFill>
+                <a:latin typeface="Calibri" pitchFamily="34" charset="0"/>
+                <a:ea typeface="Calibri" pitchFamily="34" charset="-122"/>
+                <a:cs typeface="Calibri" pitchFamily="34" charset="-120"/>
+              </a:rPr>
+              <a:t>Unlock 2</a:t>
+            </a:r>
+            <a:endParaRPr lang="en-US" sz="1100" dirty="0"/>
+          </a:p>
+        </p:txBody>
+      </p:sp>
+      <p:sp>
+        <p:nvSpPr>
+          <p:cNvPr id="21" name="Text 19"/>
+          <p:cNvSpPr/>
+          <p:nvPr/>
+        </p:nvSpPr>
+        <p:spPr>
+          <a:xfrm>
+            <a:off x="9244584" y="3429000"/>
+            <a:ext cx="1920240" cy="457200"/>
+          </a:xfrm>
+          <a:prstGeom prst="rect">
+            <a:avLst/>
+          </a:prstGeom>
+          <a:noFill/>
+          <a:ln/>
+        </p:spPr>
+        <p:txBody>
+          <a:bodyPr wrap="square" lIns="0" tIns="0" rIns="0" bIns="0" rtlCol="0" anchor="ctr"/>
+          <a:lstStyle/>
+          <a:p>
+            <a:pPr indent="0" marL="0">
+              <a:buNone/>
+            </a:pPr>
+            <a:r>
+              <a:rPr lang="en-US" sz="1550" b="1" dirty="0">
+                <a:solidFill>
+                  <a:srgbClr val="123024"/>
+                </a:solidFill>
+                <a:latin typeface="Calibri" pitchFamily="34" charset="0"/>
+                <a:ea typeface="Calibri" pitchFamily="34" charset="-122"/>
+                <a:cs typeface="Calibri" pitchFamily="34" charset="-120"/>
+              </a:rPr>
+              <a:t>AI runs the last mile</a:t>
+            </a:r>
+            <a:endParaRPr lang="en-US" sz="1550" dirty="0"/>
+          </a:p>
+        </p:txBody>
+      </p:sp>
+      <p:sp>
+        <p:nvSpPr>
+          <p:cNvPr id="22" name="Text 20"/>
+          <p:cNvSpPr/>
+          <p:nvPr/>
+        </p:nvSpPr>
+        <p:spPr>
+          <a:xfrm>
+            <a:off x="8330184" y="4251960"/>
+            <a:ext cx="2743200" cy="1280160"/>
+          </a:xfrm>
+          <a:prstGeom prst="rect">
+            <a:avLst/>
+          </a:prstGeom>
+          <a:noFill/>
+          <a:ln/>
+        </p:spPr>
+        <p:txBody>
+          <a:bodyPr wrap="square" lIns="0" tIns="0" rIns="0" bIns="0" rtlCol="0" anchor="ctr"/>
+          <a:lstStyle/>
+          <a:p>
+            <a:pPr indent="0" marL="0">
+              <a:lnSpc>
+                <a:spcPct val="118000"/>
+              </a:lnSpc>
+              <a:buNone/>
+            </a:pPr>
+            <a:r>
+              <a:rPr lang="en-US" sz="1280" dirty="0">
+                <a:solidFill>
+                  <a:srgbClr val="68786F"/>
+                </a:solidFill>
+                <a:latin typeface="Calibri" pitchFamily="34" charset="0"/>
+                <a:ea typeface="Calibri" pitchFamily="34" charset="-122"/>
+                <a:cs typeface="Calibri" pitchFamily="34" charset="-120"/>
+              </a:rPr>
+              <a:t>AI coordinates delivery — the exact edge that was the wholesaler's moat. Zero-CapEx: no fleet, no depots.</a:t>
+            </a:r>
+            <a:endParaRPr lang="en-US" sz="1280" dirty="0"/>
+          </a:p>
+        </p:txBody>
+      </p:sp>
+      <p:sp>
+        <p:nvSpPr>
+          <p:cNvPr id="23" name="Text 21"/>
+          <p:cNvSpPr/>
+          <p:nvPr/>
+        </p:nvSpPr>
+        <p:spPr>
+          <a:xfrm>
+            <a:off x="11183112" y="6355080"/>
+            <a:ext cx="548640" cy="274320"/>
+          </a:xfrm>
+          <a:prstGeom prst="rect">
+            <a:avLst/>
+          </a:prstGeom>
+          <a:noFill/>
+          <a:ln/>
+        </p:spPr>
+        <p:txBody>
+          <a:bodyPr wrap="square" lIns="0" tIns="0" rIns="0" bIns="0" rtlCol="0" anchor="ctr"/>
+          <a:lstStyle/>
+          <a:p>
+            <a:pPr algn="r" indent="0" marL="0">
+              <a:buNone/>
+            </a:pPr>
+            <a:r>
+              <a:rPr lang="en-US" sz="1000" dirty="0">
+                <a:solidFill>
+                  <a:srgbClr val="68786F"/>
+                </a:solidFill>
+                <a:latin typeface="Calibri" pitchFamily="34" charset="0"/>
+                <a:ea typeface="Calibri" pitchFamily="34" charset="-122"/>
+                <a:cs typeface="Calibri" pitchFamily="34" charset="-120"/>
+              </a:rPr>
+              <a:t>08</a:t>
+            </a:r>
+            <a:endParaRPr lang="en-US" sz="1000" dirty="0"/>
+          </a:p>
+        </p:txBody>
+      </p:sp>
+      <p:sp>
+        <p:nvSpPr>
+          <p:cNvPr id="24" name="Text 22"/>
+          <p:cNvSpPr/>
+          <p:nvPr/>
+        </p:nvSpPr>
+        <p:spPr>
+          <a:xfrm>
+            <a:off x="658368" y="6355080"/>
+            <a:ext cx="2743200" cy="274320"/>
+          </a:xfrm>
+          <a:prstGeom prst="rect">
+            <a:avLst/>
+          </a:prstGeom>
+          <a:noFill/>
+          <a:ln/>
+        </p:spPr>
+        <p:txBody>
+          <a:bodyPr wrap="square" lIns="0" tIns="0" rIns="0" bIns="0" rtlCol="0" anchor="ctr"/>
+          <a:lstStyle/>
+          <a:p>
+            <a:pPr indent="0" marL="0">
+              <a:buNone/>
+            </a:pPr>
+            <a:r>
+              <a:rPr lang="en-US" sz="1000" b="1" dirty="0">
+                <a:solidFill>
+                  <a:srgbClr val="68786F"/>
+                </a:solidFill>
+                <a:latin typeface="Calibri" pitchFamily="34" charset="0"/>
+                <a:ea typeface="Calibri" pitchFamily="34" charset="-122"/>
+                <a:cs typeface="Calibri" pitchFamily="34" charset="-120"/>
+              </a:rPr>
+              <a:t>Agripals</a:t>
+            </a:r>
+            <a:endParaRPr lang="en-US" sz="1000" dirty="0"/>
+          </a:p>
+        </p:txBody>
+      </p:sp>
+    </p:spTree>
+  </p:cSld>
+  <p:clrMapOvr>
+    <a:masterClrMapping/>
+  </p:clrMapOvr>
+</p:sld>
+</file>
+
+<file path=ppt/slides/slide9.xml><?xml version="1.0" encoding="utf-8"?>
+<p:sld xmlns:a="http://schemas.openxmlformats.org/drawingml/2006/main" xmlns:r="http://schemas.openxmlformats.org/officeDocument/2006/relationships" xmlns:p="http://schemas.openxmlformats.org/presentationml/2006/main">
   <p:cSld name="Slide 8">
     <p:bg>
       <p:bgPr>
@@ -10611,6 +12378,10 @@
             </a:outerShdw>
           </a:effectLst>
         </p:spPr>
+        <p:txBody>
+          <a:bodyPr/>
+          <a:p/>
+        </p:txBody>
       </p:sp>
       <p:sp>
         <p:nvSpPr>
@@ -10631,6 +12402,10 @@
           </a:solidFill>
           <a:ln/>
         </p:spPr>
+        <p:txBody>
+          <a:bodyPr/>
+          <a:p/>
+        </p:txBody>
       </p:sp>
       <p:pic>
         <p:nvPicPr>
@@ -10765,6 +12540,10 @@
             </a:outerShdw>
           </a:effectLst>
         </p:spPr>
+        <p:txBody>
+          <a:bodyPr/>
+          <a:p/>
+        </p:txBody>
       </p:sp>
       <p:sp>
         <p:nvSpPr>
@@ -10785,6 +12564,10 @@
           </a:solidFill>
           <a:ln/>
         </p:spPr>
+        <p:txBody>
+          <a:bodyPr/>
+          <a:p/>
+        </p:txBody>
       </p:sp>
       <p:pic>
         <p:nvPicPr>
@@ -10919,6 +12702,10 @@
             </a:outerShdw>
           </a:effectLst>
         </p:spPr>
+        <p:txBody>
+          <a:bodyPr/>
+          <a:p/>
+        </p:txBody>
       </p:sp>
       <p:sp>
         <p:nvSpPr>
@@ -10939,6 +12726,10 @@
           </a:solidFill>
           <a:ln/>
         </p:spPr>
+        <p:txBody>
+          <a:bodyPr/>
+          <a:p/>
+        </p:txBody>
       </p:sp>
       <p:pic>
         <p:nvPicPr>
@@ -11078,7 +12869,7 @@
                 <a:ea typeface="Calibri" pitchFamily="34" charset="-122"/>
                 <a:cs typeface="Calibri" pitchFamily="34" charset="-120"/>
               </a:rPr>
-              <a:t>08</a:t>
+              <a:t>09</a:t>
             </a:r>
             <a:endParaRPr lang="en-US" sz="1000" dirty="0"/>
           </a:p>
@@ -11087,863 +12878,6 @@
       <p:sp>
         <p:nvSpPr>
           <p:cNvPr id="20" name="Text 15"/>
-          <p:cNvSpPr/>
-          <p:nvPr/>
-        </p:nvSpPr>
-        <p:spPr>
-          <a:xfrm>
-            <a:off x="658368" y="6355080"/>
-            <a:ext cx="2743200" cy="274320"/>
-          </a:xfrm>
-          <a:prstGeom prst="rect">
-            <a:avLst/>
-          </a:prstGeom>
-          <a:noFill/>
-          <a:ln/>
-        </p:spPr>
-        <p:txBody>
-          <a:bodyPr wrap="square" lIns="0" tIns="0" rIns="0" bIns="0" rtlCol="0" anchor="ctr"/>
-          <a:lstStyle/>
-          <a:p>
-            <a:pPr indent="0" marL="0">
-              <a:buNone/>
-            </a:pPr>
-            <a:r>
-              <a:rPr lang="en-US" sz="1000" b="1" dirty="0">
-                <a:solidFill>
-                  <a:srgbClr val="68786F"/>
-                </a:solidFill>
-                <a:latin typeface="Calibri" pitchFamily="34" charset="0"/>
-                <a:ea typeface="Calibri" pitchFamily="34" charset="-122"/>
-                <a:cs typeface="Calibri" pitchFamily="34" charset="-120"/>
-              </a:rPr>
-              <a:t>Agripals</a:t>
-            </a:r>
-            <a:endParaRPr lang="en-US" sz="1000" dirty="0"/>
-          </a:p>
-        </p:txBody>
-      </p:sp>
-    </p:spTree>
-  </p:cSld>
-  <p:clrMapOvr>
-    <a:masterClrMapping/>
-  </p:clrMapOvr>
-</p:sld>
-</file>
-
-<file path=ppt/slides/slide9.xml><?xml version="1.0" encoding="utf-8"?>
-<p:sld xmlns:a="http://schemas.openxmlformats.org/drawingml/2006/main" xmlns:r="http://schemas.openxmlformats.org/officeDocument/2006/relationships" xmlns:p="http://schemas.openxmlformats.org/presentationml/2006/main">
-  <p:cSld name="Slide 9">
-    <p:bg>
-      <p:bgPr>
-        <a:solidFill>
-          <a:srgbClr val="F4F7F6"/>
-        </a:solidFill>
-      </p:bgPr>
-    </p:bg>
-    <p:spTree>
-      <p:nvGrpSpPr>
-        <p:cNvPr id="1" name=""/>
-        <p:cNvGrpSpPr/>
-        <p:nvPr/>
-      </p:nvGrpSpPr>
-      <p:grpSpPr>
-        <a:xfrm>
-          <a:off x="0" y="0"/>
-          <a:ext cx="0" cy="0"/>
-          <a:chOff x="0" y="0"/>
-          <a:chExt cx="0" cy="0"/>
-        </a:xfrm>
-      </p:grpSpPr>
-      <p:sp>
-        <p:nvSpPr>
-          <p:cNvPr id="2" name="Text 0"/>
-          <p:cNvSpPr/>
-          <p:nvPr/>
-        </p:nvSpPr>
-        <p:spPr>
-          <a:xfrm>
-            <a:off x="658368" y="457200"/>
-            <a:ext cx="8229600" cy="320040"/>
-          </a:xfrm>
-          <a:prstGeom prst="rect">
-            <a:avLst/>
-          </a:prstGeom>
-          <a:noFill/>
-          <a:ln/>
-        </p:spPr>
-        <p:txBody>
-          <a:bodyPr wrap="square" lIns="0" tIns="0" rIns="0" bIns="0" rtlCol="0" anchor="ctr"/>
-          <a:lstStyle/>
-          <a:p>
-            <a:pPr algn="l" indent="0" marL="0">
-              <a:buNone/>
-            </a:pPr>
-            <a:r>
-              <a:rPr lang="en-US" sz="1250" b="1" spc="300" kern="0" dirty="0">
-                <a:solidFill>
-                  <a:srgbClr val="37A278"/>
-                </a:solidFill>
-                <a:latin typeface="Calibri" pitchFamily="34" charset="0"/>
-                <a:ea typeface="Calibri" pitchFamily="34" charset="-122"/>
-                <a:cs typeface="Calibri" pitchFamily="34" charset="-120"/>
-              </a:rPr>
-              <a:t>GO TO MARKET</a:t>
-            </a:r>
-            <a:endParaRPr lang="en-US" sz="1250" dirty="0"/>
-          </a:p>
-        </p:txBody>
-      </p:sp>
-      <p:sp>
-        <p:nvSpPr>
-          <p:cNvPr id="3" name="Text 1"/>
-          <p:cNvSpPr/>
-          <p:nvPr/>
-        </p:nvSpPr>
-        <p:spPr>
-          <a:xfrm>
-            <a:off x="658368" y="841248"/>
-            <a:ext cx="10872216" cy="1051560"/>
-          </a:xfrm>
-          <a:prstGeom prst="rect">
-            <a:avLst/>
-          </a:prstGeom>
-          <a:noFill/>
-          <a:ln/>
-        </p:spPr>
-        <p:txBody>
-          <a:bodyPr wrap="square" lIns="0" tIns="0" rIns="0" bIns="0" rtlCol="0" anchor="ctr"/>
-          <a:lstStyle/>
-          <a:p>
-            <a:pPr algn="l" indent="0" marL="0">
-              <a:lnSpc>
-                <a:spcPct val="100000"/>
-              </a:lnSpc>
-              <a:buNone/>
-            </a:pPr>
-            <a:r>
-              <a:rPr lang="en-US" sz="3400" b="1" dirty="0">
-                <a:solidFill>
-                  <a:srgbClr val="123024"/>
-                </a:solidFill>
-                <a:latin typeface="Calibri" pitchFamily="34" charset="0"/>
-                <a:ea typeface="Calibri" pitchFamily="34" charset="-122"/>
-                <a:cs typeface="Calibri" pitchFamily="34" charset="-120"/>
-              </a:rPr>
-              <a:t>One city. One product. One clear proof point.</a:t>
-            </a:r>
-            <a:endParaRPr lang="en-US" sz="3400" dirty="0"/>
-          </a:p>
-        </p:txBody>
-      </p:sp>
-      <p:sp>
-        <p:nvSpPr>
-          <p:cNvPr id="4" name="Text 2"/>
-          <p:cNvSpPr/>
-          <p:nvPr/>
-        </p:nvSpPr>
-        <p:spPr>
-          <a:xfrm>
-            <a:off x="658368" y="1828800"/>
-            <a:ext cx="10607040" cy="640080"/>
-          </a:xfrm>
-          <a:prstGeom prst="rect">
-            <a:avLst/>
-          </a:prstGeom>
-          <a:noFill/>
-          <a:ln/>
-        </p:spPr>
-        <p:txBody>
-          <a:bodyPr wrap="square" lIns="0" tIns="0" rIns="0" bIns="0" rtlCol="0" anchor="ctr"/>
-          <a:lstStyle/>
-          <a:p>
-            <a:pPr indent="0" marL="0">
-              <a:lnSpc>
-                <a:spcPct val="115000"/>
-              </a:lnSpc>
-              <a:buNone/>
-            </a:pPr>
-            <a:r>
-              <a:rPr lang="en-US" sz="1600" dirty="0">
-                <a:solidFill>
-                  <a:srgbClr val="12201A"/>
-                </a:solidFill>
-                <a:latin typeface="Calibri" pitchFamily="34" charset="0"/>
-                <a:ea typeface="Calibri" pitchFamily="34" charset="-122"/>
-                <a:cs typeface="Calibri" pitchFamily="34" charset="-120"/>
-              </a:rPr>
-              <a:t>San Francisco oysters — direct from Northern California farms into SF restaurants — then expand the same rails outward.</a:t>
-            </a:r>
-            <a:endParaRPr lang="en-US" sz="1600" dirty="0"/>
-          </a:p>
-        </p:txBody>
-      </p:sp>
-      <p:sp>
-        <p:nvSpPr>
-          <p:cNvPr id="5" name="Shape 3"/>
-          <p:cNvSpPr/>
-          <p:nvPr/>
-        </p:nvSpPr>
-        <p:spPr>
-          <a:xfrm>
-            <a:off x="658368" y="2743200"/>
-            <a:ext cx="3383280" cy="3017520"/>
-          </a:xfrm>
-          <a:prstGeom prst="roundRect">
-            <a:avLst>
-              <a:gd name="adj" fmla="val 4242"/>
-            </a:avLst>
-          </a:prstGeom>
-          <a:solidFill>
-            <a:srgbClr val="FFFFFF"/>
-          </a:solidFill>
-          <a:ln/>
-          <a:effectLst>
-            <a:outerShdw sx="100000" sy="100000" kx="0" ky="0" algn="bl" rotWithShape="0" blurRad="127000" dist="38100" dir="5400000">
-              <a:srgbClr val="1B3A2E">
-                <a:alpha val="16000"/>
-              </a:srgbClr>
-            </a:outerShdw>
-          </a:effectLst>
-        </p:spPr>
-      </p:sp>
-      <p:sp>
-        <p:nvSpPr>
-          <p:cNvPr id="6" name="Shape 4"/>
-          <p:cNvSpPr/>
-          <p:nvPr/>
-        </p:nvSpPr>
-        <p:spPr>
-          <a:xfrm>
-            <a:off x="978408" y="3090672"/>
-            <a:ext cx="777240" cy="777240"/>
-          </a:xfrm>
-          <a:prstGeom prst="ellipse">
-            <a:avLst/>
-          </a:prstGeom>
-          <a:solidFill>
-            <a:srgbClr val="2E8564"/>
-          </a:solidFill>
-          <a:ln/>
-        </p:spPr>
-      </p:sp>
-      <p:sp>
-        <p:nvSpPr>
-          <p:cNvPr id="7" name="Text 5"/>
-          <p:cNvSpPr/>
-          <p:nvPr/>
-        </p:nvSpPr>
-        <p:spPr>
-          <a:xfrm>
-            <a:off x="978408" y="3090672"/>
-            <a:ext cx="777240" cy="777240"/>
-          </a:xfrm>
-          <a:prstGeom prst="rect">
-            <a:avLst/>
-          </a:prstGeom>
-          <a:noFill/>
-          <a:ln/>
-        </p:spPr>
-        <p:txBody>
-          <a:bodyPr wrap="square" lIns="0" tIns="0" rIns="0" bIns="0" rtlCol="0" anchor="ctr"/>
-          <a:lstStyle/>
-          <a:p>
-            <a:pPr algn="ctr" indent="0" marL="0">
-              <a:buNone/>
-            </a:pPr>
-            <a:r>
-              <a:rPr lang="en-US" sz="3000" b="1" dirty="0">
-                <a:solidFill>
-                  <a:srgbClr val="FFFFFF"/>
-                </a:solidFill>
-                <a:latin typeface="Calibri" pitchFamily="34" charset="0"/>
-                <a:ea typeface="Calibri" pitchFamily="34" charset="-122"/>
-                <a:cs typeface="Calibri" pitchFamily="34" charset="-120"/>
-              </a:rPr>
-              <a:t>1</a:t>
-            </a:r>
-            <a:endParaRPr lang="en-US" sz="3000" dirty="0"/>
-          </a:p>
-        </p:txBody>
-      </p:sp>
-      <p:sp>
-        <p:nvSpPr>
-          <p:cNvPr id="8" name="Text 6"/>
-          <p:cNvSpPr/>
-          <p:nvPr/>
-        </p:nvSpPr>
-        <p:spPr>
-          <a:xfrm>
-            <a:off x="1892808" y="3154680"/>
-            <a:ext cx="1920240" cy="320040"/>
-          </a:xfrm>
-          <a:prstGeom prst="rect">
-            <a:avLst/>
-          </a:prstGeom>
-          <a:noFill/>
-          <a:ln/>
-        </p:spPr>
-        <p:txBody>
-          <a:bodyPr wrap="square" lIns="0" tIns="0" rIns="0" bIns="0" rtlCol="0" anchor="ctr"/>
-          <a:lstStyle/>
-          <a:p>
-            <a:pPr indent="0" marL="0">
-              <a:buNone/>
-            </a:pPr>
-            <a:r>
-              <a:rPr lang="en-US" sz="1100" b="1" spc="100" kern="0" dirty="0">
-                <a:solidFill>
-                  <a:srgbClr val="68786F"/>
-                </a:solidFill>
-                <a:latin typeface="Calibri" pitchFamily="34" charset="0"/>
-                <a:ea typeface="Calibri" pitchFamily="34" charset="-122"/>
-                <a:cs typeface="Calibri" pitchFamily="34" charset="-120"/>
-              </a:rPr>
-              <a:t>Phase 1</a:t>
-            </a:r>
-            <a:endParaRPr lang="en-US" sz="1100" dirty="0"/>
-          </a:p>
-        </p:txBody>
-      </p:sp>
-      <p:sp>
-        <p:nvSpPr>
-          <p:cNvPr id="9" name="Text 7"/>
-          <p:cNvSpPr/>
-          <p:nvPr/>
-        </p:nvSpPr>
-        <p:spPr>
-          <a:xfrm>
-            <a:off x="1892808" y="3429000"/>
-            <a:ext cx="1920240" cy="457200"/>
-          </a:xfrm>
-          <a:prstGeom prst="rect">
-            <a:avLst/>
-          </a:prstGeom>
-          <a:noFill/>
-          <a:ln/>
-        </p:spPr>
-        <p:txBody>
-          <a:bodyPr wrap="square" lIns="0" tIns="0" rIns="0" bIns="0" rtlCol="0" anchor="ctr"/>
-          <a:lstStyle/>
-          <a:p>
-            <a:pPr indent="0" marL="0">
-              <a:buNone/>
-            </a:pPr>
-            <a:r>
-              <a:rPr lang="en-US" sz="1550" b="1" dirty="0">
-                <a:solidFill>
-                  <a:srgbClr val="123024"/>
-                </a:solidFill>
-                <a:latin typeface="Calibri" pitchFamily="34" charset="0"/>
-                <a:ea typeface="Calibri" pitchFamily="34" charset="-122"/>
-                <a:cs typeface="Calibri" pitchFamily="34" charset="-120"/>
-              </a:rPr>
-              <a:t>SF oysters</a:t>
-            </a:r>
-            <a:endParaRPr lang="en-US" sz="1550" dirty="0"/>
-          </a:p>
-        </p:txBody>
-      </p:sp>
-      <p:sp>
-        <p:nvSpPr>
-          <p:cNvPr id="10" name="Text 8"/>
-          <p:cNvSpPr/>
-          <p:nvPr/>
-        </p:nvSpPr>
-        <p:spPr>
-          <a:xfrm>
-            <a:off x="978408" y="4251960"/>
-            <a:ext cx="2743200" cy="1280160"/>
-          </a:xfrm>
-          <a:prstGeom prst="rect">
-            <a:avLst/>
-          </a:prstGeom>
-          <a:noFill/>
-          <a:ln/>
-        </p:spPr>
-        <p:txBody>
-          <a:bodyPr wrap="square" lIns="0" tIns="0" rIns="0" bIns="0" rtlCol="0" anchor="ctr"/>
-          <a:lstStyle/>
-          <a:p>
-            <a:pPr indent="0" marL="0">
-              <a:lnSpc>
-                <a:spcPct val="118000"/>
-              </a:lnSpc>
-              <a:buNone/>
-            </a:pPr>
-            <a:r>
-              <a:rPr lang="en-US" sz="1280" dirty="0">
-                <a:solidFill>
-                  <a:srgbClr val="68786F"/>
-                </a:solidFill>
-                <a:latin typeface="Calibri" pitchFamily="34" charset="0"/>
-                <a:ea typeface="Calibri" pitchFamily="34" charset="-122"/>
-                <a:cs typeface="Calibri" pitchFamily="34" charset="-120"/>
-              </a:rPr>
-              <a:t>~10 oyster farmers, 10–20 restaurants, one reliable cold-chain logistics partner.</a:t>
-            </a:r>
-            <a:endParaRPr lang="en-US" sz="1280" dirty="0"/>
-          </a:p>
-        </p:txBody>
-      </p:sp>
-      <p:sp>
-        <p:nvSpPr>
-          <p:cNvPr id="11" name="Shape 9"/>
-          <p:cNvSpPr/>
-          <p:nvPr/>
-        </p:nvSpPr>
-        <p:spPr>
-          <a:xfrm>
-            <a:off x="4334256" y="2743200"/>
-            <a:ext cx="3383280" cy="3017520"/>
-          </a:xfrm>
-          <a:prstGeom prst="roundRect">
-            <a:avLst>
-              <a:gd name="adj" fmla="val 4242"/>
-            </a:avLst>
-          </a:prstGeom>
-          <a:solidFill>
-            <a:srgbClr val="FFFFFF"/>
-          </a:solidFill>
-          <a:ln/>
-          <a:effectLst>
-            <a:outerShdw sx="100000" sy="100000" kx="0" ky="0" algn="bl" rotWithShape="0" blurRad="127000" dist="38100" dir="5400000">
-              <a:srgbClr val="1B3A2E">
-                <a:alpha val="16000"/>
-              </a:srgbClr>
-            </a:outerShdw>
-          </a:effectLst>
-        </p:spPr>
-      </p:sp>
-      <p:sp>
-        <p:nvSpPr>
-          <p:cNvPr id="12" name="Shape 10"/>
-          <p:cNvSpPr/>
-          <p:nvPr/>
-        </p:nvSpPr>
-        <p:spPr>
-          <a:xfrm>
-            <a:off x="4654296" y="3090672"/>
-            <a:ext cx="777240" cy="777240"/>
-          </a:xfrm>
-          <a:prstGeom prst="ellipse">
-            <a:avLst/>
-          </a:prstGeom>
-          <a:solidFill>
-            <a:srgbClr val="37A278"/>
-          </a:solidFill>
-          <a:ln/>
-        </p:spPr>
-      </p:sp>
-      <p:sp>
-        <p:nvSpPr>
-          <p:cNvPr id="13" name="Text 11"/>
-          <p:cNvSpPr/>
-          <p:nvPr/>
-        </p:nvSpPr>
-        <p:spPr>
-          <a:xfrm>
-            <a:off x="4654296" y="3090672"/>
-            <a:ext cx="777240" cy="777240"/>
-          </a:xfrm>
-          <a:prstGeom prst="rect">
-            <a:avLst/>
-          </a:prstGeom>
-          <a:noFill/>
-          <a:ln/>
-        </p:spPr>
-        <p:txBody>
-          <a:bodyPr wrap="square" lIns="0" tIns="0" rIns="0" bIns="0" rtlCol="0" anchor="ctr"/>
-          <a:lstStyle/>
-          <a:p>
-            <a:pPr algn="ctr" indent="0" marL="0">
-              <a:buNone/>
-            </a:pPr>
-            <a:r>
-              <a:rPr lang="en-US" sz="3000" b="1" dirty="0">
-                <a:solidFill>
-                  <a:srgbClr val="FFFFFF"/>
-                </a:solidFill>
-                <a:latin typeface="Calibri" pitchFamily="34" charset="0"/>
-                <a:ea typeface="Calibri" pitchFamily="34" charset="-122"/>
-                <a:cs typeface="Calibri" pitchFamily="34" charset="-120"/>
-              </a:rPr>
-              <a:t>2</a:t>
-            </a:r>
-            <a:endParaRPr lang="en-US" sz="3000" dirty="0"/>
-          </a:p>
-        </p:txBody>
-      </p:sp>
-      <p:sp>
-        <p:nvSpPr>
-          <p:cNvPr id="14" name="Text 12"/>
-          <p:cNvSpPr/>
-          <p:nvPr/>
-        </p:nvSpPr>
-        <p:spPr>
-          <a:xfrm>
-            <a:off x="5568696" y="3154680"/>
-            <a:ext cx="1920240" cy="320040"/>
-          </a:xfrm>
-          <a:prstGeom prst="rect">
-            <a:avLst/>
-          </a:prstGeom>
-          <a:noFill/>
-          <a:ln/>
-        </p:spPr>
-        <p:txBody>
-          <a:bodyPr wrap="square" lIns="0" tIns="0" rIns="0" bIns="0" rtlCol="0" anchor="ctr"/>
-          <a:lstStyle/>
-          <a:p>
-            <a:pPr indent="0" marL="0">
-              <a:buNone/>
-            </a:pPr>
-            <a:r>
-              <a:rPr lang="en-US" sz="1100" b="1" spc="100" kern="0" dirty="0">
-                <a:solidFill>
-                  <a:srgbClr val="68786F"/>
-                </a:solidFill>
-                <a:latin typeface="Calibri" pitchFamily="34" charset="0"/>
-                <a:ea typeface="Calibri" pitchFamily="34" charset="-122"/>
-                <a:cs typeface="Calibri" pitchFamily="34" charset="-120"/>
-              </a:rPr>
-              <a:t>Phase 2</a:t>
-            </a:r>
-            <a:endParaRPr lang="en-US" sz="1100" dirty="0"/>
-          </a:p>
-        </p:txBody>
-      </p:sp>
-      <p:sp>
-        <p:nvSpPr>
-          <p:cNvPr id="15" name="Text 13"/>
-          <p:cNvSpPr/>
-          <p:nvPr/>
-        </p:nvSpPr>
-        <p:spPr>
-          <a:xfrm>
-            <a:off x="5568696" y="3429000"/>
-            <a:ext cx="1920240" cy="457200"/>
-          </a:xfrm>
-          <a:prstGeom prst="rect">
-            <a:avLst/>
-          </a:prstGeom>
-          <a:noFill/>
-          <a:ln/>
-        </p:spPr>
-        <p:txBody>
-          <a:bodyPr wrap="square" lIns="0" tIns="0" rIns="0" bIns="0" rtlCol="0" anchor="ctr"/>
-          <a:lstStyle/>
-          <a:p>
-            <a:pPr indent="0" marL="0">
-              <a:buNone/>
-            </a:pPr>
-            <a:r>
-              <a:rPr lang="en-US" sz="1550" b="1" dirty="0">
-                <a:solidFill>
-                  <a:srgbClr val="123024"/>
-                </a:solidFill>
-                <a:latin typeface="Calibri" pitchFamily="34" charset="0"/>
-                <a:ea typeface="Calibri" pitchFamily="34" charset="-122"/>
-                <a:cs typeface="Calibri" pitchFamily="34" charset="-120"/>
-              </a:rPr>
-              <a:t>More direct seafood</a:t>
-            </a:r>
-            <a:endParaRPr lang="en-US" sz="1550" dirty="0"/>
-          </a:p>
-        </p:txBody>
-      </p:sp>
-      <p:sp>
-        <p:nvSpPr>
-          <p:cNvPr id="16" name="Text 14"/>
-          <p:cNvSpPr/>
-          <p:nvPr/>
-        </p:nvSpPr>
-        <p:spPr>
-          <a:xfrm>
-            <a:off x="4654296" y="4251960"/>
-            <a:ext cx="2743200" cy="1280160"/>
-          </a:xfrm>
-          <a:prstGeom prst="rect">
-            <a:avLst/>
-          </a:prstGeom>
-          <a:noFill/>
-          <a:ln/>
-        </p:spPr>
-        <p:txBody>
-          <a:bodyPr wrap="square" lIns="0" tIns="0" rIns="0" bIns="0" rtlCol="0" anchor="ctr"/>
-          <a:lstStyle/>
-          <a:p>
-            <a:pPr indent="0" marL="0">
-              <a:lnSpc>
-                <a:spcPct val="118000"/>
-              </a:lnSpc>
-              <a:buNone/>
-            </a:pPr>
-            <a:r>
-              <a:rPr lang="en-US" sz="1280" dirty="0">
-                <a:solidFill>
-                  <a:srgbClr val="68786F"/>
-                </a:solidFill>
-                <a:latin typeface="Calibri" pitchFamily="34" charset="0"/>
-                <a:ea typeface="Calibri" pitchFamily="34" charset="-122"/>
-                <a:cs typeface="Calibri" pitchFamily="34" charset="-120"/>
-              </a:rPr>
-              <a:t>Shrimp, lobster, crab and other gradable products where freshness and provenance matter.</a:t>
-            </a:r>
-            <a:endParaRPr lang="en-US" sz="1280" dirty="0"/>
-          </a:p>
-        </p:txBody>
-      </p:sp>
-      <p:sp>
-        <p:nvSpPr>
-          <p:cNvPr id="17" name="Shape 15"/>
-          <p:cNvSpPr/>
-          <p:nvPr/>
-        </p:nvSpPr>
-        <p:spPr>
-          <a:xfrm>
-            <a:off x="8010144" y="2743200"/>
-            <a:ext cx="3383280" cy="3017520"/>
-          </a:xfrm>
-          <a:prstGeom prst="roundRect">
-            <a:avLst>
-              <a:gd name="adj" fmla="val 4242"/>
-            </a:avLst>
-          </a:prstGeom>
-          <a:solidFill>
-            <a:srgbClr val="FFFFFF"/>
-          </a:solidFill>
-          <a:ln/>
-          <a:effectLst>
-            <a:outerShdw sx="100000" sy="100000" kx="0" ky="0" algn="bl" rotWithShape="0" blurRad="127000" dist="38100" dir="5400000">
-              <a:srgbClr val="1B3A2E">
-                <a:alpha val="16000"/>
-              </a:srgbClr>
-            </a:outerShdw>
-          </a:effectLst>
-        </p:spPr>
-      </p:sp>
-      <p:sp>
-        <p:nvSpPr>
-          <p:cNvPr id="18" name="Shape 16"/>
-          <p:cNvSpPr/>
-          <p:nvPr/>
-        </p:nvSpPr>
-        <p:spPr>
-          <a:xfrm>
-            <a:off x="8330184" y="3090672"/>
-            <a:ext cx="777240" cy="777240"/>
-          </a:xfrm>
-          <a:prstGeom prst="ellipse">
-            <a:avLst/>
-          </a:prstGeom>
-          <a:solidFill>
-            <a:srgbClr val="4CC499"/>
-          </a:solidFill>
-          <a:ln/>
-        </p:spPr>
-      </p:sp>
-      <p:sp>
-        <p:nvSpPr>
-          <p:cNvPr id="19" name="Text 17"/>
-          <p:cNvSpPr/>
-          <p:nvPr/>
-        </p:nvSpPr>
-        <p:spPr>
-          <a:xfrm>
-            <a:off x="8330184" y="3090672"/>
-            <a:ext cx="777240" cy="777240"/>
-          </a:xfrm>
-          <a:prstGeom prst="rect">
-            <a:avLst/>
-          </a:prstGeom>
-          <a:noFill/>
-          <a:ln/>
-        </p:spPr>
-        <p:txBody>
-          <a:bodyPr wrap="square" lIns="0" tIns="0" rIns="0" bIns="0" rtlCol="0" anchor="ctr"/>
-          <a:lstStyle/>
-          <a:p>
-            <a:pPr algn="ctr" indent="0" marL="0">
-              <a:buNone/>
-            </a:pPr>
-            <a:r>
-              <a:rPr lang="en-US" sz="3000" b="1" dirty="0">
-                <a:solidFill>
-                  <a:srgbClr val="FFFFFF"/>
-                </a:solidFill>
-                <a:latin typeface="Calibri" pitchFamily="34" charset="0"/>
-                <a:ea typeface="Calibri" pitchFamily="34" charset="-122"/>
-                <a:cs typeface="Calibri" pitchFamily="34" charset="-120"/>
-              </a:rPr>
-              <a:t>3</a:t>
-            </a:r>
-            <a:endParaRPr lang="en-US" sz="3000" dirty="0"/>
-          </a:p>
-        </p:txBody>
-      </p:sp>
-      <p:sp>
-        <p:nvSpPr>
-          <p:cNvPr id="20" name="Text 18"/>
-          <p:cNvSpPr/>
-          <p:nvPr/>
-        </p:nvSpPr>
-        <p:spPr>
-          <a:xfrm>
-            <a:off x="9244584" y="3154680"/>
-            <a:ext cx="1920240" cy="320040"/>
-          </a:xfrm>
-          <a:prstGeom prst="rect">
-            <a:avLst/>
-          </a:prstGeom>
-          <a:noFill/>
-          <a:ln/>
-        </p:spPr>
-        <p:txBody>
-          <a:bodyPr wrap="square" lIns="0" tIns="0" rIns="0" bIns="0" rtlCol="0" anchor="ctr"/>
-          <a:lstStyle/>
-          <a:p>
-            <a:pPr indent="0" marL="0">
-              <a:buNone/>
-            </a:pPr>
-            <a:r>
-              <a:rPr lang="en-US" sz="1100" b="1" spc="100" kern="0" dirty="0">
-                <a:solidFill>
-                  <a:srgbClr val="68786F"/>
-                </a:solidFill>
-                <a:latin typeface="Calibri" pitchFamily="34" charset="0"/>
-                <a:ea typeface="Calibri" pitchFamily="34" charset="-122"/>
-                <a:cs typeface="Calibri" pitchFamily="34" charset="-120"/>
-              </a:rPr>
-              <a:t>Phase 3</a:t>
-            </a:r>
-            <a:endParaRPr lang="en-US" sz="1100" dirty="0"/>
-          </a:p>
-        </p:txBody>
-      </p:sp>
-      <p:sp>
-        <p:nvSpPr>
-          <p:cNvPr id="21" name="Text 19"/>
-          <p:cNvSpPr/>
-          <p:nvPr/>
-        </p:nvSpPr>
-        <p:spPr>
-          <a:xfrm>
-            <a:off x="9244584" y="3429000"/>
-            <a:ext cx="1920240" cy="457200"/>
-          </a:xfrm>
-          <a:prstGeom prst="rect">
-            <a:avLst/>
-          </a:prstGeom>
-          <a:noFill/>
-          <a:ln/>
-        </p:spPr>
-        <p:txBody>
-          <a:bodyPr wrap="square" lIns="0" tIns="0" rIns="0" bIns="0" rtlCol="0" anchor="ctr"/>
-          <a:lstStyle/>
-          <a:p>
-            <a:pPr indent="0" marL="0">
-              <a:buNone/>
-            </a:pPr>
-            <a:r>
-              <a:rPr lang="en-US" sz="1550" b="1" dirty="0">
-                <a:solidFill>
-                  <a:srgbClr val="123024"/>
-                </a:solidFill>
-                <a:latin typeface="Calibri" pitchFamily="34" charset="0"/>
-                <a:ea typeface="Calibri" pitchFamily="34" charset="-122"/>
-                <a:cs typeface="Calibri" pitchFamily="34" charset="-120"/>
-              </a:rPr>
-              <a:t>Direct import / export</a:t>
-            </a:r>
-            <a:endParaRPr lang="en-US" sz="1550" dirty="0"/>
-          </a:p>
-        </p:txBody>
-      </p:sp>
-      <p:sp>
-        <p:nvSpPr>
-          <p:cNvPr id="22" name="Text 20"/>
-          <p:cNvSpPr/>
-          <p:nvPr/>
-        </p:nvSpPr>
-        <p:spPr>
-          <a:xfrm>
-            <a:off x="8330184" y="4251960"/>
-            <a:ext cx="2743200" cy="1280160"/>
-          </a:xfrm>
-          <a:prstGeom prst="rect">
-            <a:avLst/>
-          </a:prstGeom>
-          <a:noFill/>
-          <a:ln/>
-        </p:spPr>
-        <p:txBody>
-          <a:bodyPr wrap="square" lIns="0" tIns="0" rIns="0" bIns="0" rtlCol="0" anchor="ctr"/>
-          <a:lstStyle/>
-          <a:p>
-            <a:pPr indent="0" marL="0">
-              <a:lnSpc>
-                <a:spcPct val="118000"/>
-              </a:lnSpc>
-              <a:buNone/>
-            </a:pPr>
-            <a:r>
-              <a:rPr lang="en-US" sz="1280" dirty="0">
-                <a:solidFill>
-                  <a:srgbClr val="68786F"/>
-                </a:solidFill>
-                <a:latin typeface="Calibri" pitchFamily="34" charset="0"/>
-                <a:ea typeface="Calibri" pitchFamily="34" charset="-122"/>
-                <a:cs typeface="Calibri" pitchFamily="34" charset="-120"/>
-              </a:rPr>
-              <a:t>Cut exporters and importers too, with AI coordinating documents, routing and compliance.</a:t>
-            </a:r>
-            <a:endParaRPr lang="en-US" sz="1280" dirty="0"/>
-          </a:p>
-        </p:txBody>
-      </p:sp>
-      <p:sp>
-        <p:nvSpPr>
-          <p:cNvPr id="23" name="Text 21"/>
-          <p:cNvSpPr/>
-          <p:nvPr/>
-        </p:nvSpPr>
-        <p:spPr>
-          <a:xfrm>
-            <a:off x="11183112" y="6355080"/>
-            <a:ext cx="548640" cy="274320"/>
-          </a:xfrm>
-          <a:prstGeom prst="rect">
-            <a:avLst/>
-          </a:prstGeom>
-          <a:noFill/>
-          <a:ln/>
-        </p:spPr>
-        <p:txBody>
-          <a:bodyPr wrap="square" lIns="0" tIns="0" rIns="0" bIns="0" rtlCol="0" anchor="ctr"/>
-          <a:lstStyle/>
-          <a:p>
-            <a:pPr algn="r" indent="0" marL="0">
-              <a:buNone/>
-            </a:pPr>
-            <a:r>
-              <a:rPr lang="en-US" sz="1000" dirty="0">
-                <a:solidFill>
-                  <a:srgbClr val="68786F"/>
-                </a:solidFill>
-                <a:latin typeface="Calibri" pitchFamily="34" charset="0"/>
-                <a:ea typeface="Calibri" pitchFamily="34" charset="-122"/>
-                <a:cs typeface="Calibri" pitchFamily="34" charset="-120"/>
-              </a:rPr>
-              <a:t>09</a:t>
-            </a:r>
-            <a:endParaRPr lang="en-US" sz="1000" dirty="0"/>
-          </a:p>
-        </p:txBody>
-      </p:sp>
-      <p:sp>
-        <p:nvSpPr>
-          <p:cNvPr id="24" name="Text 22"/>
           <p:cNvSpPr/>
           <p:nvPr/>
         </p:nvSpPr>

--- a/Agripals-Investor-Deck.pptx
+++ b/Agripals-Investor-Deck.pptx
@@ -13,6 +13,7 @@
     <p:sldId id="261" r:id="rId7"/>
     <p:sldId id="262" r:id="rId8"/>
     <p:sldId id="272" r:id="rId23"/>
+    <p:sldId id="273" r:id="rId24"/>
     <p:sldId id="263" r:id="rId9"/>
     <p:sldId id="264" r:id="rId10"/>
     <p:sldId id="270" r:id="rId21"/>
@@ -21,6 +22,8 @@
     <p:sldId id="266" r:id="rId12"/>
     <p:sldId id="267" r:id="rId13"/>
     <p:sldId id="268" r:id="rId14"/>
+    <p:sldId id="274" r:id="rId25"/>
+    <p:sldId id="275" r:id="rId26"/>
     <p:sldId id="269" r:id="rId15"/>
   </p:sldIdLst>
   <p:notesMasterIdLst>
@@ -2275,7 +2278,7 @@
 
 <file path=ppt/slides/slide10.xml><?xml version="1.0" encoding="utf-8"?>
 <p:sld xmlns:a="http://schemas.openxmlformats.org/drawingml/2006/main" xmlns:r="http://schemas.openxmlformats.org/officeDocument/2006/relationships" xmlns:p="http://schemas.openxmlformats.org/presentationml/2006/main">
-  <p:cSld name="Slide 9">
+  <p:cSld name="Slide 8">
     <p:bg>
       <p:bgPr>
         <a:solidFill>
@@ -2330,7 +2333,7 @@
                 <a:ea typeface="Calibri" pitchFamily="34" charset="-122"/>
                 <a:cs typeface="Calibri" pitchFamily="34" charset="-120"/>
               </a:rPr>
-              <a:t>GO TO MARKET</a:t>
+              <a:t>TRUST, WITHOUT THE MIDDLEMAN</a:t>
             </a:r>
             <a:endParaRPr lang="en-US" sz="1250" dirty="0"/>
           </a:p>
@@ -2372,7 +2375,7 @@
                 <a:ea typeface="Calibri" pitchFamily="34" charset="-122"/>
                 <a:cs typeface="Calibri" pitchFamily="34" charset="-120"/>
               </a:rPr>
-              <a:t>One city. One product. One clear proof point.</a:t>
+              <a:t>AI grading replaces the broker's handshake.</a:t>
             </a:r>
             <a:endParaRPr lang="en-US" sz="3400" dirty="0"/>
           </a:p>
@@ -2380,55 +2383,13 @@
       </p:sp>
       <p:sp>
         <p:nvSpPr>
-          <p:cNvPr id="4" name="Text 2"/>
-          <p:cNvSpPr/>
-          <p:nvPr/>
-        </p:nvSpPr>
-        <p:spPr>
-          <a:xfrm>
-            <a:off x="658368" y="1828800"/>
-            <a:ext cx="10607040" cy="640080"/>
-          </a:xfrm>
-          <a:prstGeom prst="rect">
-            <a:avLst/>
-          </a:prstGeom>
-          <a:noFill/>
-          <a:ln/>
-        </p:spPr>
-        <p:txBody>
-          <a:bodyPr wrap="square" lIns="0" tIns="0" rIns="0" bIns="0" rtlCol="0" anchor="ctr"/>
-          <a:lstStyle/>
-          <a:p>
-            <a:pPr indent="0" marL="0">
-              <a:lnSpc>
-                <a:spcPct val="115000"/>
-              </a:lnSpc>
-              <a:buNone/>
-            </a:pPr>
-            <a:r>
-              <a:rPr lang="en-US" sz="1600" dirty="0">
-                <a:solidFill>
-                  <a:srgbClr val="12201A"/>
-                </a:solidFill>
-                <a:latin typeface="Calibri" pitchFamily="34" charset="0"/>
-                <a:ea typeface="Calibri" pitchFamily="34" charset="-122"/>
-                <a:cs typeface="Calibri" pitchFamily="34" charset="-120"/>
-              </a:rPr>
-              <a:t>San Francisco oysters — direct from Northern California farms into SF restaurants — then expand the same rails outward.</a:t>
-            </a:r>
-            <a:endParaRPr lang="en-US" sz="1600" dirty="0"/>
-          </a:p>
-        </p:txBody>
-      </p:sp>
-      <p:sp>
-        <p:nvSpPr>
-          <p:cNvPr id="5" name="Shape 3"/>
-          <p:cNvSpPr/>
-          <p:nvPr/>
-        </p:nvSpPr>
-        <p:spPr>
-          <a:xfrm>
-            <a:off x="658368" y="2743200"/>
+          <p:cNvPr id="4" name="Shape 2"/>
+          <p:cNvSpPr/>
+          <p:nvPr/>
+        </p:nvSpPr>
+        <p:spPr>
+          <a:xfrm>
+            <a:off x="658368" y="2331720"/>
             <a:ext cx="3383280" cy="3017520"/>
           </a:xfrm>
           <a:prstGeom prst="roundRect">
@@ -2455,20 +2416,20 @@
       </p:sp>
       <p:sp>
         <p:nvSpPr>
-          <p:cNvPr id="6" name="Shape 4"/>
-          <p:cNvSpPr/>
-          <p:nvPr/>
-        </p:nvSpPr>
-        <p:spPr>
-          <a:xfrm>
-            <a:off x="978408" y="3090672"/>
-            <a:ext cx="777240" cy="777240"/>
+          <p:cNvPr id="5" name="Shape 3"/>
+          <p:cNvSpPr/>
+          <p:nvPr/>
+        </p:nvSpPr>
+        <p:spPr>
+          <a:xfrm>
+            <a:off x="978408" y="2697480"/>
+            <a:ext cx="822960" cy="822960"/>
           </a:xfrm>
           <a:prstGeom prst="ellipse">
             <a:avLst/>
           </a:prstGeom>
           <a:solidFill>
-            <a:srgbClr val="2E8564"/>
+            <a:srgbClr val="DCEFE1"/>
           </a:solidFill>
           <a:ln/>
         </p:spPr>
@@ -2477,55 +2438,40 @@
           <a:p/>
         </p:txBody>
       </p:sp>
-      <p:sp>
-        <p:nvSpPr>
-          <p:cNvPr id="7" name="Text 5"/>
-          <p:cNvSpPr/>
-          <p:nvPr/>
-        </p:nvSpPr>
-        <p:spPr>
-          <a:xfrm>
-            <a:off x="978408" y="3090672"/>
-            <a:ext cx="777240" cy="777240"/>
-          </a:xfrm>
-          <a:prstGeom prst="rect">
-            <a:avLst/>
-          </a:prstGeom>
-          <a:noFill/>
-          <a:ln/>
-        </p:spPr>
-        <p:txBody>
-          <a:bodyPr wrap="square" lIns="0" tIns="0" rIns="0" bIns="0" rtlCol="0" anchor="ctr"/>
-          <a:lstStyle/>
-          <a:p>
-            <a:pPr algn="ctr" indent="0" marL="0">
-              <a:buNone/>
-            </a:pPr>
-            <a:r>
-              <a:rPr lang="en-US" sz="3000" b="1" dirty="0">
-                <a:solidFill>
-                  <a:srgbClr val="FFFFFF"/>
-                </a:solidFill>
-                <a:latin typeface="Calibri" pitchFamily="34" charset="0"/>
-                <a:ea typeface="Calibri" pitchFamily="34" charset="-122"/>
-                <a:cs typeface="Calibri" pitchFamily="34" charset="-120"/>
-              </a:rPr>
-              <a:t>1</a:t>
-            </a:r>
-            <a:endParaRPr lang="en-US" sz="3000" dirty="0"/>
-          </a:p>
-        </p:txBody>
-      </p:sp>
-      <p:sp>
-        <p:nvSpPr>
-          <p:cNvPr id="8" name="Text 6"/>
-          <p:cNvSpPr/>
-          <p:nvPr/>
-        </p:nvSpPr>
-        <p:spPr>
-          <a:xfrm>
-            <a:off x="1892808" y="3154680"/>
-            <a:ext cx="1920240" cy="320040"/>
+      <p:pic>
+        <p:nvPicPr>
+          <p:cNvPr id="6" name="Image 0" descr="preencoded.png"/>
+          <p:cNvPicPr>
+            <a:picLocks noChangeAspect="1"/>
+          </p:cNvPicPr>
+          <p:nvPr/>
+        </p:nvPicPr>
+        <p:blipFill>
+          <a:blip r:embed="rId1"/>
+          <a:stretch>
+            <a:fillRect/>
+          </a:stretch>
+        </p:blipFill>
+        <p:spPr>
+          <a:xfrm>
+            <a:off x="1175918" y="2894990"/>
+            <a:ext cx="427939" cy="427939"/>
+          </a:xfrm>
+          <a:prstGeom prst="rect">
+            <a:avLst/>
+          </a:prstGeom>
+        </p:spPr>
+      </p:pic>
+      <p:sp>
+        <p:nvSpPr>
+          <p:cNvPr id="7" name="Text 4"/>
+          <p:cNvSpPr/>
+          <p:nvPr/>
+        </p:nvSpPr>
+        <p:spPr>
+          <a:xfrm>
+            <a:off x="978408" y="3703320"/>
+            <a:ext cx="2743200" cy="457200"/>
           </a:xfrm>
           <a:prstGeom prst="rect">
             <a:avLst/>
@@ -2541,46 +2487,7 @@
               <a:buNone/>
             </a:pPr>
             <a:r>
-              <a:rPr lang="en-US" sz="1100" b="1" spc="100" kern="0" dirty="0">
-                <a:solidFill>
-                  <a:srgbClr val="68786F"/>
-                </a:solidFill>
-                <a:latin typeface="Calibri" pitchFamily="34" charset="0"/>
-                <a:ea typeface="Calibri" pitchFamily="34" charset="-122"/>
-                <a:cs typeface="Calibri" pitchFamily="34" charset="-120"/>
-              </a:rPr>
-              <a:t>Phase 1</a:t>
-            </a:r>
-            <a:endParaRPr lang="en-US" sz="1100" dirty="0"/>
-          </a:p>
-        </p:txBody>
-      </p:sp>
-      <p:sp>
-        <p:nvSpPr>
-          <p:cNvPr id="9" name="Text 7"/>
-          <p:cNvSpPr/>
-          <p:nvPr/>
-        </p:nvSpPr>
-        <p:spPr>
-          <a:xfrm>
-            <a:off x="1892808" y="3429000"/>
-            <a:ext cx="1920240" cy="457200"/>
-          </a:xfrm>
-          <a:prstGeom prst="rect">
-            <a:avLst/>
-          </a:prstGeom>
-          <a:noFill/>
-          <a:ln/>
-        </p:spPr>
-        <p:txBody>
-          <a:bodyPr wrap="square" lIns="0" tIns="0" rIns="0" bIns="0" rtlCol="0" anchor="ctr"/>
-          <a:lstStyle/>
-          <a:p>
-            <a:pPr indent="0" marL="0">
-              <a:buNone/>
-            </a:pPr>
-            <a:r>
-              <a:rPr lang="en-US" sz="1550" b="1" dirty="0">
+              <a:rPr lang="en-US" sz="1700" b="1" dirty="0">
                 <a:solidFill>
                   <a:srgbClr val="123024"/>
                 </a:solidFill>
@@ -2588,22 +2495,22 @@
                 <a:ea typeface="Calibri" pitchFamily="34" charset="-122"/>
                 <a:cs typeface="Calibri" pitchFamily="34" charset="-120"/>
               </a:rPr>
-              <a:t>SF oysters</a:t>
-            </a:r>
-            <a:endParaRPr lang="en-US" sz="1550" dirty="0"/>
-          </a:p>
-        </p:txBody>
-      </p:sp>
-      <p:sp>
-        <p:nvSpPr>
-          <p:cNvPr id="10" name="Text 8"/>
-          <p:cNvSpPr/>
-          <p:nvPr/>
-        </p:nvSpPr>
-        <p:spPr>
-          <a:xfrm>
-            <a:off x="978408" y="4251960"/>
-            <a:ext cx="2743200" cy="1280160"/>
+              <a:t>Farm-side photos</a:t>
+            </a:r>
+            <a:endParaRPr lang="en-US" sz="1700" dirty="0"/>
+          </a:p>
+        </p:txBody>
+      </p:sp>
+      <p:sp>
+        <p:nvSpPr>
+          <p:cNvPr id="8" name="Text 5"/>
+          <p:cNvSpPr/>
+          <p:nvPr/>
+        </p:nvSpPr>
+        <p:spPr>
+          <a:xfrm>
+            <a:off x="978408" y="4206240"/>
+            <a:ext cx="2743200" cy="1005840"/>
           </a:xfrm>
           <a:prstGeom prst="rect">
             <a:avLst/>
@@ -2622,7 +2529,7 @@
               <a:buNone/>
             </a:pPr>
             <a:r>
-              <a:rPr lang="en-US" sz="1280" dirty="0">
+              <a:rPr lang="en-US" sz="1300" dirty="0">
                 <a:solidFill>
                   <a:srgbClr val="68786F"/>
                 </a:solidFill>
@@ -2630,21 +2537,21 @@
                 <a:ea typeface="Calibri" pitchFamily="34" charset="-122"/>
                 <a:cs typeface="Calibri" pitchFamily="34" charset="-120"/>
               </a:rPr>
-              <a:t>~10 oyster farmers, 10–20 restaurants, one reliable cold-chain logistics partner.</a:t>
-            </a:r>
-            <a:endParaRPr lang="en-US" sz="1280" dirty="0"/>
-          </a:p>
-        </p:txBody>
-      </p:sp>
-      <p:sp>
-        <p:nvSpPr>
-          <p:cNvPr id="11" name="Shape 9"/>
-          <p:cNvSpPr/>
-          <p:nvPr/>
-        </p:nvSpPr>
-        <p:spPr>
-          <a:xfrm>
-            <a:off x="4334256" y="2743200"/>
+              <a:t>The farmer photographs a handful of product and a graded sample before sealing the shipment.</a:t>
+            </a:r>
+            <a:endParaRPr lang="en-US" sz="1300" dirty="0"/>
+          </a:p>
+        </p:txBody>
+      </p:sp>
+      <p:sp>
+        <p:nvSpPr>
+          <p:cNvPr id="9" name="Shape 6"/>
+          <p:cNvSpPr/>
+          <p:nvPr/>
+        </p:nvSpPr>
+        <p:spPr>
+          <a:xfrm>
+            <a:off x="4334256" y="2331720"/>
             <a:ext cx="3383280" cy="3017520"/>
           </a:xfrm>
           <a:prstGeom prst="roundRect">
@@ -2671,20 +2578,20 @@
       </p:sp>
       <p:sp>
         <p:nvSpPr>
-          <p:cNvPr id="12" name="Shape 10"/>
-          <p:cNvSpPr/>
-          <p:nvPr/>
-        </p:nvSpPr>
-        <p:spPr>
-          <a:xfrm>
-            <a:off x="4654296" y="3090672"/>
-            <a:ext cx="777240" cy="777240"/>
+          <p:cNvPr id="10" name="Shape 7"/>
+          <p:cNvSpPr/>
+          <p:nvPr/>
+        </p:nvSpPr>
+        <p:spPr>
+          <a:xfrm>
+            <a:off x="4654296" y="2697480"/>
+            <a:ext cx="822960" cy="822960"/>
           </a:xfrm>
           <a:prstGeom prst="ellipse">
             <a:avLst/>
           </a:prstGeom>
           <a:solidFill>
-            <a:srgbClr val="37A278"/>
+            <a:srgbClr val="DCEFE1"/>
           </a:solidFill>
           <a:ln/>
         </p:spPr>
@@ -2693,55 +2600,40 @@
           <a:p/>
         </p:txBody>
       </p:sp>
-      <p:sp>
-        <p:nvSpPr>
-          <p:cNvPr id="13" name="Text 11"/>
-          <p:cNvSpPr/>
-          <p:nvPr/>
-        </p:nvSpPr>
-        <p:spPr>
-          <a:xfrm>
-            <a:off x="4654296" y="3090672"/>
-            <a:ext cx="777240" cy="777240"/>
-          </a:xfrm>
-          <a:prstGeom prst="rect">
-            <a:avLst/>
-          </a:prstGeom>
-          <a:noFill/>
-          <a:ln/>
-        </p:spPr>
-        <p:txBody>
-          <a:bodyPr wrap="square" lIns="0" tIns="0" rIns="0" bIns="0" rtlCol="0" anchor="ctr"/>
-          <a:lstStyle/>
-          <a:p>
-            <a:pPr algn="ctr" indent="0" marL="0">
-              <a:buNone/>
-            </a:pPr>
-            <a:r>
-              <a:rPr lang="en-US" sz="3000" b="1" dirty="0">
-                <a:solidFill>
-                  <a:srgbClr val="FFFFFF"/>
-                </a:solidFill>
-                <a:latin typeface="Calibri" pitchFamily="34" charset="0"/>
-                <a:ea typeface="Calibri" pitchFamily="34" charset="-122"/>
-                <a:cs typeface="Calibri" pitchFamily="34" charset="-120"/>
-              </a:rPr>
-              <a:t>2</a:t>
-            </a:r>
-            <a:endParaRPr lang="en-US" sz="3000" dirty="0"/>
-          </a:p>
-        </p:txBody>
-      </p:sp>
-      <p:sp>
-        <p:nvSpPr>
-          <p:cNvPr id="14" name="Text 12"/>
-          <p:cNvSpPr/>
-          <p:nvPr/>
-        </p:nvSpPr>
-        <p:spPr>
-          <a:xfrm>
-            <a:off x="5568696" y="3154680"/>
-            <a:ext cx="1920240" cy="320040"/>
+      <p:pic>
+        <p:nvPicPr>
+          <p:cNvPr id="11" name="Image 1" descr="preencoded.png"/>
+          <p:cNvPicPr>
+            <a:picLocks noChangeAspect="1"/>
+          </p:cNvPicPr>
+          <p:nvPr/>
+        </p:nvPicPr>
+        <p:blipFill>
+          <a:blip r:embed="rId2"/>
+          <a:stretch>
+            <a:fillRect/>
+          </a:stretch>
+        </p:blipFill>
+        <p:spPr>
+          <a:xfrm>
+            <a:off x="4851806" y="2894990"/>
+            <a:ext cx="427939" cy="427939"/>
+          </a:xfrm>
+          <a:prstGeom prst="rect">
+            <a:avLst/>
+          </a:prstGeom>
+        </p:spPr>
+      </p:pic>
+      <p:sp>
+        <p:nvSpPr>
+          <p:cNvPr id="12" name="Text 8"/>
+          <p:cNvSpPr/>
+          <p:nvPr/>
+        </p:nvSpPr>
+        <p:spPr>
+          <a:xfrm>
+            <a:off x="4654296" y="3703320"/>
+            <a:ext cx="2743200" cy="457200"/>
           </a:xfrm>
           <a:prstGeom prst="rect">
             <a:avLst/>
@@ -2757,46 +2649,7 @@
               <a:buNone/>
             </a:pPr>
             <a:r>
-              <a:rPr lang="en-US" sz="1100" b="1" spc="100" kern="0" dirty="0">
-                <a:solidFill>
-                  <a:srgbClr val="68786F"/>
-                </a:solidFill>
-                <a:latin typeface="Calibri" pitchFamily="34" charset="0"/>
-                <a:ea typeface="Calibri" pitchFamily="34" charset="-122"/>
-                <a:cs typeface="Calibri" pitchFamily="34" charset="-120"/>
-              </a:rPr>
-              <a:t>Phase 2</a:t>
-            </a:r>
-            <a:endParaRPr lang="en-US" sz="1100" dirty="0"/>
-          </a:p>
-        </p:txBody>
-      </p:sp>
-      <p:sp>
-        <p:nvSpPr>
-          <p:cNvPr id="15" name="Text 13"/>
-          <p:cNvSpPr/>
-          <p:nvPr/>
-        </p:nvSpPr>
-        <p:spPr>
-          <a:xfrm>
-            <a:off x="5568696" y="3429000"/>
-            <a:ext cx="1920240" cy="457200"/>
-          </a:xfrm>
-          <a:prstGeom prst="rect">
-            <a:avLst/>
-          </a:prstGeom>
-          <a:noFill/>
-          <a:ln/>
-        </p:spPr>
-        <p:txBody>
-          <a:bodyPr wrap="square" lIns="0" tIns="0" rIns="0" bIns="0" rtlCol="0" anchor="ctr"/>
-          <a:lstStyle/>
-          <a:p>
-            <a:pPr indent="0" marL="0">
-              <a:buNone/>
-            </a:pPr>
-            <a:r>
-              <a:rPr lang="en-US" sz="1550" b="1" dirty="0">
+              <a:rPr lang="en-US" sz="1700" b="1" dirty="0">
                 <a:solidFill>
                   <a:srgbClr val="123024"/>
                 </a:solidFill>
@@ -2804,22 +2657,22 @@
                 <a:ea typeface="Calibri" pitchFamily="34" charset="-122"/>
                 <a:cs typeface="Calibri" pitchFamily="34" charset="-120"/>
               </a:rPr>
-              <a:t>More direct seafood</a:t>
-            </a:r>
-            <a:endParaRPr lang="en-US" sz="1550" dirty="0"/>
-          </a:p>
-        </p:txBody>
-      </p:sp>
-      <p:sp>
-        <p:nvSpPr>
-          <p:cNvPr id="16" name="Text 14"/>
-          <p:cNvSpPr/>
-          <p:nvPr/>
-        </p:nvSpPr>
-        <p:spPr>
-          <a:xfrm>
-            <a:off x="4654296" y="4251960"/>
-            <a:ext cx="2743200" cy="1280160"/>
+              <a:t>Delivery-side recheck</a:t>
+            </a:r>
+            <a:endParaRPr lang="en-US" sz="1700" dirty="0"/>
+          </a:p>
+        </p:txBody>
+      </p:sp>
+      <p:sp>
+        <p:nvSpPr>
+          <p:cNvPr id="13" name="Text 9"/>
+          <p:cNvSpPr/>
+          <p:nvPr/>
+        </p:nvSpPr>
+        <p:spPr>
+          <a:xfrm>
+            <a:off x="4654296" y="4206240"/>
+            <a:ext cx="2743200" cy="1005840"/>
           </a:xfrm>
           <a:prstGeom prst="rect">
             <a:avLst/>
@@ -2838,7 +2691,7 @@
               <a:buNone/>
             </a:pPr>
             <a:r>
-              <a:rPr lang="en-US" sz="1280" dirty="0">
+              <a:rPr lang="en-US" sz="1300" dirty="0">
                 <a:solidFill>
                   <a:srgbClr val="68786F"/>
                 </a:solidFill>
@@ -2846,21 +2699,21 @@
                 <a:ea typeface="Calibri" pitchFamily="34" charset="-122"/>
                 <a:cs typeface="Calibri" pitchFamily="34" charset="-120"/>
               </a:rPr>
-              <a:t>Shrimp, lobster, crab and other gradable products where freshness and provenance matter.</a:t>
-            </a:r>
-            <a:endParaRPr lang="en-US" sz="1280" dirty="0"/>
-          </a:p>
-        </p:txBody>
-      </p:sp>
-      <p:sp>
-        <p:nvSpPr>
-          <p:cNvPr id="17" name="Shape 15"/>
-          <p:cNvSpPr/>
-          <p:nvPr/>
-        </p:nvSpPr>
-        <p:spPr>
-          <a:xfrm>
-            <a:off x="8010144" y="2743200"/>
+              <a:t>The chef photographs the same on arrival, so Agripals can compare quality and consistency.</a:t>
+            </a:r>
+            <a:endParaRPr lang="en-US" sz="1300" dirty="0"/>
+          </a:p>
+        </p:txBody>
+      </p:sp>
+      <p:sp>
+        <p:nvSpPr>
+          <p:cNvPr id="14" name="Shape 10"/>
+          <p:cNvSpPr/>
+          <p:nvPr/>
+        </p:nvSpPr>
+        <p:spPr>
+          <a:xfrm>
+            <a:off x="8010144" y="2331720"/>
             <a:ext cx="3383280" cy="3017520"/>
           </a:xfrm>
           <a:prstGeom prst="roundRect">
@@ -2887,20 +2740,20 @@
       </p:sp>
       <p:sp>
         <p:nvSpPr>
-          <p:cNvPr id="18" name="Shape 16"/>
-          <p:cNvSpPr/>
-          <p:nvPr/>
-        </p:nvSpPr>
-        <p:spPr>
-          <a:xfrm>
-            <a:off x="8330184" y="3090672"/>
-            <a:ext cx="777240" cy="777240"/>
+          <p:cNvPr id="15" name="Shape 11"/>
+          <p:cNvSpPr/>
+          <p:nvPr/>
+        </p:nvSpPr>
+        <p:spPr>
+          <a:xfrm>
+            <a:off x="8330184" y="2697480"/>
+            <a:ext cx="822960" cy="822960"/>
           </a:xfrm>
           <a:prstGeom prst="ellipse">
             <a:avLst/>
           </a:prstGeom>
           <a:solidFill>
-            <a:srgbClr val="4CC499"/>
+            <a:srgbClr val="DCEFE1"/>
           </a:solidFill>
           <a:ln/>
         </p:spPr>
@@ -2909,55 +2762,40 @@
           <a:p/>
         </p:txBody>
       </p:sp>
-      <p:sp>
-        <p:nvSpPr>
-          <p:cNvPr id="19" name="Text 17"/>
-          <p:cNvSpPr/>
-          <p:nvPr/>
-        </p:nvSpPr>
-        <p:spPr>
-          <a:xfrm>
-            <a:off x="8330184" y="3090672"/>
-            <a:ext cx="777240" cy="777240"/>
-          </a:xfrm>
-          <a:prstGeom prst="rect">
-            <a:avLst/>
-          </a:prstGeom>
-          <a:noFill/>
-          <a:ln/>
-        </p:spPr>
-        <p:txBody>
-          <a:bodyPr wrap="square" lIns="0" tIns="0" rIns="0" bIns="0" rtlCol="0" anchor="ctr"/>
-          <a:lstStyle/>
-          <a:p>
-            <a:pPr algn="ctr" indent="0" marL="0">
-              <a:buNone/>
-            </a:pPr>
-            <a:r>
-              <a:rPr lang="en-US" sz="3000" b="1" dirty="0">
-                <a:solidFill>
-                  <a:srgbClr val="FFFFFF"/>
-                </a:solidFill>
-                <a:latin typeface="Calibri" pitchFamily="34" charset="0"/>
-                <a:ea typeface="Calibri" pitchFamily="34" charset="-122"/>
-                <a:cs typeface="Calibri" pitchFamily="34" charset="-120"/>
-              </a:rPr>
-              <a:t>3</a:t>
-            </a:r>
-            <a:endParaRPr lang="en-US" sz="3000" dirty="0"/>
-          </a:p>
-        </p:txBody>
-      </p:sp>
-      <p:sp>
-        <p:nvSpPr>
-          <p:cNvPr id="20" name="Text 18"/>
-          <p:cNvSpPr/>
-          <p:nvPr/>
-        </p:nvSpPr>
-        <p:spPr>
-          <a:xfrm>
-            <a:off x="9244584" y="3154680"/>
-            <a:ext cx="1920240" cy="320040"/>
+      <p:pic>
+        <p:nvPicPr>
+          <p:cNvPr id="16" name="Image 2" descr="preencoded.png"/>
+          <p:cNvPicPr>
+            <a:picLocks noChangeAspect="1"/>
+          </p:cNvPicPr>
+          <p:nvPr/>
+        </p:nvPicPr>
+        <p:blipFill>
+          <a:blip r:embed="rId3"/>
+          <a:stretch>
+            <a:fillRect/>
+          </a:stretch>
+        </p:blipFill>
+        <p:spPr>
+          <a:xfrm>
+            <a:off x="8527694" y="2894990"/>
+            <a:ext cx="427939" cy="427939"/>
+          </a:xfrm>
+          <a:prstGeom prst="rect">
+            <a:avLst/>
+          </a:prstGeom>
+        </p:spPr>
+      </p:pic>
+      <p:sp>
+        <p:nvSpPr>
+          <p:cNvPr id="17" name="Text 12"/>
+          <p:cNvSpPr/>
+          <p:nvPr/>
+        </p:nvSpPr>
+        <p:spPr>
+          <a:xfrm>
+            <a:off x="8330184" y="3703320"/>
+            <a:ext cx="2743200" cy="457200"/>
           </a:xfrm>
           <a:prstGeom prst="rect">
             <a:avLst/>
@@ -2973,46 +2811,7 @@
               <a:buNone/>
             </a:pPr>
             <a:r>
-              <a:rPr lang="en-US" sz="1100" b="1" spc="100" kern="0" dirty="0">
-                <a:solidFill>
-                  <a:srgbClr val="68786F"/>
-                </a:solidFill>
-                <a:latin typeface="Calibri" pitchFamily="34" charset="0"/>
-                <a:ea typeface="Calibri" pitchFamily="34" charset="-122"/>
-                <a:cs typeface="Calibri" pitchFamily="34" charset="-120"/>
-              </a:rPr>
-              <a:t>Phase 3</a:t>
-            </a:r>
-            <a:endParaRPr lang="en-US" sz="1100" dirty="0"/>
-          </a:p>
-        </p:txBody>
-      </p:sp>
-      <p:sp>
-        <p:nvSpPr>
-          <p:cNvPr id="21" name="Text 19"/>
-          <p:cNvSpPr/>
-          <p:nvPr/>
-        </p:nvSpPr>
-        <p:spPr>
-          <a:xfrm>
-            <a:off x="9244584" y="3429000"/>
-            <a:ext cx="1920240" cy="457200"/>
-          </a:xfrm>
-          <a:prstGeom prst="rect">
-            <a:avLst/>
-          </a:prstGeom>
-          <a:noFill/>
-          <a:ln/>
-        </p:spPr>
-        <p:txBody>
-          <a:bodyPr wrap="square" lIns="0" tIns="0" rIns="0" bIns="0" rtlCol="0" anchor="ctr"/>
-          <a:lstStyle/>
-          <a:p>
-            <a:pPr indent="0" marL="0">
-              <a:buNone/>
-            </a:pPr>
-            <a:r>
-              <a:rPr lang="en-US" sz="1550" b="1" dirty="0">
+              <a:rPr lang="en-US" sz="1700" b="1" dirty="0">
                 <a:solidFill>
                   <a:srgbClr val="123024"/>
                 </a:solidFill>
@@ -3020,22 +2819,22 @@
                 <a:ea typeface="Calibri" pitchFamily="34" charset="-122"/>
                 <a:cs typeface="Calibri" pitchFamily="34" charset="-120"/>
               </a:rPr>
-              <a:t>Direct import / export</a:t>
-            </a:r>
-            <a:endParaRPr lang="en-US" sz="1550" dirty="0"/>
-          </a:p>
-        </p:txBody>
-      </p:sp>
-      <p:sp>
-        <p:nvSpPr>
-          <p:cNvPr id="22" name="Text 20"/>
-          <p:cNvSpPr/>
-          <p:nvPr/>
-        </p:nvSpPr>
-        <p:spPr>
-          <a:xfrm>
-            <a:off x="8330184" y="4251960"/>
-            <a:ext cx="2743200" cy="1280160"/>
+              <a:t>Escrow on match</a:t>
+            </a:r>
+            <a:endParaRPr lang="en-US" sz="1700" dirty="0"/>
+          </a:p>
+        </p:txBody>
+      </p:sp>
+      <p:sp>
+        <p:nvSpPr>
+          <p:cNvPr id="18" name="Text 13"/>
+          <p:cNvSpPr/>
+          <p:nvPr/>
+        </p:nvSpPr>
+        <p:spPr>
+          <a:xfrm>
+            <a:off x="8330184" y="4206240"/>
+            <a:ext cx="2743200" cy="1005840"/>
           </a:xfrm>
           <a:prstGeom prst="rect">
             <a:avLst/>
@@ -3054,7 +2853,7 @@
               <a:buNone/>
             </a:pPr>
             <a:r>
-              <a:rPr lang="en-US" sz="1280" dirty="0">
+              <a:rPr lang="en-US" sz="1300" dirty="0">
                 <a:solidFill>
                   <a:srgbClr val="68786F"/>
                 </a:solidFill>
@@ -3062,15 +2861,15 @@
                 <a:ea typeface="Calibri" pitchFamily="34" charset="-122"/>
                 <a:cs typeface="Calibri" pitchFamily="34" charset="-120"/>
               </a:rPr>
-              <a:t>Cut exporters and importers too, with AI coordinating documents, routing and compliance.</a:t>
-            </a:r>
-            <a:endParaRPr lang="en-US" sz="1280" dirty="0"/>
-          </a:p>
-        </p:txBody>
-      </p:sp>
-      <p:sp>
-        <p:nvSpPr>
-          <p:cNvPr id="23" name="Text 21"/>
+              <a:t>The farmer is paid when delivery and grading are confirmed — no net-30 invoice chasing.</a:t>
+            </a:r>
+            <a:endParaRPr lang="en-US" sz="1300" dirty="0"/>
+          </a:p>
+        </p:txBody>
+      </p:sp>
+      <p:sp>
+        <p:nvSpPr>
+          <p:cNvPr id="19" name="Text 14"/>
           <p:cNvSpPr/>
           <p:nvPr/>
         </p:nvSpPr>
@@ -3109,7 +2908,7 @@
       </p:sp>
       <p:sp>
         <p:nvSpPr>
-          <p:cNvPr id="24" name="Text 22"/>
+          <p:cNvPr id="20" name="Text 15"/>
           <p:cNvSpPr/>
           <p:nvPr/>
         </p:nvSpPr>
@@ -3211,7 +3010,7 @@
                 <a:ea typeface="Calibri" pitchFamily="34" charset="-122"/>
                 <a:cs typeface="Calibri" pitchFamily="34" charset="-120"/>
               </a:rPr>
-              <a:t>BUSINESS MODEL</a:t>
+              <a:t>GO TO MARKET</a:t>
             </a:r>
             <a:endParaRPr lang="en-US" sz="1250" dirty="0"/>
           </a:p>
@@ -3253,7 +3052,7 @@
                 <a:ea typeface="Calibri" pitchFamily="34" charset="-122"/>
                 <a:cs typeface="Calibri" pitchFamily="34" charset="-120"/>
               </a:rPr>
-              <a:t>We earn when food moves: 5% of every order.</a:t>
+              <a:t>One city. One product. One clear proof point.</a:t>
             </a:r>
             <a:endParaRPr lang="en-US" sz="3400" dirty="0"/>
           </a:p>
@@ -3295,7 +3094,7 @@
                 <a:ea typeface="Calibri" pitchFamily="34" charset="-122"/>
                 <a:cs typeface="Calibri" pitchFamily="34" charset="-120"/>
               </a:rPr>
-              <a:t>Simple, aligned economics. Agripals takes a small cut of everything it moves — and the cheaper it makes food, the more that moves.</a:t>
+              <a:t>San Francisco oysters — direct from Northern California farms into SF restaurants — then expand the same rails outward.</a:t>
             </a:r>
             <a:endParaRPr lang="en-US" sz="1600" dirty="0"/>
           </a:p>
@@ -3430,7 +3229,7 @@
                 <a:ea typeface="Calibri" pitchFamily="34" charset="-122"/>
                 <a:cs typeface="Calibri" pitchFamily="34" charset="-120"/>
               </a:rPr>
-              <a:t>Take rate</a:t>
+              <a:t>Phase 1</a:t>
             </a:r>
             <a:endParaRPr lang="en-US" sz="1100" dirty="0"/>
           </a:p>
@@ -3469,7 +3268,7 @@
                 <a:ea typeface="Calibri" pitchFamily="34" charset="-122"/>
                 <a:cs typeface="Calibri" pitchFamily="34" charset="-120"/>
               </a:rPr>
-              <a:t>5% of every order</a:t>
+              <a:t>SF oysters</a:t>
             </a:r>
             <a:endParaRPr lang="en-US" sz="1550" dirty="0"/>
           </a:p>
@@ -3511,7 +3310,7 @@
                 <a:ea typeface="Calibri" pitchFamily="34" charset="-122"/>
                 <a:cs typeface="Calibri" pitchFamily="34" charset="-120"/>
               </a:rPr>
-              <a:t>Agripals takes ~5% of each order's value (GMV). No subscription — we only earn when the kitchen saves.</a:t>
+              <a:t>~10 oyster farmers, 10–20 restaurants, one reliable cold-chain logistics partner.</a:t>
             </a:r>
             <a:endParaRPr lang="en-US" sz="1280" dirty="0"/>
           </a:p>
@@ -3646,7 +3445,7 @@
                 <a:ea typeface="Calibri" pitchFamily="34" charset="-122"/>
                 <a:cs typeface="Calibri" pitchFamily="34" charset="-120"/>
               </a:rPr>
-              <a:t>Credit float</a:t>
+              <a:t>Phase 2</a:t>
             </a:r>
             <a:endParaRPr lang="en-US" sz="1100" dirty="0"/>
           </a:p>
@@ -3685,7 +3484,7 @@
                 <a:ea typeface="Calibri" pitchFamily="34" charset="-122"/>
                 <a:cs typeface="Calibri" pitchFamily="34" charset="-120"/>
               </a:rPr>
-              <a:t>We finance the middle</a:t>
+              <a:t>More direct seafood</a:t>
             </a:r>
             <a:endParaRPr lang="en-US" sz="1550" dirty="0"/>
           </a:p>
@@ -3727,7 +3526,7 @@
                 <a:ea typeface="Calibri" pitchFamily="34" charset="-122"/>
                 <a:cs typeface="Calibri" pitchFamily="34" charset="-120"/>
               </a:rPr>
-              <a:t>Farms don't want to carry credit. We pay them on delivery and bill kitchens on terms — earning a financing margin.</a:t>
+              <a:t>Shrimp, lobster, crab and other gradable products where freshness and provenance matter.</a:t>
             </a:r>
             <a:endParaRPr lang="en-US" sz="1280" dirty="0"/>
           </a:p>
@@ -3862,7 +3661,7 @@
                 <a:ea typeface="Calibri" pitchFamily="34" charset="-122"/>
                 <a:cs typeface="Calibri" pitchFamily="34" charset="-120"/>
               </a:rPr>
-              <a:t>Network data</a:t>
+              <a:t>Phase 3</a:t>
             </a:r>
             <a:endParaRPr lang="en-US" sz="1100" dirty="0"/>
           </a:p>
@@ -3901,7 +3700,7 @@
                 <a:ea typeface="Calibri" pitchFamily="34" charset="-122"/>
                 <a:cs typeface="Calibri" pitchFamily="34" charset="-120"/>
               </a:rPr>
-              <a:t>It compounds</a:t>
+              <a:t>Direct import / export</a:t>
             </a:r>
             <a:endParaRPr lang="en-US" sz="1550" dirty="0"/>
           </a:p>
@@ -3943,7 +3742,7 @@
                 <a:ea typeface="Calibri" pitchFamily="34" charset="-122"/>
                 <a:cs typeface="Calibri" pitchFamily="34" charset="-120"/>
               </a:rPr>
-              <a:t>Every order sharpens pricing, grading and demand — better matches over time, and a moat that widens with volume.</a:t>
+              <a:t>Cut exporters and importers too, with AI coordinating documents, routing and compliance.</a:t>
             </a:r>
             <a:endParaRPr lang="en-US" sz="1280" dirty="0"/>
           </a:p>
@@ -4036,6 +3835,887 @@
 </file>
 
 <file path=ppt/slides/slide12.xml><?xml version="1.0" encoding="utf-8"?>
+<p:sld xmlns:a="http://schemas.openxmlformats.org/drawingml/2006/main" xmlns:r="http://schemas.openxmlformats.org/officeDocument/2006/relationships" xmlns:p="http://schemas.openxmlformats.org/presentationml/2006/main">
+  <p:cSld name="Slide 9">
+    <p:bg>
+      <p:bgPr>
+        <a:solidFill>
+          <a:srgbClr val="F4F7F6"/>
+        </a:solidFill>
+      </p:bgPr>
+    </p:bg>
+    <p:spTree>
+      <p:nvGrpSpPr>
+        <p:cNvPr id="1" name=""/>
+        <p:cNvGrpSpPr/>
+        <p:nvPr/>
+      </p:nvGrpSpPr>
+      <p:grpSpPr>
+        <a:xfrm>
+          <a:off x="0" y="0"/>
+          <a:ext cx="0" cy="0"/>
+          <a:chOff x="0" y="0"/>
+          <a:chExt cx="0" cy="0"/>
+        </a:xfrm>
+      </p:grpSpPr>
+      <p:sp>
+        <p:nvSpPr>
+          <p:cNvPr id="2" name="Text 0"/>
+          <p:cNvSpPr/>
+          <p:nvPr/>
+        </p:nvSpPr>
+        <p:spPr>
+          <a:xfrm>
+            <a:off x="658368" y="457200"/>
+            <a:ext cx="8229600" cy="320040"/>
+          </a:xfrm>
+          <a:prstGeom prst="rect">
+            <a:avLst/>
+          </a:prstGeom>
+          <a:noFill/>
+          <a:ln/>
+        </p:spPr>
+        <p:txBody>
+          <a:bodyPr wrap="square" lIns="0" tIns="0" rIns="0" bIns="0" rtlCol="0" anchor="ctr"/>
+          <a:lstStyle/>
+          <a:p>
+            <a:pPr algn="l" indent="0" marL="0">
+              <a:buNone/>
+            </a:pPr>
+            <a:r>
+              <a:rPr lang="en-US" sz="1250" b="1" spc="300" kern="0" dirty="0">
+                <a:solidFill>
+                  <a:srgbClr val="37A278"/>
+                </a:solidFill>
+                <a:latin typeface="Calibri" pitchFamily="34" charset="0"/>
+                <a:ea typeface="Calibri" pitchFamily="34" charset="-122"/>
+                <a:cs typeface="Calibri" pitchFamily="34" charset="-120"/>
+              </a:rPr>
+              <a:t>BUSINESS MODEL</a:t>
+            </a:r>
+            <a:endParaRPr lang="en-US" sz="1250" dirty="0"/>
+          </a:p>
+        </p:txBody>
+      </p:sp>
+      <p:sp>
+        <p:nvSpPr>
+          <p:cNvPr id="3" name="Text 1"/>
+          <p:cNvSpPr/>
+          <p:nvPr/>
+        </p:nvSpPr>
+        <p:spPr>
+          <a:xfrm>
+            <a:off x="658368" y="841248"/>
+            <a:ext cx="10872216" cy="1051560"/>
+          </a:xfrm>
+          <a:prstGeom prst="rect">
+            <a:avLst/>
+          </a:prstGeom>
+          <a:noFill/>
+          <a:ln/>
+        </p:spPr>
+        <p:txBody>
+          <a:bodyPr wrap="square" lIns="0" tIns="0" rIns="0" bIns="0" rtlCol="0" anchor="ctr"/>
+          <a:lstStyle/>
+          <a:p>
+            <a:pPr algn="l" indent="0" marL="0">
+              <a:lnSpc>
+                <a:spcPct val="100000"/>
+              </a:lnSpc>
+              <a:buNone/>
+            </a:pPr>
+            <a:r>
+              <a:rPr lang="en-US" sz="3400" b="1" dirty="0">
+                <a:solidFill>
+                  <a:srgbClr val="123024"/>
+                </a:solidFill>
+                <a:latin typeface="Calibri" pitchFamily="34" charset="0"/>
+                <a:ea typeface="Calibri" pitchFamily="34" charset="-122"/>
+                <a:cs typeface="Calibri" pitchFamily="34" charset="-120"/>
+              </a:rPr>
+              <a:t>We earn when food moves: 5% of every order.</a:t>
+            </a:r>
+            <a:endParaRPr lang="en-US" sz="3400" dirty="0"/>
+          </a:p>
+        </p:txBody>
+      </p:sp>
+      <p:sp>
+        <p:nvSpPr>
+          <p:cNvPr id="4" name="Text 2"/>
+          <p:cNvSpPr/>
+          <p:nvPr/>
+        </p:nvSpPr>
+        <p:spPr>
+          <a:xfrm>
+            <a:off x="658368" y="1828800"/>
+            <a:ext cx="10607040" cy="640080"/>
+          </a:xfrm>
+          <a:prstGeom prst="rect">
+            <a:avLst/>
+          </a:prstGeom>
+          <a:noFill/>
+          <a:ln/>
+        </p:spPr>
+        <p:txBody>
+          <a:bodyPr wrap="square" lIns="0" tIns="0" rIns="0" bIns="0" rtlCol="0" anchor="ctr"/>
+          <a:lstStyle/>
+          <a:p>
+            <a:pPr indent="0" marL="0">
+              <a:lnSpc>
+                <a:spcPct val="115000"/>
+              </a:lnSpc>
+              <a:buNone/>
+            </a:pPr>
+            <a:r>
+              <a:rPr lang="en-US" sz="1600" dirty="0">
+                <a:solidFill>
+                  <a:srgbClr val="12201A"/>
+                </a:solidFill>
+                <a:latin typeface="Calibri" pitchFamily="34" charset="0"/>
+                <a:ea typeface="Calibri" pitchFamily="34" charset="-122"/>
+                <a:cs typeface="Calibri" pitchFamily="34" charset="-120"/>
+              </a:rPr>
+              <a:t>Simple, aligned economics. Agripals takes a small cut of everything it moves — and the cheaper it makes food, the more that moves.</a:t>
+            </a:r>
+            <a:endParaRPr lang="en-US" sz="1600" dirty="0"/>
+          </a:p>
+        </p:txBody>
+      </p:sp>
+      <p:sp>
+        <p:nvSpPr>
+          <p:cNvPr id="5" name="Shape 3"/>
+          <p:cNvSpPr/>
+          <p:nvPr/>
+        </p:nvSpPr>
+        <p:spPr>
+          <a:xfrm>
+            <a:off x="658368" y="2743200"/>
+            <a:ext cx="3383280" cy="3017520"/>
+          </a:xfrm>
+          <a:prstGeom prst="roundRect">
+            <a:avLst>
+              <a:gd name="adj" fmla="val 4242"/>
+            </a:avLst>
+          </a:prstGeom>
+          <a:solidFill>
+            <a:srgbClr val="FFFFFF"/>
+          </a:solidFill>
+          <a:ln/>
+          <a:effectLst>
+            <a:outerShdw sx="100000" sy="100000" kx="0" ky="0" algn="bl" rotWithShape="0" blurRad="127000" dist="38100" dir="5400000">
+              <a:srgbClr val="1B3A2E">
+                <a:alpha val="16000"/>
+              </a:srgbClr>
+            </a:outerShdw>
+          </a:effectLst>
+        </p:spPr>
+        <p:txBody>
+          <a:bodyPr/>
+          <a:p/>
+        </p:txBody>
+      </p:sp>
+      <p:sp>
+        <p:nvSpPr>
+          <p:cNvPr id="6" name="Shape 4"/>
+          <p:cNvSpPr/>
+          <p:nvPr/>
+        </p:nvSpPr>
+        <p:spPr>
+          <a:xfrm>
+            <a:off x="978408" y="3090672"/>
+            <a:ext cx="777240" cy="777240"/>
+          </a:xfrm>
+          <a:prstGeom prst="ellipse">
+            <a:avLst/>
+          </a:prstGeom>
+          <a:solidFill>
+            <a:srgbClr val="2E8564"/>
+          </a:solidFill>
+          <a:ln/>
+        </p:spPr>
+        <p:txBody>
+          <a:bodyPr/>
+          <a:p/>
+        </p:txBody>
+      </p:sp>
+      <p:sp>
+        <p:nvSpPr>
+          <p:cNvPr id="7" name="Text 5"/>
+          <p:cNvSpPr/>
+          <p:nvPr/>
+        </p:nvSpPr>
+        <p:spPr>
+          <a:xfrm>
+            <a:off x="978408" y="3090672"/>
+            <a:ext cx="777240" cy="777240"/>
+          </a:xfrm>
+          <a:prstGeom prst="rect">
+            <a:avLst/>
+          </a:prstGeom>
+          <a:noFill/>
+          <a:ln/>
+        </p:spPr>
+        <p:txBody>
+          <a:bodyPr wrap="square" lIns="0" tIns="0" rIns="0" bIns="0" rtlCol="0" anchor="ctr"/>
+          <a:lstStyle/>
+          <a:p>
+            <a:pPr algn="ctr" indent="0" marL="0">
+              <a:buNone/>
+            </a:pPr>
+            <a:r>
+              <a:rPr lang="en-US" sz="3000" b="1" dirty="0">
+                <a:solidFill>
+                  <a:srgbClr val="FFFFFF"/>
+                </a:solidFill>
+                <a:latin typeface="Calibri" pitchFamily="34" charset="0"/>
+                <a:ea typeface="Calibri" pitchFamily="34" charset="-122"/>
+                <a:cs typeface="Calibri" pitchFamily="34" charset="-120"/>
+              </a:rPr>
+              <a:t>1</a:t>
+            </a:r>
+            <a:endParaRPr lang="en-US" sz="3000" dirty="0"/>
+          </a:p>
+        </p:txBody>
+      </p:sp>
+      <p:sp>
+        <p:nvSpPr>
+          <p:cNvPr id="8" name="Text 6"/>
+          <p:cNvSpPr/>
+          <p:nvPr/>
+        </p:nvSpPr>
+        <p:spPr>
+          <a:xfrm>
+            <a:off x="1892808" y="3154680"/>
+            <a:ext cx="1920240" cy="320040"/>
+          </a:xfrm>
+          <a:prstGeom prst="rect">
+            <a:avLst/>
+          </a:prstGeom>
+          <a:noFill/>
+          <a:ln/>
+        </p:spPr>
+        <p:txBody>
+          <a:bodyPr wrap="square" lIns="0" tIns="0" rIns="0" bIns="0" rtlCol="0" anchor="ctr"/>
+          <a:lstStyle/>
+          <a:p>
+            <a:pPr indent="0" marL="0">
+              <a:buNone/>
+            </a:pPr>
+            <a:r>
+              <a:rPr lang="en-US" sz="1100" b="1" spc="100" kern="0" dirty="0">
+                <a:solidFill>
+                  <a:srgbClr val="68786F"/>
+                </a:solidFill>
+                <a:latin typeface="Calibri" pitchFamily="34" charset="0"/>
+                <a:ea typeface="Calibri" pitchFamily="34" charset="-122"/>
+                <a:cs typeface="Calibri" pitchFamily="34" charset="-120"/>
+              </a:rPr>
+              <a:t>Take rate</a:t>
+            </a:r>
+            <a:endParaRPr lang="en-US" sz="1100" dirty="0"/>
+          </a:p>
+        </p:txBody>
+      </p:sp>
+      <p:sp>
+        <p:nvSpPr>
+          <p:cNvPr id="9" name="Text 7"/>
+          <p:cNvSpPr/>
+          <p:nvPr/>
+        </p:nvSpPr>
+        <p:spPr>
+          <a:xfrm>
+            <a:off x="1892808" y="3429000"/>
+            <a:ext cx="1920240" cy="457200"/>
+          </a:xfrm>
+          <a:prstGeom prst="rect">
+            <a:avLst/>
+          </a:prstGeom>
+          <a:noFill/>
+          <a:ln/>
+        </p:spPr>
+        <p:txBody>
+          <a:bodyPr wrap="square" lIns="0" tIns="0" rIns="0" bIns="0" rtlCol="0" anchor="ctr"/>
+          <a:lstStyle/>
+          <a:p>
+            <a:pPr indent="0" marL="0">
+              <a:buNone/>
+            </a:pPr>
+            <a:r>
+              <a:rPr lang="en-US" sz="1550" b="1" dirty="0">
+                <a:solidFill>
+                  <a:srgbClr val="123024"/>
+                </a:solidFill>
+                <a:latin typeface="Calibri" pitchFamily="34" charset="0"/>
+                <a:ea typeface="Calibri" pitchFamily="34" charset="-122"/>
+                <a:cs typeface="Calibri" pitchFamily="34" charset="-120"/>
+              </a:rPr>
+              <a:t>5% of every order</a:t>
+            </a:r>
+            <a:endParaRPr lang="en-US" sz="1550" dirty="0"/>
+          </a:p>
+        </p:txBody>
+      </p:sp>
+      <p:sp>
+        <p:nvSpPr>
+          <p:cNvPr id="10" name="Text 8"/>
+          <p:cNvSpPr/>
+          <p:nvPr/>
+        </p:nvSpPr>
+        <p:spPr>
+          <a:xfrm>
+            <a:off x="978408" y="4251960"/>
+            <a:ext cx="2743200" cy="1280160"/>
+          </a:xfrm>
+          <a:prstGeom prst="rect">
+            <a:avLst/>
+          </a:prstGeom>
+          <a:noFill/>
+          <a:ln/>
+        </p:spPr>
+        <p:txBody>
+          <a:bodyPr wrap="square" lIns="0" tIns="0" rIns="0" bIns="0" rtlCol="0" anchor="ctr"/>
+          <a:lstStyle/>
+          <a:p>
+            <a:pPr indent="0" marL="0">
+              <a:lnSpc>
+                <a:spcPct val="118000"/>
+              </a:lnSpc>
+              <a:buNone/>
+            </a:pPr>
+            <a:r>
+              <a:rPr lang="en-US" sz="1280" dirty="0">
+                <a:solidFill>
+                  <a:srgbClr val="68786F"/>
+                </a:solidFill>
+                <a:latin typeface="Calibri" pitchFamily="34" charset="0"/>
+                <a:ea typeface="Calibri" pitchFamily="34" charset="-122"/>
+                <a:cs typeface="Calibri" pitchFamily="34" charset="-120"/>
+              </a:rPr>
+              <a:t>Agripals takes ~5% of each order's value (GMV). No subscription — we only earn when the kitchen saves.</a:t>
+            </a:r>
+            <a:endParaRPr lang="en-US" sz="1280" dirty="0"/>
+          </a:p>
+        </p:txBody>
+      </p:sp>
+      <p:sp>
+        <p:nvSpPr>
+          <p:cNvPr id="11" name="Shape 9"/>
+          <p:cNvSpPr/>
+          <p:nvPr/>
+        </p:nvSpPr>
+        <p:spPr>
+          <a:xfrm>
+            <a:off x="4334256" y="2743200"/>
+            <a:ext cx="3383280" cy="3017520"/>
+          </a:xfrm>
+          <a:prstGeom prst="roundRect">
+            <a:avLst>
+              <a:gd name="adj" fmla="val 4242"/>
+            </a:avLst>
+          </a:prstGeom>
+          <a:solidFill>
+            <a:srgbClr val="FFFFFF"/>
+          </a:solidFill>
+          <a:ln/>
+          <a:effectLst>
+            <a:outerShdw sx="100000" sy="100000" kx="0" ky="0" algn="bl" rotWithShape="0" blurRad="127000" dist="38100" dir="5400000">
+              <a:srgbClr val="1B3A2E">
+                <a:alpha val="16000"/>
+              </a:srgbClr>
+            </a:outerShdw>
+          </a:effectLst>
+        </p:spPr>
+        <p:txBody>
+          <a:bodyPr/>
+          <a:p/>
+        </p:txBody>
+      </p:sp>
+      <p:sp>
+        <p:nvSpPr>
+          <p:cNvPr id="12" name="Shape 10"/>
+          <p:cNvSpPr/>
+          <p:nvPr/>
+        </p:nvSpPr>
+        <p:spPr>
+          <a:xfrm>
+            <a:off x="4654296" y="3090672"/>
+            <a:ext cx="777240" cy="777240"/>
+          </a:xfrm>
+          <a:prstGeom prst="ellipse">
+            <a:avLst/>
+          </a:prstGeom>
+          <a:solidFill>
+            <a:srgbClr val="37A278"/>
+          </a:solidFill>
+          <a:ln/>
+        </p:spPr>
+        <p:txBody>
+          <a:bodyPr/>
+          <a:p/>
+        </p:txBody>
+      </p:sp>
+      <p:sp>
+        <p:nvSpPr>
+          <p:cNvPr id="13" name="Text 11"/>
+          <p:cNvSpPr/>
+          <p:nvPr/>
+        </p:nvSpPr>
+        <p:spPr>
+          <a:xfrm>
+            <a:off x="4654296" y="3090672"/>
+            <a:ext cx="777240" cy="777240"/>
+          </a:xfrm>
+          <a:prstGeom prst="rect">
+            <a:avLst/>
+          </a:prstGeom>
+          <a:noFill/>
+          <a:ln/>
+        </p:spPr>
+        <p:txBody>
+          <a:bodyPr wrap="square" lIns="0" tIns="0" rIns="0" bIns="0" rtlCol="0" anchor="ctr"/>
+          <a:lstStyle/>
+          <a:p>
+            <a:pPr algn="ctr" indent="0" marL="0">
+              <a:buNone/>
+            </a:pPr>
+            <a:r>
+              <a:rPr lang="en-US" sz="3000" b="1" dirty="0">
+                <a:solidFill>
+                  <a:srgbClr val="FFFFFF"/>
+                </a:solidFill>
+                <a:latin typeface="Calibri" pitchFamily="34" charset="0"/>
+                <a:ea typeface="Calibri" pitchFamily="34" charset="-122"/>
+                <a:cs typeface="Calibri" pitchFamily="34" charset="-120"/>
+              </a:rPr>
+              <a:t>2</a:t>
+            </a:r>
+            <a:endParaRPr lang="en-US" sz="3000" dirty="0"/>
+          </a:p>
+        </p:txBody>
+      </p:sp>
+      <p:sp>
+        <p:nvSpPr>
+          <p:cNvPr id="14" name="Text 12"/>
+          <p:cNvSpPr/>
+          <p:nvPr/>
+        </p:nvSpPr>
+        <p:spPr>
+          <a:xfrm>
+            <a:off x="5568696" y="3154680"/>
+            <a:ext cx="1920240" cy="320040"/>
+          </a:xfrm>
+          <a:prstGeom prst="rect">
+            <a:avLst/>
+          </a:prstGeom>
+          <a:noFill/>
+          <a:ln/>
+        </p:spPr>
+        <p:txBody>
+          <a:bodyPr wrap="square" lIns="0" tIns="0" rIns="0" bIns="0" rtlCol="0" anchor="ctr"/>
+          <a:lstStyle/>
+          <a:p>
+            <a:pPr indent="0" marL="0">
+              <a:buNone/>
+            </a:pPr>
+            <a:r>
+              <a:rPr lang="en-US" sz="1100" b="1" spc="100" kern="0" dirty="0">
+                <a:solidFill>
+                  <a:srgbClr val="68786F"/>
+                </a:solidFill>
+                <a:latin typeface="Calibri" pitchFamily="34" charset="0"/>
+                <a:ea typeface="Calibri" pitchFamily="34" charset="-122"/>
+                <a:cs typeface="Calibri" pitchFamily="34" charset="-120"/>
+              </a:rPr>
+              <a:t>Credit float</a:t>
+            </a:r>
+            <a:endParaRPr lang="en-US" sz="1100" dirty="0"/>
+          </a:p>
+        </p:txBody>
+      </p:sp>
+      <p:sp>
+        <p:nvSpPr>
+          <p:cNvPr id="15" name="Text 13"/>
+          <p:cNvSpPr/>
+          <p:nvPr/>
+        </p:nvSpPr>
+        <p:spPr>
+          <a:xfrm>
+            <a:off x="5568696" y="3429000"/>
+            <a:ext cx="1920240" cy="457200"/>
+          </a:xfrm>
+          <a:prstGeom prst="rect">
+            <a:avLst/>
+          </a:prstGeom>
+          <a:noFill/>
+          <a:ln/>
+        </p:spPr>
+        <p:txBody>
+          <a:bodyPr wrap="square" lIns="0" tIns="0" rIns="0" bIns="0" rtlCol="0" anchor="ctr"/>
+          <a:lstStyle/>
+          <a:p>
+            <a:pPr indent="0" marL="0">
+              <a:buNone/>
+            </a:pPr>
+            <a:r>
+              <a:rPr lang="en-US" sz="1550" b="1" dirty="0">
+                <a:solidFill>
+                  <a:srgbClr val="123024"/>
+                </a:solidFill>
+                <a:latin typeface="Calibri" pitchFamily="34" charset="0"/>
+                <a:ea typeface="Calibri" pitchFamily="34" charset="-122"/>
+                <a:cs typeface="Calibri" pitchFamily="34" charset="-120"/>
+              </a:rPr>
+              <a:t>We finance the middle</a:t>
+            </a:r>
+            <a:endParaRPr lang="en-US" sz="1550" dirty="0"/>
+          </a:p>
+        </p:txBody>
+      </p:sp>
+      <p:sp>
+        <p:nvSpPr>
+          <p:cNvPr id="16" name="Text 14"/>
+          <p:cNvSpPr/>
+          <p:nvPr/>
+        </p:nvSpPr>
+        <p:spPr>
+          <a:xfrm>
+            <a:off x="4654296" y="4251960"/>
+            <a:ext cx="2743200" cy="1280160"/>
+          </a:xfrm>
+          <a:prstGeom prst="rect">
+            <a:avLst/>
+          </a:prstGeom>
+          <a:noFill/>
+          <a:ln/>
+        </p:spPr>
+        <p:txBody>
+          <a:bodyPr wrap="square" lIns="0" tIns="0" rIns="0" bIns="0" rtlCol="0" anchor="ctr"/>
+          <a:lstStyle/>
+          <a:p>
+            <a:pPr indent="0" marL="0">
+              <a:lnSpc>
+                <a:spcPct val="118000"/>
+              </a:lnSpc>
+              <a:buNone/>
+            </a:pPr>
+            <a:r>
+              <a:rPr lang="en-US" sz="1280" dirty="0">
+                <a:solidFill>
+                  <a:srgbClr val="68786F"/>
+                </a:solidFill>
+                <a:latin typeface="Calibri" pitchFamily="34" charset="0"/>
+                <a:ea typeface="Calibri" pitchFamily="34" charset="-122"/>
+                <a:cs typeface="Calibri" pitchFamily="34" charset="-120"/>
+              </a:rPr>
+              <a:t>Farms don't want to carry credit. We pay them on delivery and bill kitchens on terms — earning a financing margin.</a:t>
+            </a:r>
+            <a:endParaRPr lang="en-US" sz="1280" dirty="0"/>
+          </a:p>
+        </p:txBody>
+      </p:sp>
+      <p:sp>
+        <p:nvSpPr>
+          <p:cNvPr id="17" name="Shape 15"/>
+          <p:cNvSpPr/>
+          <p:nvPr/>
+        </p:nvSpPr>
+        <p:spPr>
+          <a:xfrm>
+            <a:off x="8010144" y="2743200"/>
+            <a:ext cx="3383280" cy="3017520"/>
+          </a:xfrm>
+          <a:prstGeom prst="roundRect">
+            <a:avLst>
+              <a:gd name="adj" fmla="val 4242"/>
+            </a:avLst>
+          </a:prstGeom>
+          <a:solidFill>
+            <a:srgbClr val="FFFFFF"/>
+          </a:solidFill>
+          <a:ln/>
+          <a:effectLst>
+            <a:outerShdw sx="100000" sy="100000" kx="0" ky="0" algn="bl" rotWithShape="0" blurRad="127000" dist="38100" dir="5400000">
+              <a:srgbClr val="1B3A2E">
+                <a:alpha val="16000"/>
+              </a:srgbClr>
+            </a:outerShdw>
+          </a:effectLst>
+        </p:spPr>
+        <p:txBody>
+          <a:bodyPr/>
+          <a:p/>
+        </p:txBody>
+      </p:sp>
+      <p:sp>
+        <p:nvSpPr>
+          <p:cNvPr id="18" name="Shape 16"/>
+          <p:cNvSpPr/>
+          <p:nvPr/>
+        </p:nvSpPr>
+        <p:spPr>
+          <a:xfrm>
+            <a:off x="8330184" y="3090672"/>
+            <a:ext cx="777240" cy="777240"/>
+          </a:xfrm>
+          <a:prstGeom prst="ellipse">
+            <a:avLst/>
+          </a:prstGeom>
+          <a:solidFill>
+            <a:srgbClr val="4CC499"/>
+          </a:solidFill>
+          <a:ln/>
+        </p:spPr>
+        <p:txBody>
+          <a:bodyPr/>
+          <a:p/>
+        </p:txBody>
+      </p:sp>
+      <p:sp>
+        <p:nvSpPr>
+          <p:cNvPr id="19" name="Text 17"/>
+          <p:cNvSpPr/>
+          <p:nvPr/>
+        </p:nvSpPr>
+        <p:spPr>
+          <a:xfrm>
+            <a:off x="8330184" y="3090672"/>
+            <a:ext cx="777240" cy="777240"/>
+          </a:xfrm>
+          <a:prstGeom prst="rect">
+            <a:avLst/>
+          </a:prstGeom>
+          <a:noFill/>
+          <a:ln/>
+        </p:spPr>
+        <p:txBody>
+          <a:bodyPr wrap="square" lIns="0" tIns="0" rIns="0" bIns="0" rtlCol="0" anchor="ctr"/>
+          <a:lstStyle/>
+          <a:p>
+            <a:pPr algn="ctr" indent="0" marL="0">
+              <a:buNone/>
+            </a:pPr>
+            <a:r>
+              <a:rPr lang="en-US" sz="3000" b="1" dirty="0">
+                <a:solidFill>
+                  <a:srgbClr val="FFFFFF"/>
+                </a:solidFill>
+                <a:latin typeface="Calibri" pitchFamily="34" charset="0"/>
+                <a:ea typeface="Calibri" pitchFamily="34" charset="-122"/>
+                <a:cs typeface="Calibri" pitchFamily="34" charset="-120"/>
+              </a:rPr>
+              <a:t>3</a:t>
+            </a:r>
+            <a:endParaRPr lang="en-US" sz="3000" dirty="0"/>
+          </a:p>
+        </p:txBody>
+      </p:sp>
+      <p:sp>
+        <p:nvSpPr>
+          <p:cNvPr id="20" name="Text 18"/>
+          <p:cNvSpPr/>
+          <p:nvPr/>
+        </p:nvSpPr>
+        <p:spPr>
+          <a:xfrm>
+            <a:off x="9244584" y="3154680"/>
+            <a:ext cx="1920240" cy="320040"/>
+          </a:xfrm>
+          <a:prstGeom prst="rect">
+            <a:avLst/>
+          </a:prstGeom>
+          <a:noFill/>
+          <a:ln/>
+        </p:spPr>
+        <p:txBody>
+          <a:bodyPr wrap="square" lIns="0" tIns="0" rIns="0" bIns="0" rtlCol="0" anchor="ctr"/>
+          <a:lstStyle/>
+          <a:p>
+            <a:pPr indent="0" marL="0">
+              <a:buNone/>
+            </a:pPr>
+            <a:r>
+              <a:rPr lang="en-US" sz="1100" b="1" spc="100" kern="0" dirty="0">
+                <a:solidFill>
+                  <a:srgbClr val="68786F"/>
+                </a:solidFill>
+                <a:latin typeface="Calibri" pitchFamily="34" charset="0"/>
+                <a:ea typeface="Calibri" pitchFamily="34" charset="-122"/>
+                <a:cs typeface="Calibri" pitchFamily="34" charset="-120"/>
+              </a:rPr>
+              <a:t>Network data</a:t>
+            </a:r>
+            <a:endParaRPr lang="en-US" sz="1100" dirty="0"/>
+          </a:p>
+        </p:txBody>
+      </p:sp>
+      <p:sp>
+        <p:nvSpPr>
+          <p:cNvPr id="21" name="Text 19"/>
+          <p:cNvSpPr/>
+          <p:nvPr/>
+        </p:nvSpPr>
+        <p:spPr>
+          <a:xfrm>
+            <a:off x="9244584" y="3429000"/>
+            <a:ext cx="1920240" cy="457200"/>
+          </a:xfrm>
+          <a:prstGeom prst="rect">
+            <a:avLst/>
+          </a:prstGeom>
+          <a:noFill/>
+          <a:ln/>
+        </p:spPr>
+        <p:txBody>
+          <a:bodyPr wrap="square" lIns="0" tIns="0" rIns="0" bIns="0" rtlCol="0" anchor="ctr"/>
+          <a:lstStyle/>
+          <a:p>
+            <a:pPr indent="0" marL="0">
+              <a:buNone/>
+            </a:pPr>
+            <a:r>
+              <a:rPr lang="en-US" sz="1550" b="1" dirty="0">
+                <a:solidFill>
+                  <a:srgbClr val="123024"/>
+                </a:solidFill>
+                <a:latin typeface="Calibri" pitchFamily="34" charset="0"/>
+                <a:ea typeface="Calibri" pitchFamily="34" charset="-122"/>
+                <a:cs typeface="Calibri" pitchFamily="34" charset="-120"/>
+              </a:rPr>
+              <a:t>It compounds</a:t>
+            </a:r>
+            <a:endParaRPr lang="en-US" sz="1550" dirty="0"/>
+          </a:p>
+        </p:txBody>
+      </p:sp>
+      <p:sp>
+        <p:nvSpPr>
+          <p:cNvPr id="22" name="Text 20"/>
+          <p:cNvSpPr/>
+          <p:nvPr/>
+        </p:nvSpPr>
+        <p:spPr>
+          <a:xfrm>
+            <a:off x="8330184" y="4251960"/>
+            <a:ext cx="2743200" cy="1280160"/>
+          </a:xfrm>
+          <a:prstGeom prst="rect">
+            <a:avLst/>
+          </a:prstGeom>
+          <a:noFill/>
+          <a:ln/>
+        </p:spPr>
+        <p:txBody>
+          <a:bodyPr wrap="square" lIns="0" tIns="0" rIns="0" bIns="0" rtlCol="0" anchor="ctr"/>
+          <a:lstStyle/>
+          <a:p>
+            <a:pPr indent="0" marL="0">
+              <a:lnSpc>
+                <a:spcPct val="118000"/>
+              </a:lnSpc>
+              <a:buNone/>
+            </a:pPr>
+            <a:r>
+              <a:rPr lang="en-US" sz="1280" dirty="0">
+                <a:solidFill>
+                  <a:srgbClr val="68786F"/>
+                </a:solidFill>
+                <a:latin typeface="Calibri" pitchFamily="34" charset="0"/>
+                <a:ea typeface="Calibri" pitchFamily="34" charset="-122"/>
+                <a:cs typeface="Calibri" pitchFamily="34" charset="-120"/>
+              </a:rPr>
+              <a:t>Every order sharpens pricing, grading and demand — better matches over time, and a moat that widens with volume.</a:t>
+            </a:r>
+            <a:endParaRPr lang="en-US" sz="1280" dirty="0"/>
+          </a:p>
+        </p:txBody>
+      </p:sp>
+      <p:sp>
+        <p:nvSpPr>
+          <p:cNvPr id="23" name="Text 21"/>
+          <p:cNvSpPr/>
+          <p:nvPr/>
+        </p:nvSpPr>
+        <p:spPr>
+          <a:xfrm>
+            <a:off x="11183112" y="6355080"/>
+            <a:ext cx="548640" cy="274320"/>
+          </a:xfrm>
+          <a:prstGeom prst="rect">
+            <a:avLst/>
+          </a:prstGeom>
+          <a:noFill/>
+          <a:ln/>
+        </p:spPr>
+        <p:txBody>
+          <a:bodyPr wrap="square" lIns="0" tIns="0" rIns="0" bIns="0" rtlCol="0" anchor="ctr"/>
+          <a:lstStyle/>
+          <a:p>
+            <a:pPr algn="r" indent="0" marL="0">
+              <a:buNone/>
+            </a:pPr>
+            <a:r>
+              <a:rPr lang="en-US" sz="1000" dirty="0">
+                <a:solidFill>
+                  <a:srgbClr val="68786F"/>
+                </a:solidFill>
+                <a:latin typeface="Calibri" pitchFamily="34" charset="0"/>
+                <a:ea typeface="Calibri" pitchFamily="34" charset="-122"/>
+                <a:cs typeface="Calibri" pitchFamily="34" charset="-120"/>
+              </a:rPr>
+              <a:t>12</a:t>
+            </a:r>
+            <a:endParaRPr lang="en-US" sz="1000" dirty="0"/>
+          </a:p>
+        </p:txBody>
+      </p:sp>
+      <p:sp>
+        <p:nvSpPr>
+          <p:cNvPr id="24" name="Text 22"/>
+          <p:cNvSpPr/>
+          <p:nvPr/>
+        </p:nvSpPr>
+        <p:spPr>
+          <a:xfrm>
+            <a:off x="658368" y="6355080"/>
+            <a:ext cx="2743200" cy="274320"/>
+          </a:xfrm>
+          <a:prstGeom prst="rect">
+            <a:avLst/>
+          </a:prstGeom>
+          <a:noFill/>
+          <a:ln/>
+        </p:spPr>
+        <p:txBody>
+          <a:bodyPr wrap="square" lIns="0" tIns="0" rIns="0" bIns="0" rtlCol="0" anchor="ctr"/>
+          <a:lstStyle/>
+          <a:p>
+            <a:pPr indent="0" marL="0">
+              <a:buNone/>
+            </a:pPr>
+            <a:r>
+              <a:rPr lang="en-US" sz="1000" b="1" dirty="0">
+                <a:solidFill>
+                  <a:srgbClr val="68786F"/>
+                </a:solidFill>
+                <a:latin typeface="Calibri" pitchFamily="34" charset="0"/>
+                <a:ea typeface="Calibri" pitchFamily="34" charset="-122"/>
+                <a:cs typeface="Calibri" pitchFamily="34" charset="-120"/>
+              </a:rPr>
+              <a:t>Agripals</a:t>
+            </a:r>
+            <a:endParaRPr lang="en-US" sz="1000" dirty="0"/>
+          </a:p>
+        </p:txBody>
+      </p:sp>
+    </p:spTree>
+  </p:cSld>
+  <p:clrMapOvr>
+    <a:masterClrMapping/>
+  </p:clrMapOvr>
+</p:sld>
+</file>
+
+<file path=ppt/slides/slide13.xml><?xml version="1.0" encoding="utf-8"?>
 <p:sld xmlns:a="http://schemas.openxmlformats.org/drawingml/2006/main" xmlns:r="http://schemas.openxmlformats.org/officeDocument/2006/relationships" xmlns:p="http://schemas.openxmlformats.org/presentationml/2006/main">
   <p:cSld name="Slide 3">
     <p:bg>
@@ -4653,7 +5333,7 @@
                 <a:ea typeface="Calibri" pitchFamily="34" charset="-122"/>
                 <a:cs typeface="Calibri" pitchFamily="34" charset="-120"/>
               </a:rPr>
-              <a:t>12</a:t>
+              <a:t>13</a:t>
             </a:r>
             <a:endParaRPr lang="en-US" sz="1000" dirty="0"/>
           </a:p>
@@ -4706,7 +5386,7 @@
 </p:sld>
 </file>
 
-<file path=ppt/slides/slide13.xml><?xml version="1.0" encoding="utf-8"?>
+<file path=ppt/slides/slide14.xml><?xml version="1.0" encoding="utf-8"?>
 <p:sld xmlns:a="http://schemas.openxmlformats.org/drawingml/2006/main" xmlns:r="http://schemas.openxmlformats.org/officeDocument/2006/relationships" xmlns:p="http://schemas.openxmlformats.org/presentationml/2006/main">
   <p:cSld name="Slide 10">
     <p:bg>
@@ -5236,7 +5916,7 @@
                 <a:ea typeface="Calibri" pitchFamily="34" charset="-122"/>
                 <a:cs typeface="Calibri" pitchFamily="34" charset="-120"/>
               </a:rPr>
-              <a:t>13</a:t>
+              <a:t>14</a:t>
             </a:r>
             <a:endParaRPr lang="en-US" sz="1000" dirty="0"/>
           </a:p>
@@ -5289,7 +5969,7 @@
 </p:sld>
 </file>
 
-<file path=ppt/slides/slide14.xml><?xml version="1.0" encoding="utf-8"?>
+<file path=ppt/slides/slide15.xml><?xml version="1.0" encoding="utf-8"?>
 <p:sld xmlns:a="http://schemas.openxmlformats.org/drawingml/2006/main" xmlns:r="http://schemas.openxmlformats.org/officeDocument/2006/relationships" xmlns:p="http://schemas.openxmlformats.org/presentationml/2006/main">
   <p:cSld name="Slide 11">
     <p:bg>
@@ -5953,7 +6633,7 @@
                 <a:ea typeface="Calibri" pitchFamily="34" charset="-122"/>
                 <a:cs typeface="Calibri" pitchFamily="34" charset="-120"/>
               </a:rPr>
-              <a:t>14</a:t>
+              <a:t>15</a:t>
             </a:r>
             <a:endParaRPr lang="en-US" sz="1000" dirty="0"/>
           </a:p>
@@ -6006,7 +6686,7 @@
 </p:sld>
 </file>
 
-<file path=ppt/slides/slide15.xml><?xml version="1.0" encoding="utf-8"?>
+<file path=ppt/slides/slide16.xml><?xml version="1.0" encoding="utf-8"?>
 <p:sld xmlns:a="http://schemas.openxmlformats.org/drawingml/2006/main" xmlns:r="http://schemas.openxmlformats.org/officeDocument/2006/relationships" xmlns:p="http://schemas.openxmlformats.org/presentationml/2006/main">
   <p:cSld name="Slide 12">
     <p:bg>
@@ -6560,7 +7240,7 @@
                 <a:ea typeface="Calibri" pitchFamily="34" charset="-122"/>
                 <a:cs typeface="Calibri" pitchFamily="34" charset="-120"/>
               </a:rPr>
-              <a:t>15</a:t>
+              <a:t>16</a:t>
             </a:r>
             <a:endParaRPr lang="en-US" sz="1000" dirty="0"/>
           </a:p>
@@ -6613,7 +7293,7 @@
 </p:sld>
 </file>
 
-<file path=ppt/slides/slide16.xml><?xml version="1.0" encoding="utf-8"?>
+<file path=ppt/slides/slide17.xml><?xml version="1.0" encoding="utf-8"?>
 <p:sld xmlns:a="http://schemas.openxmlformats.org/drawingml/2006/main" xmlns:r="http://schemas.openxmlformats.org/officeDocument/2006/relationships" xmlns:p="http://schemas.openxmlformats.org/presentationml/2006/main">
   <p:cSld name="Slide 13">
     <p:bg>
@@ -7237,7 +7917,7 @@
                 <a:ea typeface="Calibri" pitchFamily="34" charset="-122"/>
                 <a:cs typeface="Calibri" pitchFamily="34" charset="-120"/>
               </a:rPr>
-              <a:t>16</a:t>
+              <a:t>17</a:t>
             </a:r>
             <a:endParaRPr lang="en-US" sz="1000" dirty="0"/>
           </a:p>
@@ -7290,13 +7970,13 @@
 </p:sld>
 </file>
 
-<file path=ppt/slides/slide17.xml><?xml version="1.0" encoding="utf-8"?>
+<file path=ppt/slides/slide18.xml><?xml version="1.0" encoding="utf-8"?>
 <p:sld xmlns:a="http://schemas.openxmlformats.org/drawingml/2006/main" xmlns:r="http://schemas.openxmlformats.org/officeDocument/2006/relationships" xmlns:p="http://schemas.openxmlformats.org/presentationml/2006/main">
-  <p:cSld name="Slide 14">
+  <p:cSld name="Slide 9">
     <p:bg>
       <p:bgPr>
         <a:solidFill>
-          <a:srgbClr val="0D1B16"/>
+          <a:srgbClr val="F4F7F6"/>
         </a:solidFill>
       </p:bgPr>
     </p:bg>
@@ -7316,58 +7996,95 @@
       </p:grpSpPr>
       <p:sp>
         <p:nvSpPr>
-          <p:cNvPr id="2" name="Shape 0"/>
-          <p:cNvSpPr/>
-          <p:nvPr/>
-        </p:nvSpPr>
-        <p:spPr>
-          <a:xfrm>
-            <a:off x="-1645920" y="2194560"/>
-            <a:ext cx="6583680" cy="6583680"/>
-          </a:xfrm>
-          <a:prstGeom prst="ellipse">
-            <a:avLst/>
-          </a:prstGeom>
-          <a:solidFill>
-            <a:srgbClr val="12261E"/>
-          </a:solidFill>
-          <a:ln/>
-        </p:spPr>
-      </p:sp>
-      <p:pic>
-        <p:nvPicPr>
-          <p:cNvPr id="3" name="Image 0" descr="/sessions/relaxed-dazzling-mccarthy/mnt/Agripals/assets/agripal-mascot/transparent-sizes/agripal-green-transparent-1024.png"/>
-          <p:cNvPicPr>
-            <a:picLocks noChangeAspect="1"/>
-          </p:cNvPicPr>
-          <p:nvPr/>
-        </p:nvPicPr>
-        <p:blipFill>
-          <a:blip r:embed="rId1"/>
-          <a:stretch>
-            <a:fillRect/>
-          </a:stretch>
-        </p:blipFill>
-        <p:spPr>
-          <a:xfrm>
-            <a:off x="822960" y="2286000"/>
-            <a:ext cx="2926080" cy="2926080"/>
-          </a:xfrm>
-          <a:prstGeom prst="rect">
-            <a:avLst/>
-          </a:prstGeom>
-        </p:spPr>
-      </p:pic>
-      <p:sp>
-        <p:nvSpPr>
-          <p:cNvPr id="4" name="Text 1"/>
-          <p:cNvSpPr/>
-          <p:nvPr/>
-        </p:nvSpPr>
-        <p:spPr>
-          <a:xfrm>
-            <a:off x="4297680" y="1965960"/>
-            <a:ext cx="7406640" cy="1828800"/>
+          <p:cNvPr id="2" name="Text 0"/>
+          <p:cNvSpPr/>
+          <p:nvPr/>
+        </p:nvSpPr>
+        <p:spPr>
+          <a:xfrm>
+            <a:off x="658368" y="457200"/>
+            <a:ext cx="8229600" cy="320040"/>
+          </a:xfrm>
+          <a:prstGeom prst="rect">
+            <a:avLst/>
+          </a:prstGeom>
+          <a:noFill/>
+          <a:ln/>
+        </p:spPr>
+        <p:txBody>
+          <a:bodyPr wrap="square" lIns="0" tIns="0" rIns="0" bIns="0" rtlCol="0" anchor="ctr"/>
+          <a:lstStyle/>
+          <a:p>
+            <a:pPr algn="l" indent="0" marL="0">
+              <a:buNone/>
+            </a:pPr>
+            <a:r>
+              <a:rPr lang="en-US" sz="1250" b="1" spc="300" kern="0" dirty="0">
+                <a:solidFill>
+                  <a:srgbClr val="37A278"/>
+                </a:solidFill>
+                <a:latin typeface="Calibri" pitchFamily="34" charset="0"/>
+                <a:ea typeface="Calibri" pitchFamily="34" charset="-122"/>
+                <a:cs typeface="Calibri" pitchFamily="34" charset="-120"/>
+              </a:rPr>
+              <a:t>THE BIGGER GAME</a:t>
+            </a:r>
+            <a:endParaRPr lang="en-US" sz="1250" dirty="0"/>
+          </a:p>
+        </p:txBody>
+      </p:sp>
+      <p:sp>
+        <p:nvSpPr>
+          <p:cNvPr id="3" name="Text 1"/>
+          <p:cNvSpPr/>
+          <p:nvPr/>
+        </p:nvSpPr>
+        <p:spPr>
+          <a:xfrm>
+            <a:off x="658368" y="841248"/>
+            <a:ext cx="10872216" cy="1051560"/>
+          </a:xfrm>
+          <a:prstGeom prst="rect">
+            <a:avLst/>
+          </a:prstGeom>
+          <a:noFill/>
+          <a:ln/>
+        </p:spPr>
+        <p:txBody>
+          <a:bodyPr wrap="square" lIns="0" tIns="0" rIns="0" bIns="0" rtlCol="0" anchor="ctr"/>
+          <a:lstStyle/>
+          <a:p>
+            <a:pPr algn="l" indent="0" marL="0">
+              <a:lnSpc>
+                <a:spcPct val="100000"/>
+              </a:lnSpc>
+              <a:buNone/>
+            </a:pPr>
+            <a:r>
+              <a:rPr lang="en-US" sz="3400" b="1" dirty="0">
+                <a:solidFill>
+                  <a:srgbClr val="123024"/>
+                </a:solidFill>
+                <a:latin typeface="Calibri" pitchFamily="34" charset="0"/>
+                <a:ea typeface="Calibri" pitchFamily="34" charset="-122"/>
+                <a:cs typeface="Calibri" pitchFamily="34" charset="-120"/>
+              </a:rPr>
+              <a:t>The order is the wedge. The sector is the prize.</a:t>
+            </a:r>
+            <a:endParaRPr lang="en-US" sz="3400" dirty="0"/>
+          </a:p>
+        </p:txBody>
+      </p:sp>
+      <p:sp>
+        <p:nvSpPr>
+          <p:cNvPr id="4" name="Text 2"/>
+          <p:cNvSpPr/>
+          <p:nvPr/>
+        </p:nvSpPr>
+        <p:spPr>
+          <a:xfrm>
+            <a:off x="658368" y="1828800"/>
+            <a:ext cx="10607040" cy="640080"/>
           </a:xfrm>
           <a:prstGeom prst="rect">
             <a:avLst/>
@@ -7381,12 +8098,108 @@
           <a:p>
             <a:pPr indent="0" marL="0">
               <a:lnSpc>
-                <a:spcPct val="103000"/>
+                <a:spcPct val="115000"/>
               </a:lnSpc>
               <a:buNone/>
             </a:pPr>
             <a:r>
-              <a:rPr lang="en-US" sz="4000" b="1" dirty="0">
+              <a:rPr lang="en-US" sz="1600" dirty="0">
+                <a:solidFill>
+                  <a:srgbClr val="12201A"/>
+                </a:solidFill>
+                <a:latin typeface="Calibri" pitchFamily="34" charset="0"/>
+                <a:ea typeface="Calibri" pitchFamily="34" charset="-122"/>
+                <a:cs typeface="Calibri" pitchFamily="34" charset="-120"/>
+              </a:rPr>
+              <a:t>~1.9 million US farms — plus the kitchens they feed — don't use apps or portals. But they all text. Once they're on Agripals, we can broker everything they buy, at the moment they need it.</a:t>
+            </a:r>
+            <a:endParaRPr lang="en-US" sz="1600" dirty="0"/>
+          </a:p>
+        </p:txBody>
+      </p:sp>
+      <p:sp>
+        <p:nvSpPr>
+          <p:cNvPr id="5" name="Shape 3"/>
+          <p:cNvSpPr/>
+          <p:nvPr/>
+        </p:nvSpPr>
+        <p:spPr>
+          <a:xfrm>
+            <a:off x="658368" y="2743200"/>
+            <a:ext cx="3383280" cy="3017520"/>
+          </a:xfrm>
+          <a:prstGeom prst="roundRect">
+            <a:avLst>
+              <a:gd name="adj" fmla="val 4242"/>
+            </a:avLst>
+          </a:prstGeom>
+          <a:solidFill>
+            <a:srgbClr val="FFFFFF"/>
+          </a:solidFill>
+          <a:ln/>
+          <a:effectLst>
+            <a:outerShdw sx="100000" sy="100000" kx="0" ky="0" algn="bl" rotWithShape="0" blurRad="127000" dist="38100" dir="5400000">
+              <a:srgbClr val="1B3A2E">
+                <a:alpha val="16000"/>
+              </a:srgbClr>
+            </a:outerShdw>
+          </a:effectLst>
+        </p:spPr>
+        <p:txBody>
+          <a:bodyPr/>
+          <a:p/>
+        </p:txBody>
+      </p:sp>
+      <p:sp>
+        <p:nvSpPr>
+          <p:cNvPr id="6" name="Shape 4"/>
+          <p:cNvSpPr/>
+          <p:nvPr/>
+        </p:nvSpPr>
+        <p:spPr>
+          <a:xfrm>
+            <a:off x="978408" y="3090672"/>
+            <a:ext cx="777240" cy="777240"/>
+          </a:xfrm>
+          <a:prstGeom prst="ellipse">
+            <a:avLst/>
+          </a:prstGeom>
+          <a:solidFill>
+            <a:srgbClr val="2E8564"/>
+          </a:solidFill>
+          <a:ln/>
+        </p:spPr>
+        <p:txBody>
+          <a:bodyPr/>
+          <a:p/>
+        </p:txBody>
+      </p:sp>
+      <p:sp>
+        <p:nvSpPr>
+          <p:cNvPr id="7" name="Text 5"/>
+          <p:cNvSpPr/>
+          <p:nvPr/>
+        </p:nvSpPr>
+        <p:spPr>
+          <a:xfrm>
+            <a:off x="978408" y="3090672"/>
+            <a:ext cx="777240" cy="777240"/>
+          </a:xfrm>
+          <a:prstGeom prst="rect">
+            <a:avLst/>
+          </a:prstGeom>
+          <a:noFill/>
+          <a:ln/>
+        </p:spPr>
+        <p:txBody>
+          <a:bodyPr wrap="square" lIns="0" tIns="0" rIns="0" bIns="0" rtlCol="0" anchor="ctr"/>
+          <a:lstStyle/>
+          <a:p>
+            <a:pPr algn="ctr" indent="0" marL="0">
+              <a:buNone/>
+            </a:pPr>
+            <a:r>
+              <a:rPr lang="en-US" sz="3000" b="1" dirty="0">
                 <a:solidFill>
                   <a:srgbClr val="FFFFFF"/>
                 </a:solidFill>
@@ -7394,19 +8207,215 @@
                 <a:ea typeface="Calibri" pitchFamily="34" charset="-122"/>
                 <a:cs typeface="Calibri" pitchFamily="34" charset="-120"/>
               </a:rPr>
-              <a:t>Start with a photo.</a:t>
-            </a:r>
-            <a:endParaRPr lang="en-US" sz="4000" dirty="0"/>
-          </a:p>
+              <a:t>1</a:t>
+            </a:r>
+            <a:endParaRPr lang="en-US" sz="3000" dirty="0"/>
+          </a:p>
+        </p:txBody>
+      </p:sp>
+      <p:sp>
+        <p:nvSpPr>
+          <p:cNvPr id="8" name="Text 6"/>
+          <p:cNvSpPr/>
+          <p:nvPr/>
+        </p:nvSpPr>
+        <p:spPr>
+          <a:xfrm>
+            <a:off x="1892808" y="3154680"/>
+            <a:ext cx="1920240" cy="320040"/>
+          </a:xfrm>
+          <a:prstGeom prst="rect">
+            <a:avLst/>
+          </a:prstGeom>
+          <a:noFill/>
+          <a:ln/>
+        </p:spPr>
+        <p:txBody>
+          <a:bodyPr wrap="square" lIns="0" tIns="0" rIns="0" bIns="0" rtlCol="0" anchor="ctr"/>
+          <a:lstStyle/>
+          <a:p>
+            <a:pPr indent="0" marL="0">
+              <a:buNone/>
+            </a:pPr>
+            <a:r>
+              <a:rPr lang="en-US" sz="1100" b="1" spc="100" kern="0" dirty="0">
+                <a:solidFill>
+                  <a:srgbClr val="68786F"/>
+                </a:solidFill>
+                <a:latin typeface="Calibri" pitchFamily="34" charset="0"/>
+                <a:ea typeface="Calibri" pitchFamily="34" charset="-122"/>
+                <a:cs typeface="Calibri" pitchFamily="34" charset="-120"/>
+              </a:rPr>
+              <a:t>Finance</a:t>
+            </a:r>
+            <a:endParaRPr lang="en-US" sz="1100" dirty="0"/>
+          </a:p>
+        </p:txBody>
+      </p:sp>
+      <p:sp>
+        <p:nvSpPr>
+          <p:cNvPr id="9" name="Text 7"/>
+          <p:cNvSpPr/>
+          <p:nvPr/>
+        </p:nvSpPr>
+        <p:spPr>
+          <a:xfrm>
+            <a:off x="1892808" y="3429000"/>
+            <a:ext cx="1920240" cy="457200"/>
+          </a:xfrm>
+          <a:prstGeom prst="rect">
+            <a:avLst/>
+          </a:prstGeom>
+          <a:noFill/>
+          <a:ln/>
+        </p:spPr>
+        <p:txBody>
+          <a:bodyPr wrap="square" lIns="0" tIns="0" rIns="0" bIns="0" rtlCol="0" anchor="ctr"/>
+          <a:lstStyle/>
+          <a:p>
+            <a:pPr indent="0" marL="0">
+              <a:buNone/>
+            </a:pPr>
+            <a:r>
+              <a:rPr lang="en-US" sz="1550" b="1" dirty="0">
+                <a:solidFill>
+                  <a:srgbClr val="123024"/>
+                </a:solidFill>
+                <a:latin typeface="Calibri" pitchFamily="34" charset="0"/>
+                <a:ea typeface="Calibri" pitchFamily="34" charset="-122"/>
+                <a:cs typeface="Calibri" pitchFamily="34" charset="-120"/>
+              </a:rPr>
+              <a:t>Loans &amp; insurance</a:t>
+            </a:r>
+            <a:endParaRPr lang="en-US" sz="1550" dirty="0"/>
+          </a:p>
+        </p:txBody>
+      </p:sp>
+      <p:sp>
+        <p:nvSpPr>
+          <p:cNvPr id="10" name="Text 8"/>
+          <p:cNvSpPr/>
+          <p:nvPr/>
+        </p:nvSpPr>
+        <p:spPr>
+          <a:xfrm>
+            <a:off x="978408" y="4251960"/>
+            <a:ext cx="2743200" cy="1280160"/>
+          </a:xfrm>
+          <a:prstGeom prst="rect">
+            <a:avLst/>
+          </a:prstGeom>
+          <a:noFill/>
+          <a:ln/>
+        </p:spPr>
+        <p:txBody>
+          <a:bodyPr wrap="square" lIns="0" tIns="0" rIns="0" bIns="0" rtlCol="0" anchor="ctr"/>
+          <a:lstStyle/>
           <a:p>
             <a:pPr indent="0" marL="0">
               <a:lnSpc>
-                <a:spcPct val="103000"/>
+                <a:spcPct val="118000"/>
               </a:lnSpc>
               <a:buNone/>
             </a:pPr>
             <a:r>
-              <a:rPr lang="en-US" sz="4000" b="1" dirty="0">
+              <a:rPr lang="en-US" sz="1280" dirty="0">
+                <a:solidFill>
+                  <a:srgbClr val="68786F"/>
+                </a:solidFill>
+                <a:latin typeface="Calibri" pitchFamily="34" charset="0"/>
+                <a:ea typeface="Calibri" pitchFamily="34" charset="-122"/>
+                <a:cs typeface="Calibri" pitchFamily="34" charset="-120"/>
+              </a:rPr>
+              <a:t>$625B in US farm debt; $6B+ in annual crop-insurance premiums. Agripals can originate and broker both — by text.</a:t>
+            </a:r>
+            <a:endParaRPr lang="en-US" sz="1280" dirty="0"/>
+          </a:p>
+        </p:txBody>
+      </p:sp>
+      <p:sp>
+        <p:nvSpPr>
+          <p:cNvPr id="11" name="Shape 9"/>
+          <p:cNvSpPr/>
+          <p:nvPr/>
+        </p:nvSpPr>
+        <p:spPr>
+          <a:xfrm>
+            <a:off x="4334256" y="2743200"/>
+            <a:ext cx="3383280" cy="3017520"/>
+          </a:xfrm>
+          <a:prstGeom prst="roundRect">
+            <a:avLst>
+              <a:gd name="adj" fmla="val 4242"/>
+            </a:avLst>
+          </a:prstGeom>
+          <a:solidFill>
+            <a:srgbClr val="FFFFFF"/>
+          </a:solidFill>
+          <a:ln/>
+          <a:effectLst>
+            <a:outerShdw sx="100000" sy="100000" kx="0" ky="0" algn="bl" rotWithShape="0" blurRad="127000" dist="38100" dir="5400000">
+              <a:srgbClr val="1B3A2E">
+                <a:alpha val="16000"/>
+              </a:srgbClr>
+            </a:outerShdw>
+          </a:effectLst>
+        </p:spPr>
+        <p:txBody>
+          <a:bodyPr/>
+          <a:p/>
+        </p:txBody>
+      </p:sp>
+      <p:sp>
+        <p:nvSpPr>
+          <p:cNvPr id="12" name="Shape 10"/>
+          <p:cNvSpPr/>
+          <p:nvPr/>
+        </p:nvSpPr>
+        <p:spPr>
+          <a:xfrm>
+            <a:off x="4654296" y="3090672"/>
+            <a:ext cx="777240" cy="777240"/>
+          </a:xfrm>
+          <a:prstGeom prst="ellipse">
+            <a:avLst/>
+          </a:prstGeom>
+          <a:solidFill>
+            <a:srgbClr val="37A278"/>
+          </a:solidFill>
+          <a:ln/>
+        </p:spPr>
+        <p:txBody>
+          <a:bodyPr/>
+          <a:p/>
+        </p:txBody>
+      </p:sp>
+      <p:sp>
+        <p:nvSpPr>
+          <p:cNvPr id="13" name="Text 11"/>
+          <p:cNvSpPr/>
+          <p:nvPr/>
+        </p:nvSpPr>
+        <p:spPr>
+          <a:xfrm>
+            <a:off x="4654296" y="3090672"/>
+            <a:ext cx="777240" cy="777240"/>
+          </a:xfrm>
+          <a:prstGeom prst="rect">
+            <a:avLst/>
+          </a:prstGeom>
+          <a:noFill/>
+          <a:ln/>
+        </p:spPr>
+        <p:txBody>
+          <a:bodyPr wrap="square" lIns="0" tIns="0" rIns="0" bIns="0" rtlCol="0" anchor="ctr"/>
+          <a:lstStyle/>
+          <a:p>
+            <a:pPr algn="ctr" indent="0" marL="0">
+              <a:buNone/>
+            </a:pPr>
+            <a:r>
+              <a:rPr lang="en-US" sz="3000" b="1" dirty="0">
                 <a:solidFill>
                   <a:srgbClr val="FFFFFF"/>
                 </a:solidFill>
@@ -7414,22 +8423,100 @@
                 <a:ea typeface="Calibri" pitchFamily="34" charset="-122"/>
                 <a:cs typeface="Calibri" pitchFamily="34" charset="-120"/>
               </a:rPr>
-              <a:t>Rebuild the food system.</a:t>
-            </a:r>
-            <a:endParaRPr lang="en-US" sz="4000" dirty="0"/>
-          </a:p>
-        </p:txBody>
-      </p:sp>
-      <p:sp>
-        <p:nvSpPr>
-          <p:cNvPr id="5" name="Text 2"/>
-          <p:cNvSpPr/>
-          <p:nvPr/>
-        </p:nvSpPr>
-        <p:spPr>
-          <a:xfrm>
-            <a:off x="4297680" y="3886200"/>
-            <a:ext cx="7223760" cy="1097280"/>
+              <a:t>2</a:t>
+            </a:r>
+            <a:endParaRPr lang="en-US" sz="3000" dirty="0"/>
+          </a:p>
+        </p:txBody>
+      </p:sp>
+      <p:sp>
+        <p:nvSpPr>
+          <p:cNvPr id="14" name="Text 12"/>
+          <p:cNvSpPr/>
+          <p:nvPr/>
+        </p:nvSpPr>
+        <p:spPr>
+          <a:xfrm>
+            <a:off x="5568696" y="3154680"/>
+            <a:ext cx="1920240" cy="320040"/>
+          </a:xfrm>
+          <a:prstGeom prst="rect">
+            <a:avLst/>
+          </a:prstGeom>
+          <a:noFill/>
+          <a:ln/>
+        </p:spPr>
+        <p:txBody>
+          <a:bodyPr wrap="square" lIns="0" tIns="0" rIns="0" bIns="0" rtlCol="0" anchor="ctr"/>
+          <a:lstStyle/>
+          <a:p>
+            <a:pPr indent="0" marL="0">
+              <a:buNone/>
+            </a:pPr>
+            <a:r>
+              <a:rPr lang="en-US" sz="1100" b="1" spc="100" kern="0" dirty="0">
+                <a:solidFill>
+                  <a:srgbClr val="68786F"/>
+                </a:solidFill>
+                <a:latin typeface="Calibri" pitchFamily="34" charset="0"/>
+                <a:ea typeface="Calibri" pitchFamily="34" charset="-122"/>
+                <a:cs typeface="Calibri" pitchFamily="34" charset="-120"/>
+              </a:rPr>
+              <a:t>Supply</a:t>
+            </a:r>
+            <a:endParaRPr lang="en-US" sz="1100" dirty="0"/>
+          </a:p>
+        </p:txBody>
+      </p:sp>
+      <p:sp>
+        <p:nvSpPr>
+          <p:cNvPr id="15" name="Text 13"/>
+          <p:cNvSpPr/>
+          <p:nvPr/>
+        </p:nvSpPr>
+        <p:spPr>
+          <a:xfrm>
+            <a:off x="5568696" y="3429000"/>
+            <a:ext cx="1920240" cy="457200"/>
+          </a:xfrm>
+          <a:prstGeom prst="rect">
+            <a:avLst/>
+          </a:prstGeom>
+          <a:noFill/>
+          <a:ln/>
+        </p:spPr>
+        <p:txBody>
+          <a:bodyPr wrap="square" lIns="0" tIns="0" rIns="0" bIns="0" rtlCol="0" anchor="ctr"/>
+          <a:lstStyle/>
+          <a:p>
+            <a:pPr indent="0" marL="0">
+              <a:buNone/>
+            </a:pPr>
+            <a:r>
+              <a:rPr lang="en-US" sz="1550" b="1" dirty="0">
+                <a:solidFill>
+                  <a:srgbClr val="123024"/>
+                </a:solidFill>
+                <a:latin typeface="Calibri" pitchFamily="34" charset="0"/>
+                <a:ea typeface="Calibri" pitchFamily="34" charset="-122"/>
+                <a:cs typeface="Calibri" pitchFamily="34" charset="-120"/>
+              </a:rPr>
+              <a:t>Inputs &amp; equipment</a:t>
+            </a:r>
+            <a:endParaRPr lang="en-US" sz="1550" dirty="0"/>
+          </a:p>
+        </p:txBody>
+      </p:sp>
+      <p:sp>
+        <p:nvSpPr>
+          <p:cNvPr id="16" name="Text 14"/>
+          <p:cNvSpPr/>
+          <p:nvPr/>
+        </p:nvSpPr>
+        <p:spPr>
+          <a:xfrm>
+            <a:off x="4654296" y="4251960"/>
+            <a:ext cx="2743200" cy="1280160"/>
           </a:xfrm>
           <a:prstGeom prst="rect">
             <a:avLst/>
@@ -7443,35 +8530,131 @@
           <a:p>
             <a:pPr indent="0" marL="0">
               <a:lnSpc>
-                <a:spcPct val="120000"/>
+                <a:spcPct val="118000"/>
               </a:lnSpc>
               <a:buNone/>
             </a:pPr>
             <a:r>
-              <a:rPr lang="en-US" sz="1650" dirty="0">
-                <a:solidFill>
-                  <a:srgbClr val="A9C3B7"/>
-                </a:solidFill>
-                <a:latin typeface="Calibri" pitchFamily="34" charset="0"/>
-                <a:ea typeface="Calibri" pitchFamily="34" charset="-122"/>
-                <a:cs typeface="Calibri" pitchFamily="34" charset="-120"/>
-              </a:rPr>
-              <a:t>Cut the markup. Restore the provenance. Take the true cost of food from 2 to 1 to 0 — and become the endpoint every food agent calls.</a:t>
-            </a:r>
-            <a:endParaRPr lang="en-US" sz="1650" dirty="0"/>
-          </a:p>
-        </p:txBody>
-      </p:sp>
-      <p:sp>
-        <p:nvSpPr>
-          <p:cNvPr id="6" name="Text 3"/>
-          <p:cNvSpPr/>
-          <p:nvPr/>
-        </p:nvSpPr>
-        <p:spPr>
-          <a:xfrm>
-            <a:off x="4297680" y="5120640"/>
-            <a:ext cx="3657600" cy="457200"/>
+              <a:rPr lang="en-US" sz="1280" dirty="0">
+                <a:solidFill>
+                  <a:srgbClr val="68786F"/>
+                </a:solidFill>
+                <a:latin typeface="Calibri" pitchFamily="34" charset="0"/>
+                <a:ea typeface="Calibri" pitchFamily="34" charset="-122"/>
+                <a:cs typeface="Calibri" pitchFamily="34" charset="-120"/>
+              </a:rPr>
+              <a:t>~$36B a year in US crop inputs — seed, fertiliser, crop protection — plus equipment finance. The right offer, at the moment of need.</a:t>
+            </a:r>
+            <a:endParaRPr lang="en-US" sz="1280" dirty="0"/>
+          </a:p>
+        </p:txBody>
+      </p:sp>
+      <p:sp>
+        <p:nvSpPr>
+          <p:cNvPr id="17" name="Shape 15"/>
+          <p:cNvSpPr/>
+          <p:nvPr/>
+        </p:nvSpPr>
+        <p:spPr>
+          <a:xfrm>
+            <a:off x="8010144" y="2743200"/>
+            <a:ext cx="3383280" cy="3017520"/>
+          </a:xfrm>
+          <a:prstGeom prst="roundRect">
+            <a:avLst>
+              <a:gd name="adj" fmla="val 4242"/>
+            </a:avLst>
+          </a:prstGeom>
+          <a:solidFill>
+            <a:srgbClr val="FFFFFF"/>
+          </a:solidFill>
+          <a:ln/>
+          <a:effectLst>
+            <a:outerShdw sx="100000" sy="100000" kx="0" ky="0" algn="bl" rotWithShape="0" blurRad="127000" dist="38100" dir="5400000">
+              <a:srgbClr val="1B3A2E">
+                <a:alpha val="16000"/>
+              </a:srgbClr>
+            </a:outerShdw>
+          </a:effectLst>
+        </p:spPr>
+        <p:txBody>
+          <a:bodyPr/>
+          <a:p/>
+        </p:txBody>
+      </p:sp>
+      <p:sp>
+        <p:nvSpPr>
+          <p:cNvPr id="18" name="Shape 16"/>
+          <p:cNvSpPr/>
+          <p:nvPr/>
+        </p:nvSpPr>
+        <p:spPr>
+          <a:xfrm>
+            <a:off x="8330184" y="3090672"/>
+            <a:ext cx="777240" cy="777240"/>
+          </a:xfrm>
+          <a:prstGeom prst="ellipse">
+            <a:avLst/>
+          </a:prstGeom>
+          <a:solidFill>
+            <a:srgbClr val="4CC499"/>
+          </a:solidFill>
+          <a:ln/>
+        </p:spPr>
+        <p:txBody>
+          <a:bodyPr/>
+          <a:p/>
+        </p:txBody>
+      </p:sp>
+      <p:sp>
+        <p:nvSpPr>
+          <p:cNvPr id="19" name="Text 17"/>
+          <p:cNvSpPr/>
+          <p:nvPr/>
+        </p:nvSpPr>
+        <p:spPr>
+          <a:xfrm>
+            <a:off x="8330184" y="3090672"/>
+            <a:ext cx="777240" cy="777240"/>
+          </a:xfrm>
+          <a:prstGeom prst="rect">
+            <a:avLst/>
+          </a:prstGeom>
+          <a:noFill/>
+          <a:ln/>
+        </p:spPr>
+        <p:txBody>
+          <a:bodyPr wrap="square" lIns="0" tIns="0" rIns="0" bIns="0" rtlCol="0" anchor="ctr"/>
+          <a:lstStyle/>
+          <a:p>
+            <a:pPr algn="ctr" indent="0" marL="0">
+              <a:buNone/>
+            </a:pPr>
+            <a:r>
+              <a:rPr lang="en-US" sz="3000" b="1" dirty="0">
+                <a:solidFill>
+                  <a:srgbClr val="FFFFFF"/>
+                </a:solidFill>
+                <a:latin typeface="Calibri" pitchFamily="34" charset="0"/>
+                <a:ea typeface="Calibri" pitchFamily="34" charset="-122"/>
+                <a:cs typeface="Calibri" pitchFamily="34" charset="-120"/>
+              </a:rPr>
+              <a:t>3</a:t>
+            </a:r>
+            <a:endParaRPr lang="en-US" sz="3000" dirty="0"/>
+          </a:p>
+        </p:txBody>
+      </p:sp>
+      <p:sp>
+        <p:nvSpPr>
+          <p:cNvPr id="20" name="Text 18"/>
+          <p:cNvSpPr/>
+          <p:nvPr/>
+        </p:nvSpPr>
+        <p:spPr>
+          <a:xfrm>
+            <a:off x="9244584" y="3154680"/>
+            <a:ext cx="1920240" cy="320040"/>
           </a:xfrm>
           <a:prstGeom prst="rect">
             <a:avLst/>
@@ -7487,9 +8670,168 @@
               <a:buNone/>
             </a:pPr>
             <a:r>
-              <a:rPr lang="en-US" sz="2000" b="1" dirty="0">
-                <a:solidFill>
-                  <a:srgbClr val="4CC499"/>
+              <a:rPr lang="en-US" sz="1100" b="1" spc="100" kern="0" dirty="0">
+                <a:solidFill>
+                  <a:srgbClr val="68786F"/>
+                </a:solidFill>
+                <a:latin typeface="Calibri" pitchFamily="34" charset="0"/>
+                <a:ea typeface="Calibri" pitchFamily="34" charset="-122"/>
+                <a:cs typeface="Calibri" pitchFamily="34" charset="-120"/>
+              </a:rPr>
+              <a:t>Back office</a:t>
+            </a:r>
+            <a:endParaRPr lang="en-US" sz="1100" dirty="0"/>
+          </a:p>
+        </p:txBody>
+      </p:sp>
+      <p:sp>
+        <p:nvSpPr>
+          <p:cNvPr id="21" name="Text 19"/>
+          <p:cNvSpPr/>
+          <p:nvPr/>
+        </p:nvSpPr>
+        <p:spPr>
+          <a:xfrm>
+            <a:off x="9244584" y="3429000"/>
+            <a:ext cx="1920240" cy="457200"/>
+          </a:xfrm>
+          <a:prstGeom prst="rect">
+            <a:avLst/>
+          </a:prstGeom>
+          <a:noFill/>
+          <a:ln/>
+        </p:spPr>
+        <p:txBody>
+          <a:bodyPr wrap="square" lIns="0" tIns="0" rIns="0" bIns="0" rtlCol="0" anchor="ctr"/>
+          <a:lstStyle/>
+          <a:p>
+            <a:pPr indent="0" marL="0">
+              <a:buNone/>
+            </a:pPr>
+            <a:r>
+              <a:rPr lang="en-US" sz="1550" b="1" dirty="0">
+                <a:solidFill>
+                  <a:srgbClr val="123024"/>
+                </a:solidFill>
+                <a:latin typeface="Calibri" pitchFamily="34" charset="0"/>
+                <a:ea typeface="Calibri" pitchFamily="34" charset="-122"/>
+                <a:cs typeface="Calibri" pitchFamily="34" charset="-120"/>
+              </a:rPr>
+              <a:t>Accounting &amp; markets</a:t>
+            </a:r>
+            <a:endParaRPr lang="en-US" sz="1550" dirty="0"/>
+          </a:p>
+        </p:txBody>
+      </p:sp>
+      <p:sp>
+        <p:nvSpPr>
+          <p:cNvPr id="22" name="Text 20"/>
+          <p:cNvSpPr/>
+          <p:nvPr/>
+        </p:nvSpPr>
+        <p:spPr>
+          <a:xfrm>
+            <a:off x="8330184" y="4251960"/>
+            <a:ext cx="2743200" cy="1280160"/>
+          </a:xfrm>
+          <a:prstGeom prst="rect">
+            <a:avLst/>
+          </a:prstGeom>
+          <a:noFill/>
+          <a:ln/>
+        </p:spPr>
+        <p:txBody>
+          <a:bodyPr wrap="square" lIns="0" tIns="0" rIns="0" bIns="0" rtlCol="0" anchor="ctr"/>
+          <a:lstStyle/>
+          <a:p>
+            <a:pPr indent="0" marL="0">
+              <a:lnSpc>
+                <a:spcPct val="118000"/>
+              </a:lnSpc>
+              <a:buNone/>
+            </a:pPr>
+            <a:r>
+              <a:rPr lang="en-US" sz="1280" dirty="0">
+                <a:solidFill>
+                  <a:srgbClr val="68786F"/>
+                </a:solidFill>
+                <a:latin typeface="Calibri" pitchFamily="34" charset="0"/>
+                <a:ea typeface="Calibri" pitchFamily="34" charset="-122"/>
+                <a:cs typeface="Calibri" pitchFamily="34" charset="-120"/>
+              </a:rPr>
+              <a:t>Budgeting, bookkeeping and market access — today's spot price and where to sell. The whole back office, one text away.</a:t>
+            </a:r>
+            <a:endParaRPr lang="en-US" sz="1280" dirty="0"/>
+          </a:p>
+        </p:txBody>
+      </p:sp>
+      <p:sp>
+        <p:nvSpPr>
+          <p:cNvPr id="23" name="Text 21"/>
+          <p:cNvSpPr/>
+          <p:nvPr/>
+        </p:nvSpPr>
+        <p:spPr>
+          <a:xfrm>
+            <a:off x="11183112" y="6355080"/>
+            <a:ext cx="548640" cy="274320"/>
+          </a:xfrm>
+          <a:prstGeom prst="rect">
+            <a:avLst/>
+          </a:prstGeom>
+          <a:noFill/>
+          <a:ln/>
+        </p:spPr>
+        <p:txBody>
+          <a:bodyPr wrap="square" lIns="0" tIns="0" rIns="0" bIns="0" rtlCol="0" anchor="ctr"/>
+          <a:lstStyle/>
+          <a:p>
+            <a:pPr algn="r" indent="0" marL="0">
+              <a:buNone/>
+            </a:pPr>
+            <a:r>
+              <a:rPr lang="en-US" sz="1000" dirty="0">
+                <a:solidFill>
+                  <a:srgbClr val="68786F"/>
+                </a:solidFill>
+                <a:latin typeface="Calibri" pitchFamily="34" charset="0"/>
+                <a:ea typeface="Calibri" pitchFamily="34" charset="-122"/>
+                <a:cs typeface="Calibri" pitchFamily="34" charset="-120"/>
+              </a:rPr>
+              <a:t>18</a:t>
+            </a:r>
+            <a:endParaRPr lang="en-US" sz="1000" dirty="0"/>
+          </a:p>
+        </p:txBody>
+      </p:sp>
+      <p:sp>
+        <p:nvSpPr>
+          <p:cNvPr id="24" name="Text 22"/>
+          <p:cNvSpPr/>
+          <p:nvPr/>
+        </p:nvSpPr>
+        <p:spPr>
+          <a:xfrm>
+            <a:off x="658368" y="6355080"/>
+            <a:ext cx="2743200" cy="274320"/>
+          </a:xfrm>
+          <a:prstGeom prst="rect">
+            <a:avLst/>
+          </a:prstGeom>
+          <a:noFill/>
+          <a:ln/>
+        </p:spPr>
+        <p:txBody>
+          <a:bodyPr wrap="square" lIns="0" tIns="0" rIns="0" bIns="0" rtlCol="0" anchor="ctr"/>
+          <a:lstStyle/>
+          <a:p>
+            <a:pPr indent="0" marL="0">
+              <a:buNone/>
+            </a:pPr>
+            <a:r>
+              <a:rPr lang="en-US" sz="1000" b="1" dirty="0">
+                <a:solidFill>
+                  <a:srgbClr val="68786F"/>
                 </a:solidFill>
                 <a:latin typeface="Calibri" pitchFamily="34" charset="0"/>
                 <a:ea typeface="Calibri" pitchFamily="34" charset="-122"/>
@@ -7497,20 +8839,133 @@
               </a:rPr>
               <a:t>Agripals</a:t>
             </a:r>
-            <a:endParaRPr lang="en-US" sz="2000" dirty="0"/>
-          </a:p>
-        </p:txBody>
-      </p:sp>
-      <p:sp>
-        <p:nvSpPr>
-          <p:cNvPr id="7" name="Text 4"/>
-          <p:cNvSpPr/>
-          <p:nvPr/>
-        </p:nvSpPr>
-        <p:spPr>
-          <a:xfrm>
-            <a:off x="4297680" y="5532120"/>
-            <a:ext cx="4572000" cy="365760"/>
+            <a:endParaRPr lang="en-US" sz="1000" dirty="0"/>
+          </a:p>
+        </p:txBody>
+      </p:sp>
+    </p:spTree>
+  </p:cSld>
+  <p:clrMapOvr>
+    <a:masterClrMapping/>
+  </p:clrMapOvr>
+</p:sld>
+</file>
+
+<file path=ppt/slides/slide19.xml><?xml version="1.0" encoding="utf-8"?>
+<p:sld xmlns:a="http://schemas.openxmlformats.org/drawingml/2006/main" xmlns:r="http://schemas.openxmlformats.org/officeDocument/2006/relationships" xmlns:p="http://schemas.openxmlformats.org/presentationml/2006/main">
+  <p:cSld name="Slide 9">
+    <p:bg>
+      <p:bgPr>
+        <a:solidFill>
+          <a:srgbClr val="F4F7F6"/>
+        </a:solidFill>
+      </p:bgPr>
+    </p:bg>
+    <p:spTree>
+      <p:nvGrpSpPr>
+        <p:cNvPr id="1" name=""/>
+        <p:cNvGrpSpPr/>
+        <p:nvPr/>
+      </p:nvGrpSpPr>
+      <p:grpSpPr>
+        <a:xfrm>
+          <a:off x="0" y="0"/>
+          <a:ext cx="0" cy="0"/>
+          <a:chOff x="0" y="0"/>
+          <a:chExt cx="0" cy="0"/>
+        </a:xfrm>
+      </p:grpSpPr>
+      <p:sp>
+        <p:nvSpPr>
+          <p:cNvPr id="2" name="Text 0"/>
+          <p:cNvSpPr/>
+          <p:nvPr/>
+        </p:nvSpPr>
+        <p:spPr>
+          <a:xfrm>
+            <a:off x="658368" y="457200"/>
+            <a:ext cx="8229600" cy="320040"/>
+          </a:xfrm>
+          <a:prstGeom prst="rect">
+            <a:avLst/>
+          </a:prstGeom>
+          <a:noFill/>
+          <a:ln/>
+        </p:spPr>
+        <p:txBody>
+          <a:bodyPr wrap="square" lIns="0" tIns="0" rIns="0" bIns="0" rtlCol="0" anchor="ctr"/>
+          <a:lstStyle/>
+          <a:p>
+            <a:pPr algn="l" indent="0" marL="0">
+              <a:buNone/>
+            </a:pPr>
+            <a:r>
+              <a:rPr lang="en-US" sz="1250" b="1" spc="300" kern="0" dirty="0">
+                <a:solidFill>
+                  <a:srgbClr val="37A278"/>
+                </a:solidFill>
+                <a:latin typeface="Calibri" pitchFamily="34" charset="0"/>
+                <a:ea typeface="Calibri" pitchFamily="34" charset="-122"/>
+                <a:cs typeface="Calibri" pitchFamily="34" charset="-120"/>
+              </a:rPr>
+              <a:t>THE DATA PLAY</a:t>
+            </a:r>
+            <a:endParaRPr lang="en-US" sz="1250" dirty="0"/>
+          </a:p>
+        </p:txBody>
+      </p:sp>
+      <p:sp>
+        <p:nvSpPr>
+          <p:cNvPr id="3" name="Text 1"/>
+          <p:cNvSpPr/>
+          <p:nvPr/>
+        </p:nvSpPr>
+        <p:spPr>
+          <a:xfrm>
+            <a:off x="658368" y="841248"/>
+            <a:ext cx="10872216" cy="1051560"/>
+          </a:xfrm>
+          <a:prstGeom prst="rect">
+            <a:avLst/>
+          </a:prstGeom>
+          <a:noFill/>
+          <a:ln/>
+        </p:spPr>
+        <p:txBody>
+          <a:bodyPr wrap="square" lIns="0" tIns="0" rIns="0" bIns="0" rtlCol="0" anchor="ctr"/>
+          <a:lstStyle/>
+          <a:p>
+            <a:pPr algn="l" indent="0" marL="0">
+              <a:lnSpc>
+                <a:spcPct val="100000"/>
+              </a:lnSpc>
+              <a:buNone/>
+            </a:pPr>
+            <a:r>
+              <a:rPr lang="en-US" sz="3400" b="1" dirty="0">
+                <a:solidFill>
+                  <a:srgbClr val="123024"/>
+                </a:solidFill>
+                <a:latin typeface="Calibri" pitchFamily="34" charset="0"/>
+                <a:ea typeface="Calibri" pitchFamily="34" charset="-122"/>
+                <a:cs typeface="Calibri" pitchFamily="34" charset="-120"/>
+              </a:rPr>
+              <a:t>Every text is a data point no one else has.</a:t>
+            </a:r>
+            <a:endParaRPr lang="en-US" sz="3400" dirty="0"/>
+          </a:p>
+        </p:txBody>
+      </p:sp>
+      <p:sp>
+        <p:nvSpPr>
+          <p:cNvPr id="4" name="Text 2"/>
+          <p:cNvSpPr/>
+          <p:nvPr/>
+        </p:nvSpPr>
+        <p:spPr>
+          <a:xfrm>
+            <a:off x="658368" y="1828800"/>
+            <a:ext cx="10607040" cy="640080"/>
           </a:xfrm>
           <a:prstGeom prst="rect">
             <a:avLst/>
@@ -7523,20 +8978,749 @@
           <a:lstStyle/>
           <a:p>
             <a:pPr indent="0" marL="0">
-              <a:buNone/>
-            </a:pPr>
-            <a:r>
-              <a:rPr lang="en-US" sz="1300" dirty="0">
-                <a:solidFill>
-                  <a:srgbClr val="A9C3B7"/>
-                </a:solidFill>
-                <a:latin typeface="Calibri" pitchFamily="34" charset="0"/>
-                <a:ea typeface="Calibri" pitchFamily="34" charset="-122"/>
-                <a:cs typeface="Calibri" pitchFamily="34" charset="-120"/>
-              </a:rPr>
-              <a:t>rhys.coombes@gmail.com</a:t>
-            </a:r>
-            <a:endParaRPr lang="en-US" sz="1300" dirty="0"/>
+              <a:lnSpc>
+                <a:spcPct val="115000"/>
+              </a:lnSpc>
+              <a:buNone/>
+            </a:pPr>
+            <a:r>
+              <a:rPr lang="en-US" sz="1600" dirty="0">
+                <a:solidFill>
+                  <a:srgbClr val="12201A"/>
+                </a:solidFill>
+                <a:latin typeface="Calibri" pitchFamily="34" charset="0"/>
+                <a:ea typeface="Calibri" pitchFamily="34" charset="-122"/>
+                <a:cs typeface="Calibri" pitchFamily="34" charset="-120"/>
+              </a:rPr>
+              <a:t>Ask a chef “how much stock do you have?” and a farmer “what are you harvesting?” — and we know real-time supply and demand across the country. That's data the whole financial system wants.</a:t>
+            </a:r>
+            <a:endParaRPr lang="en-US" sz="1600" dirty="0"/>
+          </a:p>
+        </p:txBody>
+      </p:sp>
+      <p:sp>
+        <p:nvSpPr>
+          <p:cNvPr id="5" name="Shape 3"/>
+          <p:cNvSpPr/>
+          <p:nvPr/>
+        </p:nvSpPr>
+        <p:spPr>
+          <a:xfrm>
+            <a:off x="658368" y="2743200"/>
+            <a:ext cx="3383280" cy="3017520"/>
+          </a:xfrm>
+          <a:prstGeom prst="roundRect">
+            <a:avLst>
+              <a:gd name="adj" fmla="val 4242"/>
+            </a:avLst>
+          </a:prstGeom>
+          <a:solidFill>
+            <a:srgbClr val="FFFFFF"/>
+          </a:solidFill>
+          <a:ln/>
+          <a:effectLst>
+            <a:outerShdw sx="100000" sy="100000" kx="0" ky="0" algn="bl" rotWithShape="0" blurRad="127000" dist="38100" dir="5400000">
+              <a:srgbClr val="1B3A2E">
+                <a:alpha val="16000"/>
+              </a:srgbClr>
+            </a:outerShdw>
+          </a:effectLst>
+        </p:spPr>
+        <p:txBody>
+          <a:bodyPr/>
+          <a:p/>
+        </p:txBody>
+      </p:sp>
+      <p:sp>
+        <p:nvSpPr>
+          <p:cNvPr id="6" name="Shape 4"/>
+          <p:cNvSpPr/>
+          <p:nvPr/>
+        </p:nvSpPr>
+        <p:spPr>
+          <a:xfrm>
+            <a:off x="978408" y="3090672"/>
+            <a:ext cx="777240" cy="777240"/>
+          </a:xfrm>
+          <a:prstGeom prst="ellipse">
+            <a:avLst/>
+          </a:prstGeom>
+          <a:solidFill>
+            <a:srgbClr val="2E8564"/>
+          </a:solidFill>
+          <a:ln/>
+        </p:spPr>
+        <p:txBody>
+          <a:bodyPr/>
+          <a:p/>
+        </p:txBody>
+      </p:sp>
+      <p:sp>
+        <p:nvSpPr>
+          <p:cNvPr id="7" name="Text 5"/>
+          <p:cNvSpPr/>
+          <p:nvPr/>
+        </p:nvSpPr>
+        <p:spPr>
+          <a:xfrm>
+            <a:off x="978408" y="3090672"/>
+            <a:ext cx="777240" cy="777240"/>
+          </a:xfrm>
+          <a:prstGeom prst="rect">
+            <a:avLst/>
+          </a:prstGeom>
+          <a:noFill/>
+          <a:ln/>
+        </p:spPr>
+        <p:txBody>
+          <a:bodyPr wrap="square" lIns="0" tIns="0" rIns="0" bIns="0" rtlCol="0" anchor="ctr"/>
+          <a:lstStyle/>
+          <a:p>
+            <a:pPr algn="ctr" indent="0" marL="0">
+              <a:buNone/>
+            </a:pPr>
+            <a:r>
+              <a:rPr lang="en-US" sz="3000" b="1" dirty="0">
+                <a:solidFill>
+                  <a:srgbClr val="FFFFFF"/>
+                </a:solidFill>
+                <a:latin typeface="Calibri" pitchFamily="34" charset="0"/>
+                <a:ea typeface="Calibri" pitchFamily="34" charset="-122"/>
+                <a:cs typeface="Calibri" pitchFamily="34" charset="-120"/>
+              </a:rPr>
+              <a:t>1</a:t>
+            </a:r>
+            <a:endParaRPr lang="en-US" sz="3000" dirty="0"/>
+          </a:p>
+        </p:txBody>
+      </p:sp>
+      <p:sp>
+        <p:nvSpPr>
+          <p:cNvPr id="8" name="Text 6"/>
+          <p:cNvSpPr/>
+          <p:nvPr/>
+        </p:nvSpPr>
+        <p:spPr>
+          <a:xfrm>
+            <a:off x="1892808" y="3154680"/>
+            <a:ext cx="1920240" cy="320040"/>
+          </a:xfrm>
+          <a:prstGeom prst="rect">
+            <a:avLst/>
+          </a:prstGeom>
+          <a:noFill/>
+          <a:ln/>
+        </p:spPr>
+        <p:txBody>
+          <a:bodyPr wrap="square" lIns="0" tIns="0" rIns="0" bIns="0" rtlCol="0" anchor="ctr"/>
+          <a:lstStyle/>
+          <a:p>
+            <a:pPr indent="0" marL="0">
+              <a:buNone/>
+            </a:pPr>
+            <a:r>
+              <a:rPr lang="en-US" sz="1100" b="1" spc="100" kern="0" dirty="0">
+                <a:solidFill>
+                  <a:srgbClr val="68786F"/>
+                </a:solidFill>
+                <a:latin typeface="Calibri" pitchFamily="34" charset="0"/>
+                <a:ea typeface="Calibri" pitchFamily="34" charset="-122"/>
+                <a:cs typeface="Calibri" pitchFamily="34" charset="-120"/>
+              </a:rPr>
+              <a:t>Signal</a:t>
+            </a:r>
+            <a:endParaRPr lang="en-US" sz="1100" dirty="0"/>
+          </a:p>
+        </p:txBody>
+      </p:sp>
+      <p:sp>
+        <p:nvSpPr>
+          <p:cNvPr id="9" name="Text 7"/>
+          <p:cNvSpPr/>
+          <p:nvPr/>
+        </p:nvSpPr>
+        <p:spPr>
+          <a:xfrm>
+            <a:off x="1892808" y="3429000"/>
+            <a:ext cx="1920240" cy="457200"/>
+          </a:xfrm>
+          <a:prstGeom prst="rect">
+            <a:avLst/>
+          </a:prstGeom>
+          <a:noFill/>
+          <a:ln/>
+        </p:spPr>
+        <p:txBody>
+          <a:bodyPr wrap="square" lIns="0" tIns="0" rIns="0" bIns="0" rtlCol="0" anchor="ctr"/>
+          <a:lstStyle/>
+          <a:p>
+            <a:pPr indent="0" marL="0">
+              <a:buNone/>
+            </a:pPr>
+            <a:r>
+              <a:rPr lang="en-US" sz="1550" b="1" dirty="0">
+                <a:solidFill>
+                  <a:srgbClr val="123024"/>
+                </a:solidFill>
+                <a:latin typeface="Calibri" pitchFamily="34" charset="0"/>
+                <a:ea typeface="Calibri" pitchFamily="34" charset="-122"/>
+                <a:cs typeface="Calibri" pitchFamily="34" charset="-120"/>
+              </a:rPr>
+              <a:t>Real-time supply</a:t>
+            </a:r>
+            <a:endParaRPr lang="en-US" sz="1550" dirty="0"/>
+          </a:p>
+        </p:txBody>
+      </p:sp>
+      <p:sp>
+        <p:nvSpPr>
+          <p:cNvPr id="10" name="Text 8"/>
+          <p:cNvSpPr/>
+          <p:nvPr/>
+        </p:nvSpPr>
+        <p:spPr>
+          <a:xfrm>
+            <a:off x="978408" y="4251960"/>
+            <a:ext cx="2743200" cy="1280160"/>
+          </a:xfrm>
+          <a:prstGeom prst="rect">
+            <a:avLst/>
+          </a:prstGeom>
+          <a:noFill/>
+          <a:ln/>
+        </p:spPr>
+        <p:txBody>
+          <a:bodyPr wrap="square" lIns="0" tIns="0" rIns="0" bIns="0" rtlCol="0" anchor="ctr"/>
+          <a:lstStyle/>
+          <a:p>
+            <a:pPr indent="0" marL="0">
+              <a:lnSpc>
+                <a:spcPct val="118000"/>
+              </a:lnSpc>
+              <a:buNone/>
+            </a:pPr>
+            <a:r>
+              <a:rPr lang="en-US" sz="1280" dirty="0">
+                <a:solidFill>
+                  <a:srgbClr val="68786F"/>
+                </a:solidFill>
+                <a:latin typeface="Calibri" pitchFamily="34" charset="0"/>
+                <a:ea typeface="Calibri" pitchFamily="34" charset="-122"/>
+                <a:cs typeface="Calibri" pitchFamily="34" charset="-120"/>
+              </a:rPr>
+              <a:t>Live stock and harvest data by region — how much corn, wheat or oysters is coming, before anyone else knows.</a:t>
+            </a:r>
+            <a:endParaRPr lang="en-US" sz="1280" dirty="0"/>
+          </a:p>
+        </p:txBody>
+      </p:sp>
+      <p:sp>
+        <p:nvSpPr>
+          <p:cNvPr id="11" name="Shape 9"/>
+          <p:cNvSpPr/>
+          <p:nvPr/>
+        </p:nvSpPr>
+        <p:spPr>
+          <a:xfrm>
+            <a:off x="4334256" y="2743200"/>
+            <a:ext cx="3383280" cy="3017520"/>
+          </a:xfrm>
+          <a:prstGeom prst="roundRect">
+            <a:avLst>
+              <a:gd name="adj" fmla="val 4242"/>
+            </a:avLst>
+          </a:prstGeom>
+          <a:solidFill>
+            <a:srgbClr val="FFFFFF"/>
+          </a:solidFill>
+          <a:ln/>
+          <a:effectLst>
+            <a:outerShdw sx="100000" sy="100000" kx="0" ky="0" algn="bl" rotWithShape="0" blurRad="127000" dist="38100" dir="5400000">
+              <a:srgbClr val="1B3A2E">
+                <a:alpha val="16000"/>
+              </a:srgbClr>
+            </a:outerShdw>
+          </a:effectLst>
+        </p:spPr>
+        <p:txBody>
+          <a:bodyPr/>
+          <a:p/>
+        </p:txBody>
+      </p:sp>
+      <p:sp>
+        <p:nvSpPr>
+          <p:cNvPr id="12" name="Shape 10"/>
+          <p:cNvSpPr/>
+          <p:nvPr/>
+        </p:nvSpPr>
+        <p:spPr>
+          <a:xfrm>
+            <a:off x="4654296" y="3090672"/>
+            <a:ext cx="777240" cy="777240"/>
+          </a:xfrm>
+          <a:prstGeom prst="ellipse">
+            <a:avLst/>
+          </a:prstGeom>
+          <a:solidFill>
+            <a:srgbClr val="37A278"/>
+          </a:solidFill>
+          <a:ln/>
+        </p:spPr>
+        <p:txBody>
+          <a:bodyPr/>
+          <a:p/>
+        </p:txBody>
+      </p:sp>
+      <p:sp>
+        <p:nvSpPr>
+          <p:cNvPr id="13" name="Text 11"/>
+          <p:cNvSpPr/>
+          <p:nvPr/>
+        </p:nvSpPr>
+        <p:spPr>
+          <a:xfrm>
+            <a:off x="4654296" y="3090672"/>
+            <a:ext cx="777240" cy="777240"/>
+          </a:xfrm>
+          <a:prstGeom prst="rect">
+            <a:avLst/>
+          </a:prstGeom>
+          <a:noFill/>
+          <a:ln/>
+        </p:spPr>
+        <p:txBody>
+          <a:bodyPr wrap="square" lIns="0" tIns="0" rIns="0" bIns="0" rtlCol="0" anchor="ctr"/>
+          <a:lstStyle/>
+          <a:p>
+            <a:pPr algn="ctr" indent="0" marL="0">
+              <a:buNone/>
+            </a:pPr>
+            <a:r>
+              <a:rPr lang="en-US" sz="3000" b="1" dirty="0">
+                <a:solidFill>
+                  <a:srgbClr val="FFFFFF"/>
+                </a:solidFill>
+                <a:latin typeface="Calibri" pitchFamily="34" charset="0"/>
+                <a:ea typeface="Calibri" pitchFamily="34" charset="-122"/>
+                <a:cs typeface="Calibri" pitchFamily="34" charset="-120"/>
+              </a:rPr>
+              <a:t>2</a:t>
+            </a:r>
+            <a:endParaRPr lang="en-US" sz="3000" dirty="0"/>
+          </a:p>
+        </p:txBody>
+      </p:sp>
+      <p:sp>
+        <p:nvSpPr>
+          <p:cNvPr id="14" name="Text 12"/>
+          <p:cNvSpPr/>
+          <p:nvPr/>
+        </p:nvSpPr>
+        <p:spPr>
+          <a:xfrm>
+            <a:off x="5568696" y="3154680"/>
+            <a:ext cx="1920240" cy="320040"/>
+          </a:xfrm>
+          <a:prstGeom prst="rect">
+            <a:avLst/>
+          </a:prstGeom>
+          <a:noFill/>
+          <a:ln/>
+        </p:spPr>
+        <p:txBody>
+          <a:bodyPr wrap="square" lIns="0" tIns="0" rIns="0" bIns="0" rtlCol="0" anchor="ctr"/>
+          <a:lstStyle/>
+          <a:p>
+            <a:pPr indent="0" marL="0">
+              <a:buNone/>
+            </a:pPr>
+            <a:r>
+              <a:rPr lang="en-US" sz="1100" b="1" spc="100" kern="0" dirty="0">
+                <a:solidFill>
+                  <a:srgbClr val="68786F"/>
+                </a:solidFill>
+                <a:latin typeface="Calibri" pitchFamily="34" charset="0"/>
+                <a:ea typeface="Calibri" pitchFamily="34" charset="-122"/>
+                <a:cs typeface="Calibri" pitchFamily="34" charset="-120"/>
+              </a:rPr>
+              <a:t>Prediction</a:t>
+            </a:r>
+            <a:endParaRPr lang="en-US" sz="1100" dirty="0"/>
+          </a:p>
+        </p:txBody>
+      </p:sp>
+      <p:sp>
+        <p:nvSpPr>
+          <p:cNvPr id="15" name="Text 13"/>
+          <p:cNvSpPr/>
+          <p:nvPr/>
+        </p:nvSpPr>
+        <p:spPr>
+          <a:xfrm>
+            <a:off x="5568696" y="3429000"/>
+            <a:ext cx="1920240" cy="457200"/>
+          </a:xfrm>
+          <a:prstGeom prst="rect">
+            <a:avLst/>
+          </a:prstGeom>
+          <a:noFill/>
+          <a:ln/>
+        </p:spPr>
+        <p:txBody>
+          <a:bodyPr wrap="square" lIns="0" tIns="0" rIns="0" bIns="0" rtlCol="0" anchor="ctr"/>
+          <a:lstStyle/>
+          <a:p>
+            <a:pPr indent="0" marL="0">
+              <a:buNone/>
+            </a:pPr>
+            <a:r>
+              <a:rPr lang="en-US" sz="1550" b="1" dirty="0">
+                <a:solidFill>
+                  <a:srgbClr val="123024"/>
+                </a:solidFill>
+                <a:latin typeface="Calibri" pitchFamily="34" charset="0"/>
+                <a:ea typeface="Calibri" pitchFamily="34" charset="-122"/>
+                <a:cs typeface="Calibri" pitchFamily="34" charset="-120"/>
+              </a:rPr>
+              <a:t>Intelligence to sell</a:t>
+            </a:r>
+            <a:endParaRPr lang="en-US" sz="1550" dirty="0"/>
+          </a:p>
+        </p:txBody>
+      </p:sp>
+      <p:sp>
+        <p:nvSpPr>
+          <p:cNvPr id="16" name="Text 14"/>
+          <p:cNvSpPr/>
+          <p:nvPr/>
+        </p:nvSpPr>
+        <p:spPr>
+          <a:xfrm>
+            <a:off x="4654296" y="4251960"/>
+            <a:ext cx="2743200" cy="1280160"/>
+          </a:xfrm>
+          <a:prstGeom prst="rect">
+            <a:avLst/>
+          </a:prstGeom>
+          <a:noFill/>
+          <a:ln/>
+        </p:spPr>
+        <p:txBody>
+          <a:bodyPr wrap="square" lIns="0" tIns="0" rIns="0" bIns="0" rtlCol="0" anchor="ctr"/>
+          <a:lstStyle/>
+          <a:p>
+            <a:pPr indent="0" marL="0">
+              <a:lnSpc>
+                <a:spcPct val="118000"/>
+              </a:lnSpc>
+              <a:buNone/>
+            </a:pPr>
+            <a:r>
+              <a:rPr lang="en-US" sz="1280" dirty="0">
+                <a:solidFill>
+                  <a:srgbClr val="68786F"/>
+                </a:solidFill>
+                <a:latin typeface="Calibri" pitchFamily="34" charset="0"/>
+                <a:ea typeface="Calibri" pitchFamily="34" charset="-122"/>
+                <a:cs typeface="Calibri" pitchFamily="34" charset="-120"/>
+              </a:rPr>
+              <a:t>Forecast stock flows and price spikes, and sell it to lenders, insurers and commodity traders. Ag analytics is a $7.5B market growing ~15% a year.</a:t>
+            </a:r>
+            <a:endParaRPr lang="en-US" sz="1280" dirty="0"/>
+          </a:p>
+        </p:txBody>
+      </p:sp>
+      <p:sp>
+        <p:nvSpPr>
+          <p:cNvPr id="17" name="Shape 15"/>
+          <p:cNvSpPr/>
+          <p:nvPr/>
+        </p:nvSpPr>
+        <p:spPr>
+          <a:xfrm>
+            <a:off x="8010144" y="2743200"/>
+            <a:ext cx="3383280" cy="3017520"/>
+          </a:xfrm>
+          <a:prstGeom prst="roundRect">
+            <a:avLst>
+              <a:gd name="adj" fmla="val 4242"/>
+            </a:avLst>
+          </a:prstGeom>
+          <a:solidFill>
+            <a:srgbClr val="FFFFFF"/>
+          </a:solidFill>
+          <a:ln/>
+          <a:effectLst>
+            <a:outerShdw sx="100000" sy="100000" kx="0" ky="0" algn="bl" rotWithShape="0" blurRad="127000" dist="38100" dir="5400000">
+              <a:srgbClr val="1B3A2E">
+                <a:alpha val="16000"/>
+              </a:srgbClr>
+            </a:outerShdw>
+          </a:effectLst>
+        </p:spPr>
+        <p:txBody>
+          <a:bodyPr/>
+          <a:p/>
+        </p:txBody>
+      </p:sp>
+      <p:sp>
+        <p:nvSpPr>
+          <p:cNvPr id="18" name="Shape 16"/>
+          <p:cNvSpPr/>
+          <p:nvPr/>
+        </p:nvSpPr>
+        <p:spPr>
+          <a:xfrm>
+            <a:off x="8330184" y="3090672"/>
+            <a:ext cx="777240" cy="777240"/>
+          </a:xfrm>
+          <a:prstGeom prst="ellipse">
+            <a:avLst/>
+          </a:prstGeom>
+          <a:solidFill>
+            <a:srgbClr val="4CC499"/>
+          </a:solidFill>
+          <a:ln/>
+        </p:spPr>
+        <p:txBody>
+          <a:bodyPr/>
+          <a:p/>
+        </p:txBody>
+      </p:sp>
+      <p:sp>
+        <p:nvSpPr>
+          <p:cNvPr id="19" name="Text 17"/>
+          <p:cNvSpPr/>
+          <p:nvPr/>
+        </p:nvSpPr>
+        <p:spPr>
+          <a:xfrm>
+            <a:off x="8330184" y="3090672"/>
+            <a:ext cx="777240" cy="777240"/>
+          </a:xfrm>
+          <a:prstGeom prst="rect">
+            <a:avLst/>
+          </a:prstGeom>
+          <a:noFill/>
+          <a:ln/>
+        </p:spPr>
+        <p:txBody>
+          <a:bodyPr wrap="square" lIns="0" tIns="0" rIns="0" bIns="0" rtlCol="0" anchor="ctr"/>
+          <a:lstStyle/>
+          <a:p>
+            <a:pPr algn="ctr" indent="0" marL="0">
+              <a:buNone/>
+            </a:pPr>
+            <a:r>
+              <a:rPr lang="en-US" sz="3000" b="1" dirty="0">
+                <a:solidFill>
+                  <a:srgbClr val="FFFFFF"/>
+                </a:solidFill>
+                <a:latin typeface="Calibri" pitchFamily="34" charset="0"/>
+                <a:ea typeface="Calibri" pitchFamily="34" charset="-122"/>
+                <a:cs typeface="Calibri" pitchFamily="34" charset="-120"/>
+              </a:rPr>
+              <a:t>3</a:t>
+            </a:r>
+            <a:endParaRPr lang="en-US" sz="3000" dirty="0"/>
+          </a:p>
+        </p:txBody>
+      </p:sp>
+      <p:sp>
+        <p:nvSpPr>
+          <p:cNvPr id="20" name="Text 18"/>
+          <p:cNvSpPr/>
+          <p:nvPr/>
+        </p:nvSpPr>
+        <p:spPr>
+          <a:xfrm>
+            <a:off x="9244584" y="3154680"/>
+            <a:ext cx="1920240" cy="320040"/>
+          </a:xfrm>
+          <a:prstGeom prst="rect">
+            <a:avLst/>
+          </a:prstGeom>
+          <a:noFill/>
+          <a:ln/>
+        </p:spPr>
+        <p:txBody>
+          <a:bodyPr wrap="square" lIns="0" tIns="0" rIns="0" bIns="0" rtlCol="0" anchor="ctr"/>
+          <a:lstStyle/>
+          <a:p>
+            <a:pPr indent="0" marL="0">
+              <a:buNone/>
+            </a:pPr>
+            <a:r>
+              <a:rPr lang="en-US" sz="1100" b="1" spc="100" kern="0" dirty="0">
+                <a:solidFill>
+                  <a:srgbClr val="68786F"/>
+                </a:solidFill>
+                <a:latin typeface="Calibri" pitchFamily="34" charset="0"/>
+                <a:ea typeface="Calibri" pitchFamily="34" charset="-122"/>
+                <a:cs typeface="Calibri" pitchFamily="34" charset="-120"/>
+              </a:rPr>
+              <a:t>Lead engine</a:t>
+            </a:r>
+            <a:endParaRPr lang="en-US" sz="1100" dirty="0"/>
+          </a:p>
+        </p:txBody>
+      </p:sp>
+      <p:sp>
+        <p:nvSpPr>
+          <p:cNvPr id="21" name="Text 19"/>
+          <p:cNvSpPr/>
+          <p:nvPr/>
+        </p:nvSpPr>
+        <p:spPr>
+          <a:xfrm>
+            <a:off x="9244584" y="3429000"/>
+            <a:ext cx="1920240" cy="457200"/>
+          </a:xfrm>
+          <a:prstGeom prst="rect">
+            <a:avLst/>
+          </a:prstGeom>
+          <a:noFill/>
+          <a:ln/>
+        </p:spPr>
+        <p:txBody>
+          <a:bodyPr wrap="square" lIns="0" tIns="0" rIns="0" bIns="0" rtlCol="0" anchor="ctr"/>
+          <a:lstStyle/>
+          <a:p>
+            <a:pPr indent="0" marL="0">
+              <a:buNone/>
+            </a:pPr>
+            <a:r>
+              <a:rPr lang="en-US" sz="1550" b="1" dirty="0">
+                <a:solidFill>
+                  <a:srgbClr val="123024"/>
+                </a:solidFill>
+                <a:latin typeface="Calibri" pitchFamily="34" charset="0"/>
+                <a:ea typeface="Calibri" pitchFamily="34" charset="-122"/>
+                <a:cs typeface="Calibri" pitchFamily="34" charset="-120"/>
+              </a:rPr>
+              <a:t>Warm leads, mined</a:t>
+            </a:r>
+            <a:endParaRPr lang="en-US" sz="1550" dirty="0"/>
+          </a:p>
+        </p:txBody>
+      </p:sp>
+      <p:sp>
+        <p:nvSpPr>
+          <p:cNvPr id="22" name="Text 20"/>
+          <p:cNvSpPr/>
+          <p:nvPr/>
+        </p:nvSpPr>
+        <p:spPr>
+          <a:xfrm>
+            <a:off x="8330184" y="4251960"/>
+            <a:ext cx="2743200" cy="1280160"/>
+          </a:xfrm>
+          <a:prstGeom prst="rect">
+            <a:avLst/>
+          </a:prstGeom>
+          <a:noFill/>
+          <a:ln/>
+        </p:spPr>
+        <p:txBody>
+          <a:bodyPr wrap="square" lIns="0" tIns="0" rIns="0" bIns="0" rtlCol="0" anchor="ctr"/>
+          <a:lstStyle/>
+          <a:p>
+            <a:pPr indent="0" marL="0">
+              <a:lnSpc>
+                <a:spcPct val="118000"/>
+              </a:lnSpc>
+              <a:buNone/>
+            </a:pPr>
+            <a:r>
+              <a:rPr lang="en-US" sz="1280" dirty="0">
+                <a:solidFill>
+                  <a:srgbClr val="68786F"/>
+                </a:solidFill>
+                <a:latin typeface="Calibri" pitchFamily="34" charset="0"/>
+                <a:ea typeface="Calibri" pitchFamily="34" charset="-122"/>
+                <a:cs typeface="Calibri" pitchFamily="34" charset="-120"/>
+              </a:rPr>
+              <a:t>Every conversation surfaces who needs a loan, cover or inputs next — a self-feeding pipeline for the services on the last slide.</a:t>
+            </a:r>
+            <a:endParaRPr lang="en-US" sz="1280" dirty="0"/>
+          </a:p>
+        </p:txBody>
+      </p:sp>
+      <p:sp>
+        <p:nvSpPr>
+          <p:cNvPr id="23" name="Text 21"/>
+          <p:cNvSpPr/>
+          <p:nvPr/>
+        </p:nvSpPr>
+        <p:spPr>
+          <a:xfrm>
+            <a:off x="11183112" y="6355080"/>
+            <a:ext cx="548640" cy="274320"/>
+          </a:xfrm>
+          <a:prstGeom prst="rect">
+            <a:avLst/>
+          </a:prstGeom>
+          <a:noFill/>
+          <a:ln/>
+        </p:spPr>
+        <p:txBody>
+          <a:bodyPr wrap="square" lIns="0" tIns="0" rIns="0" bIns="0" rtlCol="0" anchor="ctr"/>
+          <a:lstStyle/>
+          <a:p>
+            <a:pPr algn="r" indent="0" marL="0">
+              <a:buNone/>
+            </a:pPr>
+            <a:r>
+              <a:rPr lang="en-US" sz="1000" dirty="0">
+                <a:solidFill>
+                  <a:srgbClr val="68786F"/>
+                </a:solidFill>
+                <a:latin typeface="Calibri" pitchFamily="34" charset="0"/>
+                <a:ea typeface="Calibri" pitchFamily="34" charset="-122"/>
+                <a:cs typeface="Calibri" pitchFamily="34" charset="-120"/>
+              </a:rPr>
+              <a:t>19</a:t>
+            </a:r>
+            <a:endParaRPr lang="en-US" sz="1000" dirty="0"/>
+          </a:p>
+        </p:txBody>
+      </p:sp>
+      <p:sp>
+        <p:nvSpPr>
+          <p:cNvPr id="24" name="Text 22"/>
+          <p:cNvSpPr/>
+          <p:nvPr/>
+        </p:nvSpPr>
+        <p:spPr>
+          <a:xfrm>
+            <a:off x="658368" y="6355080"/>
+            <a:ext cx="2743200" cy="274320"/>
+          </a:xfrm>
+          <a:prstGeom prst="rect">
+            <a:avLst/>
+          </a:prstGeom>
+          <a:noFill/>
+          <a:ln/>
+        </p:spPr>
+        <p:txBody>
+          <a:bodyPr wrap="square" lIns="0" tIns="0" rIns="0" bIns="0" rtlCol="0" anchor="ctr"/>
+          <a:lstStyle/>
+          <a:p>
+            <a:pPr indent="0" marL="0">
+              <a:buNone/>
+            </a:pPr>
+            <a:r>
+              <a:rPr lang="en-US" sz="1000" b="1" dirty="0">
+                <a:solidFill>
+                  <a:srgbClr val="68786F"/>
+                </a:solidFill>
+                <a:latin typeface="Calibri" pitchFamily="34" charset="0"/>
+                <a:ea typeface="Calibri" pitchFamily="34" charset="-122"/>
+                <a:cs typeface="Calibri" pitchFamily="34" charset="-120"/>
+              </a:rPr>
+              <a:t>Agripals</a:t>
+            </a:r>
+            <a:endParaRPr lang="en-US" sz="1000" dirty="0"/>
           </a:p>
         </p:txBody>
       </p:sp>
@@ -8008,6 +10192,264 @@
 </p:sld>
 </file>
 
+<file path=ppt/slides/slide20.xml><?xml version="1.0" encoding="utf-8"?>
+<p:sld xmlns:a="http://schemas.openxmlformats.org/drawingml/2006/main" xmlns:r="http://schemas.openxmlformats.org/officeDocument/2006/relationships" xmlns:p="http://schemas.openxmlformats.org/presentationml/2006/main">
+  <p:cSld name="Slide 14">
+    <p:bg>
+      <p:bgPr>
+        <a:solidFill>
+          <a:srgbClr val="0D1B16"/>
+        </a:solidFill>
+      </p:bgPr>
+    </p:bg>
+    <p:spTree>
+      <p:nvGrpSpPr>
+        <p:cNvPr id="1" name=""/>
+        <p:cNvGrpSpPr/>
+        <p:nvPr/>
+      </p:nvGrpSpPr>
+      <p:grpSpPr>
+        <a:xfrm>
+          <a:off x="0" y="0"/>
+          <a:ext cx="0" cy="0"/>
+          <a:chOff x="0" y="0"/>
+          <a:chExt cx="0" cy="0"/>
+        </a:xfrm>
+      </p:grpSpPr>
+      <p:sp>
+        <p:nvSpPr>
+          <p:cNvPr id="2" name="Shape 0"/>
+          <p:cNvSpPr/>
+          <p:nvPr/>
+        </p:nvSpPr>
+        <p:spPr>
+          <a:xfrm>
+            <a:off x="-1645920" y="2194560"/>
+            <a:ext cx="6583680" cy="6583680"/>
+          </a:xfrm>
+          <a:prstGeom prst="ellipse">
+            <a:avLst/>
+          </a:prstGeom>
+          <a:solidFill>
+            <a:srgbClr val="12261E"/>
+          </a:solidFill>
+          <a:ln/>
+        </p:spPr>
+      </p:sp>
+      <p:pic>
+        <p:nvPicPr>
+          <p:cNvPr id="3" name="Image 0" descr="/sessions/relaxed-dazzling-mccarthy/mnt/Agripals/assets/agripal-mascot/transparent-sizes/agripal-green-transparent-1024.png"/>
+          <p:cNvPicPr>
+            <a:picLocks noChangeAspect="1"/>
+          </p:cNvPicPr>
+          <p:nvPr/>
+        </p:nvPicPr>
+        <p:blipFill>
+          <a:blip r:embed="rId1"/>
+          <a:stretch>
+            <a:fillRect/>
+          </a:stretch>
+        </p:blipFill>
+        <p:spPr>
+          <a:xfrm>
+            <a:off x="822960" y="2286000"/>
+            <a:ext cx="2926080" cy="2926080"/>
+          </a:xfrm>
+          <a:prstGeom prst="rect">
+            <a:avLst/>
+          </a:prstGeom>
+        </p:spPr>
+      </p:pic>
+      <p:sp>
+        <p:nvSpPr>
+          <p:cNvPr id="4" name="Text 1"/>
+          <p:cNvSpPr/>
+          <p:nvPr/>
+        </p:nvSpPr>
+        <p:spPr>
+          <a:xfrm>
+            <a:off x="4297680" y="1965960"/>
+            <a:ext cx="7406640" cy="1828800"/>
+          </a:xfrm>
+          <a:prstGeom prst="rect">
+            <a:avLst/>
+          </a:prstGeom>
+          <a:noFill/>
+          <a:ln/>
+        </p:spPr>
+        <p:txBody>
+          <a:bodyPr wrap="square" lIns="0" tIns="0" rIns="0" bIns="0" rtlCol="0" anchor="ctr"/>
+          <a:lstStyle/>
+          <a:p>
+            <a:pPr indent="0" marL="0">
+              <a:lnSpc>
+                <a:spcPct val="103000"/>
+              </a:lnSpc>
+              <a:buNone/>
+            </a:pPr>
+            <a:r>
+              <a:rPr lang="en-US" sz="4000" b="1" dirty="0">
+                <a:solidFill>
+                  <a:srgbClr val="FFFFFF"/>
+                </a:solidFill>
+                <a:latin typeface="Calibri" pitchFamily="34" charset="0"/>
+                <a:ea typeface="Calibri" pitchFamily="34" charset="-122"/>
+                <a:cs typeface="Calibri" pitchFamily="34" charset="-120"/>
+              </a:rPr>
+              <a:t>Start with a photo.</a:t>
+            </a:r>
+            <a:endParaRPr lang="en-US" sz="4000" dirty="0"/>
+          </a:p>
+          <a:p>
+            <a:pPr indent="0" marL="0">
+              <a:lnSpc>
+                <a:spcPct val="103000"/>
+              </a:lnSpc>
+              <a:buNone/>
+            </a:pPr>
+            <a:r>
+              <a:rPr lang="en-US" sz="4000" b="1" dirty="0">
+                <a:solidFill>
+                  <a:srgbClr val="FFFFFF"/>
+                </a:solidFill>
+                <a:latin typeface="Calibri" pitchFamily="34" charset="0"/>
+                <a:ea typeface="Calibri" pitchFamily="34" charset="-122"/>
+                <a:cs typeface="Calibri" pitchFamily="34" charset="-120"/>
+              </a:rPr>
+              <a:t>Rebuild the food system.</a:t>
+            </a:r>
+            <a:endParaRPr lang="en-US" sz="4000" dirty="0"/>
+          </a:p>
+        </p:txBody>
+      </p:sp>
+      <p:sp>
+        <p:nvSpPr>
+          <p:cNvPr id="5" name="Text 2"/>
+          <p:cNvSpPr/>
+          <p:nvPr/>
+        </p:nvSpPr>
+        <p:spPr>
+          <a:xfrm>
+            <a:off x="4297680" y="3886200"/>
+            <a:ext cx="7223760" cy="1097280"/>
+          </a:xfrm>
+          <a:prstGeom prst="rect">
+            <a:avLst/>
+          </a:prstGeom>
+          <a:noFill/>
+          <a:ln/>
+        </p:spPr>
+        <p:txBody>
+          <a:bodyPr wrap="square" lIns="0" tIns="0" rIns="0" bIns="0" rtlCol="0" anchor="ctr"/>
+          <a:lstStyle/>
+          <a:p>
+            <a:pPr indent="0" marL="0">
+              <a:lnSpc>
+                <a:spcPct val="120000"/>
+              </a:lnSpc>
+              <a:buNone/>
+            </a:pPr>
+            <a:r>
+              <a:rPr lang="en-US" sz="1650" dirty="0">
+                <a:solidFill>
+                  <a:srgbClr val="A9C3B7"/>
+                </a:solidFill>
+                <a:latin typeface="Calibri" pitchFamily="34" charset="0"/>
+                <a:ea typeface="Calibri" pitchFamily="34" charset="-122"/>
+                <a:cs typeface="Calibri" pitchFamily="34" charset="-120"/>
+              </a:rPr>
+              <a:t>Cut the markup. Restore the provenance. Take the true cost of food from 2 to 1 to 0 — and become the endpoint every food agent calls.</a:t>
+            </a:r>
+            <a:endParaRPr lang="en-US" sz="1650" dirty="0"/>
+          </a:p>
+        </p:txBody>
+      </p:sp>
+      <p:sp>
+        <p:nvSpPr>
+          <p:cNvPr id="6" name="Text 3"/>
+          <p:cNvSpPr/>
+          <p:nvPr/>
+        </p:nvSpPr>
+        <p:spPr>
+          <a:xfrm>
+            <a:off x="4297680" y="5120640"/>
+            <a:ext cx="3657600" cy="457200"/>
+          </a:xfrm>
+          <a:prstGeom prst="rect">
+            <a:avLst/>
+          </a:prstGeom>
+          <a:noFill/>
+          <a:ln/>
+        </p:spPr>
+        <p:txBody>
+          <a:bodyPr wrap="square" lIns="0" tIns="0" rIns="0" bIns="0" rtlCol="0" anchor="ctr"/>
+          <a:lstStyle/>
+          <a:p>
+            <a:pPr indent="0" marL="0">
+              <a:buNone/>
+            </a:pPr>
+            <a:r>
+              <a:rPr lang="en-US" sz="2000" b="1" dirty="0">
+                <a:solidFill>
+                  <a:srgbClr val="4CC499"/>
+                </a:solidFill>
+                <a:latin typeface="Calibri" pitchFamily="34" charset="0"/>
+                <a:ea typeface="Calibri" pitchFamily="34" charset="-122"/>
+                <a:cs typeface="Calibri" pitchFamily="34" charset="-120"/>
+              </a:rPr>
+              <a:t>Agripals</a:t>
+            </a:r>
+            <a:endParaRPr lang="en-US" sz="2000" dirty="0"/>
+          </a:p>
+        </p:txBody>
+      </p:sp>
+      <p:sp>
+        <p:nvSpPr>
+          <p:cNvPr id="7" name="Text 4"/>
+          <p:cNvSpPr/>
+          <p:nvPr/>
+        </p:nvSpPr>
+        <p:spPr>
+          <a:xfrm>
+            <a:off x="4297680" y="5532120"/>
+            <a:ext cx="4572000" cy="365760"/>
+          </a:xfrm>
+          <a:prstGeom prst="rect">
+            <a:avLst/>
+          </a:prstGeom>
+          <a:noFill/>
+          <a:ln/>
+        </p:spPr>
+        <p:txBody>
+          <a:bodyPr wrap="square" lIns="0" tIns="0" rIns="0" bIns="0" rtlCol="0" anchor="ctr"/>
+          <a:lstStyle/>
+          <a:p>
+            <a:pPr indent="0" marL="0">
+              <a:buNone/>
+            </a:pPr>
+            <a:r>
+              <a:rPr lang="en-US" sz="1300" dirty="0">
+                <a:solidFill>
+                  <a:srgbClr val="A9C3B7"/>
+                </a:solidFill>
+                <a:latin typeface="Calibri" pitchFamily="34" charset="0"/>
+                <a:ea typeface="Calibri" pitchFamily="34" charset="-122"/>
+                <a:cs typeface="Calibri" pitchFamily="34" charset="-120"/>
+              </a:rPr>
+              <a:t>rhys.coombes@gmail.com</a:t>
+            </a:r>
+            <a:endParaRPr lang="en-US" sz="1300" dirty="0"/>
+          </a:p>
+        </p:txBody>
+      </p:sp>
+    </p:spTree>
+  </p:cSld>
+  <p:clrMapOvr>
+    <a:masterClrMapping/>
+  </p:clrMapOvr>
+</p:sld>
+</file>
+
 <file path=ppt/slides/slide3.xml><?xml version="1.0" encoding="utf-8"?>
 <p:sld xmlns:a="http://schemas.openxmlformats.org/drawingml/2006/main" xmlns:r="http://schemas.openxmlformats.org/officeDocument/2006/relationships" xmlns:p="http://schemas.openxmlformats.org/presentationml/2006/main">
   <p:cSld name="Slide 3">
@@ -9200,7 +11642,7 @@
                 <a:ea typeface="Calibri" pitchFamily="34" charset="-122"/>
                 <a:cs typeface="Calibri" pitchFamily="34" charset="-120"/>
               </a:rPr>
-              <a:t>Agripals reads what a kitchen already buys, spots the items it can source straight from a farm, and cuts the cost by 20% or more on those items. No portals, no order forms.</a:t>
+              <a:t>Agripals reads what a kitchen already buys, spots the items it can source straight from a farm, and cuts the cost on those items — often by 5–20%. No portals, no order forms.</a:t>
             </a:r>
             <a:endParaRPr lang="en-US" sz="1700" dirty="0"/>
           </a:p>
@@ -11463,7 +13905,7 @@
                 <a:ea typeface="Calibri" pitchFamily="34" charset="-122"/>
                 <a:cs typeface="Calibri" pitchFamily="34" charset="-120"/>
               </a:rPr>
-              <a:t>An online-only, AI-native wholesaler.</a:t>
+              <a:t>The moat just evaporated.</a:t>
             </a:r>
             <a:endParaRPr lang="en-US" sz="3400" dirty="0"/>
           </a:p>
@@ -11505,7 +13947,7 @@
                 <a:ea typeface="Calibri" pitchFamily="34" charset="-122"/>
                 <a:cs typeface="Calibri" pitchFamily="34" charset="-120"/>
               </a:rPr>
-              <a:t>Wholesalers doubled the price because they owned the last mile and forced chefs onto software they hated. Two AI shifts remove that moat — so we run it all online, with zero trucks and zero warehouses.</a:t>
+              <a:t>Wholesalers doubled the price because they owned the last mile and forced chefs onto software they hated. AI erases that moat — and we run it all online, with no trucks or warehouses of our own.</a:t>
             </a:r>
             <a:endParaRPr lang="en-US" sz="1600" dirty="0"/>
           </a:p>
@@ -11640,7 +14082,7 @@
                 <a:ea typeface="Calibri" pitchFamily="34" charset="-122"/>
                 <a:cs typeface="Calibri" pitchFamily="34" charset="-120"/>
               </a:rPr>
-              <a:t>The wedge</a:t>
+              <a:t>Unlock 1</a:t>
             </a:r>
             <a:endParaRPr lang="en-US" sz="1100" dirty="0"/>
           </a:p>
@@ -11679,7 +14121,7 @@
                 <a:ea typeface="Calibri" pitchFamily="34" charset="-122"/>
                 <a:cs typeface="Calibri" pitchFamily="34" charset="-120"/>
               </a:rPr>
-              <a:t>Everyone runs on text</a:t>
+              <a:t>Texts become orders</a:t>
             </a:r>
             <a:endParaRPr lang="en-US" sz="1550" dirty="0"/>
           </a:p>
@@ -11721,7 +14163,7 @@
                 <a:ea typeface="Calibri" pitchFamily="34" charset="-122"/>
                 <a:cs typeface="Calibri" pitchFamily="34" charset="-120"/>
               </a:rPr>
-              <a:t>Farms, drivers and chefs already coordinate their whole day by text. Agripals meets them there — no portal, no app to learn.</a:t>
+              <a:t>AI turns the messy back-and-forth of texts into clean, structured orders — like an Uber Eats ticket. No portals.</a:t>
             </a:r>
             <a:endParaRPr lang="en-US" sz="1280" dirty="0"/>
           </a:p>
@@ -11856,7 +14298,7 @@
                 <a:ea typeface="Calibri" pitchFamily="34" charset="-122"/>
                 <a:cs typeface="Calibri" pitchFamily="34" charset="-120"/>
               </a:rPr>
-              <a:t>Unlock 1</a:t>
+              <a:t>Unlock 2</a:t>
             </a:r>
             <a:endParaRPr lang="en-US" sz="1100" dirty="0"/>
           </a:p>
@@ -11895,7 +14337,7 @@
                 <a:ea typeface="Calibri" pitchFamily="34" charset="-122"/>
                 <a:cs typeface="Calibri" pitchFamily="34" charset="-120"/>
               </a:rPr>
-              <a:t>Texts become orders</a:t>
+              <a:t>AI runs logistics</a:t>
             </a:r>
             <a:endParaRPr lang="en-US" sz="1550" dirty="0"/>
           </a:p>
@@ -11937,7 +14379,7 @@
                 <a:ea typeface="Calibri" pitchFamily="34" charset="-122"/>
                 <a:cs typeface="Calibri" pitchFamily="34" charset="-120"/>
               </a:rPr>
-              <a:t>AI turns the messy back-and-forth of texts into clean, structured orders — like an Uber Eats ticket. Chefs stop typing into systems.</a:t>
+              <a:t>Routing, dispatch and tracking, automated end-to-end — with no trucks or warehouses of our own.</a:t>
             </a:r>
             <a:endParaRPr lang="en-US" sz="1280" dirty="0"/>
           </a:p>
@@ -12072,7 +14514,7 @@
                 <a:ea typeface="Calibri" pitchFamily="34" charset="-122"/>
                 <a:cs typeface="Calibri" pitchFamily="34" charset="-120"/>
               </a:rPr>
-              <a:t>Unlock 2</a:t>
+              <a:t>The moat</a:t>
             </a:r>
             <a:endParaRPr lang="en-US" sz="1100" dirty="0"/>
           </a:p>
@@ -12111,7 +14553,7 @@
                 <a:ea typeface="Calibri" pitchFamily="34" charset="-122"/>
                 <a:cs typeface="Calibri" pitchFamily="34" charset="-120"/>
               </a:rPr>
-              <a:t>AI runs the last mile</a:t>
+              <a:t>It compounds</a:t>
             </a:r>
             <a:endParaRPr lang="en-US" sz="1550" dirty="0"/>
           </a:p>
@@ -12153,7 +14595,7 @@
                 <a:ea typeface="Calibri" pitchFamily="34" charset="-122"/>
                 <a:cs typeface="Calibri" pitchFamily="34" charset="-120"/>
               </a:rPr>
-              <a:t>AI coordinates delivery — the exact edge that was the wholesaler's moat. Zero-CapEx: no fleet, no depots.</a:t>
+              <a:t>Every order sharpens prices and matches. The network's edge widens with volume.</a:t>
             </a:r>
             <a:endParaRPr lang="en-US" sz="1280" dirty="0"/>
           </a:p>
@@ -12247,7 +14689,7 @@
 
 <file path=ppt/slides/slide9.xml><?xml version="1.0" encoding="utf-8"?>
 <p:sld xmlns:a="http://schemas.openxmlformats.org/drawingml/2006/main" xmlns:r="http://schemas.openxmlformats.org/officeDocument/2006/relationships" xmlns:p="http://schemas.openxmlformats.org/presentationml/2006/main">
-  <p:cSld name="Slide 8">
+  <p:cSld name="Slide 9">
     <p:bg>
       <p:bgPr>
         <a:solidFill>
@@ -12302,7 +14744,7 @@
                 <a:ea typeface="Calibri" pitchFamily="34" charset="-122"/>
                 <a:cs typeface="Calibri" pitchFamily="34" charset="-120"/>
               </a:rPr>
-              <a:t>TRUST, WITHOUT THE MIDDLEMAN</a:t>
+              <a:t>HOW THE AI WORKS</a:t>
             </a:r>
             <a:endParaRPr lang="en-US" sz="1250" dirty="0"/>
           </a:p>
@@ -12344,7 +14786,7 @@
                 <a:ea typeface="Calibri" pitchFamily="34" charset="-122"/>
                 <a:cs typeface="Calibri" pitchFamily="34" charset="-120"/>
               </a:rPr>
-              <a:t>AI grading replaces the broker's handshake.</a:t>
+              <a:t>Menu in. Farm-direct out.</a:t>
             </a:r>
             <a:endParaRPr lang="en-US" sz="3400" dirty="0"/>
           </a:p>
@@ -12352,13 +14794,55 @@
       </p:sp>
       <p:sp>
         <p:nvSpPr>
-          <p:cNvPr id="4" name="Shape 2"/>
-          <p:cNvSpPr/>
-          <p:nvPr/>
-        </p:nvSpPr>
-        <p:spPr>
-          <a:xfrm>
-            <a:off x="658368" y="2331720"/>
+          <p:cNvPr id="4" name="Text 2"/>
+          <p:cNvSpPr/>
+          <p:nvPr/>
+        </p:nvSpPr>
+        <p:spPr>
+          <a:xfrm>
+            <a:off x="658368" y="1828800"/>
+            <a:ext cx="10607040" cy="640080"/>
+          </a:xfrm>
+          <a:prstGeom prst="rect">
+            <a:avLst/>
+          </a:prstGeom>
+          <a:noFill/>
+          <a:ln/>
+        </p:spPr>
+        <p:txBody>
+          <a:bodyPr wrap="square" lIns="0" tIns="0" rIns="0" bIns="0" rtlCol="0" anchor="ctr"/>
+          <a:lstStyle/>
+          <a:p>
+            <a:pPr indent="0" marL="0">
+              <a:lnSpc>
+                <a:spcPct val="115000"/>
+              </a:lnSpc>
+              <a:buNone/>
+            </a:pPr>
+            <a:r>
+              <a:rPr lang="en-US" sz="1600" dirty="0">
+                <a:solidFill>
+                  <a:srgbClr val="12201A"/>
+                </a:solidFill>
+                <a:latin typeface="Calibri" pitchFamily="34" charset="0"/>
+                <a:ea typeface="Calibri" pitchFamily="34" charset="-122"/>
+                <a:cs typeface="Calibri" pitchFamily="34" charset="-120"/>
+              </a:rPr>
+              <a:t>One AI does the entire job a room full of wholesalers used to — instantly, and for a fraction of the cost.</a:t>
+            </a:r>
+            <a:endParaRPr lang="en-US" sz="1600" dirty="0"/>
+          </a:p>
+        </p:txBody>
+      </p:sp>
+      <p:sp>
+        <p:nvSpPr>
+          <p:cNvPr id="5" name="Shape 3"/>
+          <p:cNvSpPr/>
+          <p:nvPr/>
+        </p:nvSpPr>
+        <p:spPr>
+          <a:xfrm>
+            <a:off x="658368" y="2743200"/>
             <a:ext cx="3383280" cy="3017520"/>
           </a:xfrm>
           <a:prstGeom prst="roundRect">
@@ -12385,20 +14869,20 @@
       </p:sp>
       <p:sp>
         <p:nvSpPr>
-          <p:cNvPr id="5" name="Shape 3"/>
-          <p:cNvSpPr/>
-          <p:nvPr/>
-        </p:nvSpPr>
-        <p:spPr>
-          <a:xfrm>
-            <a:off x="978408" y="2697480"/>
-            <a:ext cx="822960" cy="822960"/>
+          <p:cNvPr id="6" name="Shape 4"/>
+          <p:cNvSpPr/>
+          <p:nvPr/>
+        </p:nvSpPr>
+        <p:spPr>
+          <a:xfrm>
+            <a:off x="978408" y="3090672"/>
+            <a:ext cx="777240" cy="777240"/>
           </a:xfrm>
           <a:prstGeom prst="ellipse">
             <a:avLst/>
           </a:prstGeom>
           <a:solidFill>
-            <a:srgbClr val="DCEFE1"/>
+            <a:srgbClr val="2E8564"/>
           </a:solidFill>
           <a:ln/>
         </p:spPr>
@@ -12407,40 +14891,55 @@
           <a:p/>
         </p:txBody>
       </p:sp>
-      <p:pic>
-        <p:nvPicPr>
-          <p:cNvPr id="6" name="Image 0" descr="preencoded.png"/>
-          <p:cNvPicPr>
-            <a:picLocks noChangeAspect="1"/>
-          </p:cNvPicPr>
-          <p:nvPr/>
-        </p:nvPicPr>
-        <p:blipFill>
-          <a:blip r:embed="rId1"/>
-          <a:stretch>
-            <a:fillRect/>
-          </a:stretch>
-        </p:blipFill>
-        <p:spPr>
-          <a:xfrm>
-            <a:off x="1175918" y="2894990"/>
-            <a:ext cx="427939" cy="427939"/>
-          </a:xfrm>
-          <a:prstGeom prst="rect">
-            <a:avLst/>
-          </a:prstGeom>
-        </p:spPr>
-      </p:pic>
-      <p:sp>
-        <p:nvSpPr>
-          <p:cNvPr id="7" name="Text 4"/>
-          <p:cNvSpPr/>
-          <p:nvPr/>
-        </p:nvSpPr>
-        <p:spPr>
-          <a:xfrm>
-            <a:off x="978408" y="3703320"/>
-            <a:ext cx="2743200" cy="457200"/>
+      <p:sp>
+        <p:nvSpPr>
+          <p:cNvPr id="7" name="Text 5"/>
+          <p:cNvSpPr/>
+          <p:nvPr/>
+        </p:nvSpPr>
+        <p:spPr>
+          <a:xfrm>
+            <a:off x="978408" y="3090672"/>
+            <a:ext cx="777240" cy="777240"/>
+          </a:xfrm>
+          <a:prstGeom prst="rect">
+            <a:avLst/>
+          </a:prstGeom>
+          <a:noFill/>
+          <a:ln/>
+        </p:spPr>
+        <p:txBody>
+          <a:bodyPr wrap="square" lIns="0" tIns="0" rIns="0" bIns="0" rtlCol="0" anchor="ctr"/>
+          <a:lstStyle/>
+          <a:p>
+            <a:pPr algn="ctr" indent="0" marL="0">
+              <a:buNone/>
+            </a:pPr>
+            <a:r>
+              <a:rPr lang="en-US" sz="3000" b="1" dirty="0">
+                <a:solidFill>
+                  <a:srgbClr val="FFFFFF"/>
+                </a:solidFill>
+                <a:latin typeface="Calibri" pitchFamily="34" charset="0"/>
+                <a:ea typeface="Calibri" pitchFamily="34" charset="-122"/>
+                <a:cs typeface="Calibri" pitchFamily="34" charset="-120"/>
+              </a:rPr>
+              <a:t>1</a:t>
+            </a:r>
+            <a:endParaRPr lang="en-US" sz="3000" dirty="0"/>
+          </a:p>
+        </p:txBody>
+      </p:sp>
+      <p:sp>
+        <p:nvSpPr>
+          <p:cNvPr id="8" name="Text 6"/>
+          <p:cNvSpPr/>
+          <p:nvPr/>
+        </p:nvSpPr>
+        <p:spPr>
+          <a:xfrm>
+            <a:off x="1892808" y="3154680"/>
+            <a:ext cx="1920240" cy="320040"/>
           </a:xfrm>
           <a:prstGeom prst="rect">
             <a:avLst/>
@@ -12456,7 +14955,46 @@
               <a:buNone/>
             </a:pPr>
             <a:r>
-              <a:rPr lang="en-US" sz="1700" b="1" dirty="0">
+              <a:rPr lang="en-US" sz="1100" b="1" spc="100" kern="0" dirty="0">
+                <a:solidFill>
+                  <a:srgbClr val="68786F"/>
+                </a:solidFill>
+                <a:latin typeface="Calibri" pitchFamily="34" charset="0"/>
+                <a:ea typeface="Calibri" pitchFamily="34" charset="-122"/>
+                <a:cs typeface="Calibri" pitchFamily="34" charset="-120"/>
+              </a:rPr>
+              <a:t>Step 1</a:t>
+            </a:r>
+            <a:endParaRPr lang="en-US" sz="1100" dirty="0"/>
+          </a:p>
+        </p:txBody>
+      </p:sp>
+      <p:sp>
+        <p:nvSpPr>
+          <p:cNvPr id="9" name="Text 7"/>
+          <p:cNvSpPr/>
+          <p:nvPr/>
+        </p:nvSpPr>
+        <p:spPr>
+          <a:xfrm>
+            <a:off x="1892808" y="3429000"/>
+            <a:ext cx="1920240" cy="457200"/>
+          </a:xfrm>
+          <a:prstGeom prst="rect">
+            <a:avLst/>
+          </a:prstGeom>
+          <a:noFill/>
+          <a:ln/>
+        </p:spPr>
+        <p:txBody>
+          <a:bodyPr wrap="square" lIns="0" tIns="0" rIns="0" bIns="0" rtlCol="0" anchor="ctr"/>
+          <a:lstStyle/>
+          <a:p>
+            <a:pPr indent="0" marL="0">
+              <a:buNone/>
+            </a:pPr>
+            <a:r>
+              <a:rPr lang="en-US" sz="1550" b="1" dirty="0">
                 <a:solidFill>
                   <a:srgbClr val="123024"/>
                 </a:solidFill>
@@ -12464,22 +15002,22 @@
                 <a:ea typeface="Calibri" pitchFamily="34" charset="-122"/>
                 <a:cs typeface="Calibri" pitchFamily="34" charset="-120"/>
               </a:rPr>
-              <a:t>Farm-side photos</a:t>
-            </a:r>
-            <a:endParaRPr lang="en-US" sz="1700" dirty="0"/>
-          </a:p>
-        </p:txBody>
-      </p:sp>
-      <p:sp>
-        <p:nvSpPr>
-          <p:cNvPr id="8" name="Text 5"/>
-          <p:cNvSpPr/>
-          <p:nvPr/>
-        </p:nvSpPr>
-        <p:spPr>
-          <a:xfrm>
-            <a:off x="978408" y="4206240"/>
-            <a:ext cx="2743200" cy="1005840"/>
+              <a:t>Text it your order</a:t>
+            </a:r>
+            <a:endParaRPr lang="en-US" sz="1550" dirty="0"/>
+          </a:p>
+        </p:txBody>
+      </p:sp>
+      <p:sp>
+        <p:nvSpPr>
+          <p:cNvPr id="10" name="Text 8"/>
+          <p:cNvSpPr/>
+          <p:nvPr/>
+        </p:nvSpPr>
+        <p:spPr>
+          <a:xfrm>
+            <a:off x="978408" y="4251960"/>
+            <a:ext cx="2743200" cy="1280160"/>
           </a:xfrm>
           <a:prstGeom prst="rect">
             <a:avLst/>
@@ -12498,7 +15036,7 @@
               <a:buNone/>
             </a:pPr>
             <a:r>
-              <a:rPr lang="en-US" sz="1300" dirty="0">
+              <a:rPr lang="en-US" sz="1280" dirty="0">
                 <a:solidFill>
                   <a:srgbClr val="68786F"/>
                 </a:solidFill>
@@ -12506,21 +15044,21 @@
                 <a:ea typeface="Calibri" pitchFamily="34" charset="-122"/>
                 <a:cs typeface="Calibri" pitchFamily="34" charset="-120"/>
               </a:rPr>
-              <a:t>The farmer photographs a handful of product and a graded sample before sealing the shipment.</a:t>
-            </a:r>
-            <a:endParaRPr lang="en-US" sz="1300" dirty="0"/>
-          </a:p>
-        </p:txBody>
-      </p:sp>
-      <p:sp>
-        <p:nvSpPr>
-          <p:cNvPr id="9" name="Shape 6"/>
-          <p:cNvSpPr/>
-          <p:nvPr/>
-        </p:nvSpPr>
-        <p:spPr>
-          <a:xfrm>
-            <a:off x="4334256" y="2331720"/>
+              <a:t>Snap your menu or type what you need. The AI reads it and turns it into a clean, structured order.</a:t>
+            </a:r>
+            <a:endParaRPr lang="en-US" sz="1280" dirty="0"/>
+          </a:p>
+        </p:txBody>
+      </p:sp>
+      <p:sp>
+        <p:nvSpPr>
+          <p:cNvPr id="11" name="Shape 9"/>
+          <p:cNvSpPr/>
+          <p:nvPr/>
+        </p:nvSpPr>
+        <p:spPr>
+          <a:xfrm>
+            <a:off x="4334256" y="2743200"/>
             <a:ext cx="3383280" cy="3017520"/>
           </a:xfrm>
           <a:prstGeom prst="roundRect">
@@ -12547,20 +15085,20 @@
       </p:sp>
       <p:sp>
         <p:nvSpPr>
-          <p:cNvPr id="10" name="Shape 7"/>
-          <p:cNvSpPr/>
-          <p:nvPr/>
-        </p:nvSpPr>
-        <p:spPr>
-          <a:xfrm>
-            <a:off x="4654296" y="2697480"/>
-            <a:ext cx="822960" cy="822960"/>
+          <p:cNvPr id="12" name="Shape 10"/>
+          <p:cNvSpPr/>
+          <p:nvPr/>
+        </p:nvSpPr>
+        <p:spPr>
+          <a:xfrm>
+            <a:off x="4654296" y="3090672"/>
+            <a:ext cx="777240" cy="777240"/>
           </a:xfrm>
           <a:prstGeom prst="ellipse">
             <a:avLst/>
           </a:prstGeom>
           <a:solidFill>
-            <a:srgbClr val="DCEFE1"/>
+            <a:srgbClr val="37A278"/>
           </a:solidFill>
           <a:ln/>
         </p:spPr>
@@ -12569,40 +15107,55 @@
           <a:p/>
         </p:txBody>
       </p:sp>
-      <p:pic>
-        <p:nvPicPr>
-          <p:cNvPr id="11" name="Image 1" descr="preencoded.png"/>
-          <p:cNvPicPr>
-            <a:picLocks noChangeAspect="1"/>
-          </p:cNvPicPr>
-          <p:nvPr/>
-        </p:nvPicPr>
-        <p:blipFill>
-          <a:blip r:embed="rId2"/>
-          <a:stretch>
-            <a:fillRect/>
-          </a:stretch>
-        </p:blipFill>
-        <p:spPr>
-          <a:xfrm>
-            <a:off x="4851806" y="2894990"/>
-            <a:ext cx="427939" cy="427939"/>
-          </a:xfrm>
-          <a:prstGeom prst="rect">
-            <a:avLst/>
-          </a:prstGeom>
-        </p:spPr>
-      </p:pic>
-      <p:sp>
-        <p:nvSpPr>
-          <p:cNvPr id="12" name="Text 8"/>
-          <p:cNvSpPr/>
-          <p:nvPr/>
-        </p:nvSpPr>
-        <p:spPr>
-          <a:xfrm>
-            <a:off x="4654296" y="3703320"/>
-            <a:ext cx="2743200" cy="457200"/>
+      <p:sp>
+        <p:nvSpPr>
+          <p:cNvPr id="13" name="Text 11"/>
+          <p:cNvSpPr/>
+          <p:nvPr/>
+        </p:nvSpPr>
+        <p:spPr>
+          <a:xfrm>
+            <a:off x="4654296" y="3090672"/>
+            <a:ext cx="777240" cy="777240"/>
+          </a:xfrm>
+          <a:prstGeom prst="rect">
+            <a:avLst/>
+          </a:prstGeom>
+          <a:noFill/>
+          <a:ln/>
+        </p:spPr>
+        <p:txBody>
+          <a:bodyPr wrap="square" lIns="0" tIns="0" rIns="0" bIns="0" rtlCol="0" anchor="ctr"/>
+          <a:lstStyle/>
+          <a:p>
+            <a:pPr algn="ctr" indent="0" marL="0">
+              <a:buNone/>
+            </a:pPr>
+            <a:r>
+              <a:rPr lang="en-US" sz="3000" b="1" dirty="0">
+                <a:solidFill>
+                  <a:srgbClr val="FFFFFF"/>
+                </a:solidFill>
+                <a:latin typeface="Calibri" pitchFamily="34" charset="0"/>
+                <a:ea typeface="Calibri" pitchFamily="34" charset="-122"/>
+                <a:cs typeface="Calibri" pitchFamily="34" charset="-120"/>
+              </a:rPr>
+              <a:t>2</a:t>
+            </a:r>
+            <a:endParaRPr lang="en-US" sz="3000" dirty="0"/>
+          </a:p>
+        </p:txBody>
+      </p:sp>
+      <p:sp>
+        <p:nvSpPr>
+          <p:cNvPr id="14" name="Text 12"/>
+          <p:cNvSpPr/>
+          <p:nvPr/>
+        </p:nvSpPr>
+        <p:spPr>
+          <a:xfrm>
+            <a:off x="5568696" y="3154680"/>
+            <a:ext cx="1920240" cy="320040"/>
           </a:xfrm>
           <a:prstGeom prst="rect">
             <a:avLst/>
@@ -12618,7 +15171,46 @@
               <a:buNone/>
             </a:pPr>
             <a:r>
-              <a:rPr lang="en-US" sz="1700" b="1" dirty="0">
+              <a:rPr lang="en-US" sz="1100" b="1" spc="100" kern="0" dirty="0">
+                <a:solidFill>
+                  <a:srgbClr val="68786F"/>
+                </a:solidFill>
+                <a:latin typeface="Calibri" pitchFamily="34" charset="0"/>
+                <a:ea typeface="Calibri" pitchFamily="34" charset="-122"/>
+                <a:cs typeface="Calibri" pitchFamily="34" charset="-120"/>
+              </a:rPr>
+              <a:t>Step 2</a:t>
+            </a:r>
+            <a:endParaRPr lang="en-US" sz="1100" dirty="0"/>
+          </a:p>
+        </p:txBody>
+      </p:sp>
+      <p:sp>
+        <p:nvSpPr>
+          <p:cNvPr id="15" name="Text 13"/>
+          <p:cNvSpPr/>
+          <p:nvPr/>
+        </p:nvSpPr>
+        <p:spPr>
+          <a:xfrm>
+            <a:off x="5568696" y="3429000"/>
+            <a:ext cx="1920240" cy="457200"/>
+          </a:xfrm>
+          <a:prstGeom prst="rect">
+            <a:avLst/>
+          </a:prstGeom>
+          <a:noFill/>
+          <a:ln/>
+        </p:spPr>
+        <p:txBody>
+          <a:bodyPr wrap="square" lIns="0" tIns="0" rIns="0" bIns="0" rtlCol="0" anchor="ctr"/>
+          <a:lstStyle/>
+          <a:p>
+            <a:pPr indent="0" marL="0">
+              <a:buNone/>
+            </a:pPr>
+            <a:r>
+              <a:rPr lang="en-US" sz="1550" b="1" dirty="0">
                 <a:solidFill>
                   <a:srgbClr val="123024"/>
                 </a:solidFill>
@@ -12626,22 +15218,22 @@
                 <a:ea typeface="Calibri" pitchFamily="34" charset="-122"/>
                 <a:cs typeface="Calibri" pitchFamily="34" charset="-120"/>
               </a:rPr>
-              <a:t>Delivery-side recheck</a:t>
-            </a:r>
-            <a:endParaRPr lang="en-US" sz="1700" dirty="0"/>
-          </a:p>
-        </p:txBody>
-      </p:sp>
-      <p:sp>
-        <p:nvSpPr>
-          <p:cNvPr id="13" name="Text 9"/>
-          <p:cNvSpPr/>
-          <p:nvPr/>
-        </p:nvSpPr>
-        <p:spPr>
-          <a:xfrm>
-            <a:off x="4654296" y="4206240"/>
-            <a:ext cx="2743200" cy="1005840"/>
+              <a:t>AI sources direct</a:t>
+            </a:r>
+            <a:endParaRPr lang="en-US" sz="1550" dirty="0"/>
+          </a:p>
+        </p:txBody>
+      </p:sp>
+      <p:sp>
+        <p:nvSpPr>
+          <p:cNvPr id="16" name="Text 14"/>
+          <p:cNvSpPr/>
+          <p:nvPr/>
+        </p:nvSpPr>
+        <p:spPr>
+          <a:xfrm>
+            <a:off x="4654296" y="4251960"/>
+            <a:ext cx="2743200" cy="1280160"/>
           </a:xfrm>
           <a:prstGeom prst="rect">
             <a:avLst/>
@@ -12660,7 +15252,7 @@
               <a:buNone/>
             </a:pPr>
             <a:r>
-              <a:rPr lang="en-US" sz="1300" dirty="0">
+              <a:rPr lang="en-US" sz="1280" dirty="0">
                 <a:solidFill>
                   <a:srgbClr val="68786F"/>
                 </a:solidFill>
@@ -12668,21 +15260,21 @@
                 <a:ea typeface="Calibri" pitchFamily="34" charset="-122"/>
                 <a:cs typeface="Calibri" pitchFamily="34" charset="-120"/>
               </a:rPr>
-              <a:t>The chef photographs the same on arrival, so Agripals can compare quality and consistency.</a:t>
-            </a:r>
-            <a:endParaRPr lang="en-US" sz="1300" dirty="0"/>
-          </a:p>
-        </p:txBody>
-      </p:sp>
-      <p:sp>
-        <p:nvSpPr>
-          <p:cNvPr id="14" name="Shape 10"/>
-          <p:cNvSpPr/>
-          <p:nvPr/>
-        </p:nvSpPr>
-        <p:spPr>
-          <a:xfrm>
-            <a:off x="8010144" y="2331720"/>
+              <a:t>It finds the farm and the dock, agrees the price, and strips the markup out of the chain in milliseconds.</a:t>
+            </a:r>
+            <a:endParaRPr lang="en-US" sz="1280" dirty="0"/>
+          </a:p>
+        </p:txBody>
+      </p:sp>
+      <p:sp>
+        <p:nvSpPr>
+          <p:cNvPr id="17" name="Shape 15"/>
+          <p:cNvSpPr/>
+          <p:nvPr/>
+        </p:nvSpPr>
+        <p:spPr>
+          <a:xfrm>
+            <a:off x="8010144" y="2743200"/>
             <a:ext cx="3383280" cy="3017520"/>
           </a:xfrm>
           <a:prstGeom prst="roundRect">
@@ -12709,20 +15301,20 @@
       </p:sp>
       <p:sp>
         <p:nvSpPr>
-          <p:cNvPr id="15" name="Shape 11"/>
-          <p:cNvSpPr/>
-          <p:nvPr/>
-        </p:nvSpPr>
-        <p:spPr>
-          <a:xfrm>
-            <a:off x="8330184" y="2697480"/>
-            <a:ext cx="822960" cy="822960"/>
+          <p:cNvPr id="18" name="Shape 16"/>
+          <p:cNvSpPr/>
+          <p:nvPr/>
+        </p:nvSpPr>
+        <p:spPr>
+          <a:xfrm>
+            <a:off x="8330184" y="3090672"/>
+            <a:ext cx="777240" cy="777240"/>
           </a:xfrm>
           <a:prstGeom prst="ellipse">
             <a:avLst/>
           </a:prstGeom>
           <a:solidFill>
-            <a:srgbClr val="DCEFE1"/>
+            <a:srgbClr val="4CC499"/>
           </a:solidFill>
           <a:ln/>
         </p:spPr>
@@ -12731,40 +15323,55 @@
           <a:p/>
         </p:txBody>
       </p:sp>
-      <p:pic>
-        <p:nvPicPr>
-          <p:cNvPr id="16" name="Image 2" descr="preencoded.png"/>
-          <p:cNvPicPr>
-            <a:picLocks noChangeAspect="1"/>
-          </p:cNvPicPr>
-          <p:nvPr/>
-        </p:nvPicPr>
-        <p:blipFill>
-          <a:blip r:embed="rId3"/>
-          <a:stretch>
-            <a:fillRect/>
-          </a:stretch>
-        </p:blipFill>
-        <p:spPr>
-          <a:xfrm>
-            <a:off x="8527694" y="2894990"/>
-            <a:ext cx="427939" cy="427939"/>
-          </a:xfrm>
-          <a:prstGeom prst="rect">
-            <a:avLst/>
-          </a:prstGeom>
-        </p:spPr>
-      </p:pic>
-      <p:sp>
-        <p:nvSpPr>
-          <p:cNvPr id="17" name="Text 12"/>
-          <p:cNvSpPr/>
-          <p:nvPr/>
-        </p:nvSpPr>
-        <p:spPr>
-          <a:xfrm>
-            <a:off x="8330184" y="3703320"/>
-            <a:ext cx="2743200" cy="457200"/>
+      <p:sp>
+        <p:nvSpPr>
+          <p:cNvPr id="19" name="Text 17"/>
+          <p:cNvSpPr/>
+          <p:nvPr/>
+        </p:nvSpPr>
+        <p:spPr>
+          <a:xfrm>
+            <a:off x="8330184" y="3090672"/>
+            <a:ext cx="777240" cy="777240"/>
+          </a:xfrm>
+          <a:prstGeom prst="rect">
+            <a:avLst/>
+          </a:prstGeom>
+          <a:noFill/>
+          <a:ln/>
+        </p:spPr>
+        <p:txBody>
+          <a:bodyPr wrap="square" lIns="0" tIns="0" rIns="0" bIns="0" rtlCol="0" anchor="ctr"/>
+          <a:lstStyle/>
+          <a:p>
+            <a:pPr algn="ctr" indent="0" marL="0">
+              <a:buNone/>
+            </a:pPr>
+            <a:r>
+              <a:rPr lang="en-US" sz="3000" b="1" dirty="0">
+                <a:solidFill>
+                  <a:srgbClr val="FFFFFF"/>
+                </a:solidFill>
+                <a:latin typeface="Calibri" pitchFamily="34" charset="0"/>
+                <a:ea typeface="Calibri" pitchFamily="34" charset="-122"/>
+                <a:cs typeface="Calibri" pitchFamily="34" charset="-120"/>
+              </a:rPr>
+              <a:t>3</a:t>
+            </a:r>
+            <a:endParaRPr lang="en-US" sz="3000" dirty="0"/>
+          </a:p>
+        </p:txBody>
+      </p:sp>
+      <p:sp>
+        <p:nvSpPr>
+          <p:cNvPr id="20" name="Text 18"/>
+          <p:cNvSpPr/>
+          <p:nvPr/>
+        </p:nvSpPr>
+        <p:spPr>
+          <a:xfrm>
+            <a:off x="9244584" y="3154680"/>
+            <a:ext cx="1920240" cy="320040"/>
           </a:xfrm>
           <a:prstGeom prst="rect">
             <a:avLst/>
@@ -12780,7 +15387,46 @@
               <a:buNone/>
             </a:pPr>
             <a:r>
-              <a:rPr lang="en-US" sz="1700" b="1" dirty="0">
+              <a:rPr lang="en-US" sz="1100" b="1" spc="100" kern="0" dirty="0">
+                <a:solidFill>
+                  <a:srgbClr val="68786F"/>
+                </a:solidFill>
+                <a:latin typeface="Calibri" pitchFamily="34" charset="0"/>
+                <a:ea typeface="Calibri" pitchFamily="34" charset="-122"/>
+                <a:cs typeface="Calibri" pitchFamily="34" charset="-120"/>
+              </a:rPr>
+              <a:t>Step 3</a:t>
+            </a:r>
+            <a:endParaRPr lang="en-US" sz="1100" dirty="0"/>
+          </a:p>
+        </p:txBody>
+      </p:sp>
+      <p:sp>
+        <p:nvSpPr>
+          <p:cNvPr id="21" name="Text 19"/>
+          <p:cNvSpPr/>
+          <p:nvPr/>
+        </p:nvSpPr>
+        <p:spPr>
+          <a:xfrm>
+            <a:off x="9244584" y="3429000"/>
+            <a:ext cx="1920240" cy="457200"/>
+          </a:xfrm>
+          <a:prstGeom prst="rect">
+            <a:avLst/>
+          </a:prstGeom>
+          <a:noFill/>
+          <a:ln/>
+        </p:spPr>
+        <p:txBody>
+          <a:bodyPr wrap="square" lIns="0" tIns="0" rIns="0" bIns="0" rtlCol="0" anchor="ctr"/>
+          <a:lstStyle/>
+          <a:p>
+            <a:pPr indent="0" marL="0">
+              <a:buNone/>
+            </a:pPr>
+            <a:r>
+              <a:rPr lang="en-US" sz="1550" b="1" dirty="0">
                 <a:solidFill>
                   <a:srgbClr val="123024"/>
                 </a:solidFill>
@@ -12788,22 +15434,22 @@
                 <a:ea typeface="Calibri" pitchFamily="34" charset="-122"/>
                 <a:cs typeface="Calibri" pitchFamily="34" charset="-120"/>
               </a:rPr>
-              <a:t>Escrow on match</a:t>
-            </a:r>
-            <a:endParaRPr lang="en-US" sz="1700" dirty="0"/>
-          </a:p>
-        </p:txBody>
-      </p:sp>
-      <p:sp>
-        <p:nvSpPr>
-          <p:cNvPr id="18" name="Text 13"/>
-          <p:cNvSpPr/>
-          <p:nvPr/>
-        </p:nvSpPr>
-        <p:spPr>
-          <a:xfrm>
-            <a:off x="8330184" y="4206240"/>
-            <a:ext cx="2743200" cy="1005840"/>
+              <a:t>AI routes the last mile</a:t>
+            </a:r>
+            <a:endParaRPr lang="en-US" sz="1550" dirty="0"/>
+          </a:p>
+        </p:txBody>
+      </p:sp>
+      <p:sp>
+        <p:nvSpPr>
+          <p:cNvPr id="22" name="Text 20"/>
+          <p:cNvSpPr/>
+          <p:nvPr/>
+        </p:nvSpPr>
+        <p:spPr>
+          <a:xfrm>
+            <a:off x="8330184" y="4251960"/>
+            <a:ext cx="2743200" cy="1280160"/>
           </a:xfrm>
           <a:prstGeom prst="rect">
             <a:avLst/>
@@ -12822,7 +15468,7 @@
               <a:buNone/>
             </a:pPr>
             <a:r>
-              <a:rPr lang="en-US" sz="1300" dirty="0">
+              <a:rPr lang="en-US" sz="1280" dirty="0">
                 <a:solidFill>
                   <a:srgbClr val="68786F"/>
                 </a:solidFill>
@@ -12830,15 +15476,15 @@
                 <a:ea typeface="Calibri" pitchFamily="34" charset="-122"/>
                 <a:cs typeface="Calibri" pitchFamily="34" charset="-120"/>
               </a:rPr>
-              <a:t>The farmer is paid when delivery and grading are confirmed — no net-30 invoice chasing.</a:t>
-            </a:r>
-            <a:endParaRPr lang="en-US" sz="1300" dirty="0"/>
-          </a:p>
-        </p:txBody>
-      </p:sp>
-      <p:sp>
-        <p:nvSpPr>
-          <p:cNvPr id="19" name="Text 14"/>
+              <a:t>Delivery is dispatched and tracked autonomously — the exact edge wholesalers used to hold.</a:t>
+            </a:r>
+            <a:endParaRPr lang="en-US" sz="1280" dirty="0"/>
+          </a:p>
+        </p:txBody>
+      </p:sp>
+      <p:sp>
+        <p:nvSpPr>
+          <p:cNvPr id="23" name="Text 21"/>
           <p:cNvSpPr/>
           <p:nvPr/>
         </p:nvSpPr>
@@ -12877,7 +15523,7 @@
       </p:sp>
       <p:sp>
         <p:nvSpPr>
-          <p:cNvPr id="20" name="Text 15"/>
+          <p:cNvPr id="24" name="Text 22"/>
           <p:cNvSpPr/>
           <p:nvPr/>
         </p:nvSpPr>

--- a/Agripals-Investor-Deck.pptx
+++ b/Agripals-Investor-Deck.pptx
@@ -24,6 +24,7 @@
     <p:sldId id="268" r:id="rId14"/>
     <p:sldId id="274" r:id="rId25"/>
     <p:sldId id="275" r:id="rId26"/>
+    <p:sldId id="276" r:id="rId27"/>
     <p:sldId id="269" r:id="rId15"/>
   </p:sldIdLst>
   <p:notesMasterIdLst>
@@ -10194,6 +10195,887 @@
 
 <file path=ppt/slides/slide20.xml><?xml version="1.0" encoding="utf-8"?>
 <p:sld xmlns:a="http://schemas.openxmlformats.org/drawingml/2006/main" xmlns:r="http://schemas.openxmlformats.org/officeDocument/2006/relationships" xmlns:p="http://schemas.openxmlformats.org/presentationml/2006/main">
+  <p:cSld name="Slide 9">
+    <p:bg>
+      <p:bgPr>
+        <a:solidFill>
+          <a:srgbClr val="F4F7F6"/>
+        </a:solidFill>
+      </p:bgPr>
+    </p:bg>
+    <p:spTree>
+      <p:nvGrpSpPr>
+        <p:cNvPr id="1" name=""/>
+        <p:cNvGrpSpPr/>
+        <p:nvPr/>
+      </p:nvGrpSpPr>
+      <p:grpSpPr>
+        <a:xfrm>
+          <a:off x="0" y="0"/>
+          <a:ext cx="0" cy="0"/>
+          <a:chOff x="0" y="0"/>
+          <a:chExt cx="0" cy="0"/>
+        </a:xfrm>
+      </p:grpSpPr>
+      <p:sp>
+        <p:nvSpPr>
+          <p:cNvPr id="2" name="Text 0"/>
+          <p:cNvSpPr/>
+          <p:nvPr/>
+        </p:nvSpPr>
+        <p:spPr>
+          <a:xfrm>
+            <a:off x="658368" y="457200"/>
+            <a:ext cx="8229600" cy="320040"/>
+          </a:xfrm>
+          <a:prstGeom prst="rect">
+            <a:avLst/>
+          </a:prstGeom>
+          <a:noFill/>
+          <a:ln/>
+        </p:spPr>
+        <p:txBody>
+          <a:bodyPr wrap="square" lIns="0" tIns="0" rIns="0" bIns="0" rtlCol="0" anchor="ctr"/>
+          <a:lstStyle/>
+          <a:p>
+            <a:pPr algn="l" indent="0" marL="0">
+              <a:buNone/>
+            </a:pPr>
+            <a:r>
+              <a:rPr lang="en-US" sz="1250" b="1" spc="300" kern="0" dirty="0">
+                <a:solidFill>
+                  <a:srgbClr val="37A278"/>
+                </a:solidFill>
+                <a:latin typeface="Calibri" pitchFamily="34" charset="0"/>
+                <a:ea typeface="Calibri" pitchFamily="34" charset="-122"/>
+                <a:cs typeface="Calibri" pitchFamily="34" charset="-120"/>
+              </a:rPr>
+              <a:t>THE VOLUME PLAY</a:t>
+            </a:r>
+            <a:endParaRPr lang="en-US" sz="1250" dirty="0"/>
+          </a:p>
+        </p:txBody>
+      </p:sp>
+      <p:sp>
+        <p:nvSpPr>
+          <p:cNvPr id="3" name="Text 1"/>
+          <p:cNvSpPr/>
+          <p:nvPr/>
+        </p:nvSpPr>
+        <p:spPr>
+          <a:xfrm>
+            <a:off x="658368" y="841248"/>
+            <a:ext cx="10872216" cy="1051560"/>
+          </a:xfrm>
+          <a:prstGeom prst="rect">
+            <a:avLst/>
+          </a:prstGeom>
+          <a:noFill/>
+          <a:ln/>
+        </p:spPr>
+        <p:txBody>
+          <a:bodyPr wrap="square" lIns="0" tIns="0" rIns="0" bIns="0" rtlCol="0" anchor="ctr"/>
+          <a:lstStyle/>
+          <a:p>
+            <a:pPr algn="l" indent="0" marL="0">
+              <a:lnSpc>
+                <a:spcPct val="100000"/>
+              </a:lnSpc>
+              <a:buNone/>
+            </a:pPr>
+            <a:r>
+              <a:rPr lang="en-US" sz="3400" b="1" dirty="0">
+                <a:solidFill>
+                  <a:srgbClr val="123024"/>
+                </a:solidFill>
+                <a:latin typeface="Calibri" pitchFamily="34" charset="0"/>
+                <a:ea typeface="Calibri" pitchFamily="34" charset="-122"/>
+                <a:cs typeface="Calibri" pitchFamily="34" charset="-120"/>
+              </a:rPr>
+              <a:t>One text secures a year of supply.</a:t>
+            </a:r>
+            <a:endParaRPr lang="en-US" sz="3400" dirty="0"/>
+          </a:p>
+        </p:txBody>
+      </p:sp>
+      <p:sp>
+        <p:nvSpPr>
+          <p:cNvPr id="4" name="Text 2"/>
+          <p:cNvSpPr/>
+          <p:nvPr/>
+        </p:nvSpPr>
+        <p:spPr>
+          <a:xfrm>
+            <a:off x="658368" y="1828800"/>
+            <a:ext cx="10607040" cy="640080"/>
+          </a:xfrm>
+          <a:prstGeom prst="rect">
+            <a:avLst/>
+          </a:prstGeom>
+          <a:noFill/>
+          <a:ln/>
+        </p:spPr>
+        <p:txBody>
+          <a:bodyPr wrap="square" lIns="0" tIns="0" rIns="0" bIns="0" rtlCol="0" anchor="ctr"/>
+          <a:lstStyle/>
+          <a:p>
+            <a:pPr indent="0" marL="0">
+              <a:lnSpc>
+                <a:spcPct val="115000"/>
+              </a:lnSpc>
+              <a:buNone/>
+            </a:pPr>
+            <a:r>
+              <a:rPr lang="en-US" sz="1600" dirty="0">
+                <a:solidFill>
+                  <a:srgbClr val="12201A"/>
+                </a:solidFill>
+                <a:latin typeface="Calibri" pitchFamily="34" charset="0"/>
+                <a:ea typeface="Calibri" pitchFamily="34" charset="-122"/>
+                <a:cs typeface="Calibri" pitchFamily="34" charset="-120"/>
+              </a:rPr>
+              <a:t>The same rails let a big buyer lock in a whole season, direct from the farms — no broker, no procurement team, just a message. This is where the real volume lives.</a:t>
+            </a:r>
+            <a:endParaRPr lang="en-US" sz="1600" dirty="0"/>
+          </a:p>
+        </p:txBody>
+      </p:sp>
+      <p:sp>
+        <p:nvSpPr>
+          <p:cNvPr id="5" name="Shape 3"/>
+          <p:cNvSpPr/>
+          <p:nvPr/>
+        </p:nvSpPr>
+        <p:spPr>
+          <a:xfrm>
+            <a:off x="658368" y="2743200"/>
+            <a:ext cx="3383280" cy="3017520"/>
+          </a:xfrm>
+          <a:prstGeom prst="roundRect">
+            <a:avLst>
+              <a:gd name="adj" fmla="val 4242"/>
+            </a:avLst>
+          </a:prstGeom>
+          <a:solidFill>
+            <a:srgbClr val="FFFFFF"/>
+          </a:solidFill>
+          <a:ln/>
+          <a:effectLst>
+            <a:outerShdw sx="100000" sy="100000" kx="0" ky="0" algn="bl" rotWithShape="0" blurRad="127000" dist="38100" dir="5400000">
+              <a:srgbClr val="1B3A2E">
+                <a:alpha val="16000"/>
+              </a:srgbClr>
+            </a:outerShdw>
+          </a:effectLst>
+        </p:spPr>
+        <p:txBody>
+          <a:bodyPr/>
+          <a:p/>
+        </p:txBody>
+      </p:sp>
+      <p:sp>
+        <p:nvSpPr>
+          <p:cNvPr id="6" name="Shape 4"/>
+          <p:cNvSpPr/>
+          <p:nvPr/>
+        </p:nvSpPr>
+        <p:spPr>
+          <a:xfrm>
+            <a:off x="978408" y="3090672"/>
+            <a:ext cx="777240" cy="777240"/>
+          </a:xfrm>
+          <a:prstGeom prst="ellipse">
+            <a:avLst/>
+          </a:prstGeom>
+          <a:solidFill>
+            <a:srgbClr val="2E8564"/>
+          </a:solidFill>
+          <a:ln/>
+        </p:spPr>
+        <p:txBody>
+          <a:bodyPr/>
+          <a:p/>
+        </p:txBody>
+      </p:sp>
+      <p:sp>
+        <p:nvSpPr>
+          <p:cNvPr id="7" name="Text 5"/>
+          <p:cNvSpPr/>
+          <p:nvPr/>
+        </p:nvSpPr>
+        <p:spPr>
+          <a:xfrm>
+            <a:off x="978408" y="3090672"/>
+            <a:ext cx="777240" cy="777240"/>
+          </a:xfrm>
+          <a:prstGeom prst="rect">
+            <a:avLst/>
+          </a:prstGeom>
+          <a:noFill/>
+          <a:ln/>
+        </p:spPr>
+        <p:txBody>
+          <a:bodyPr wrap="square" lIns="0" tIns="0" rIns="0" bIns="0" rtlCol="0" anchor="ctr"/>
+          <a:lstStyle/>
+          <a:p>
+            <a:pPr algn="ctr" indent="0" marL="0">
+              <a:buNone/>
+            </a:pPr>
+            <a:r>
+              <a:rPr lang="en-US" sz="3000" b="1" dirty="0">
+                <a:solidFill>
+                  <a:srgbClr val="FFFFFF"/>
+                </a:solidFill>
+                <a:latin typeface="Calibri" pitchFamily="34" charset="0"/>
+                <a:ea typeface="Calibri" pitchFamily="34" charset="-122"/>
+                <a:cs typeface="Calibri" pitchFamily="34" charset="-120"/>
+              </a:rPr>
+              <a:t>1</a:t>
+            </a:r>
+            <a:endParaRPr lang="en-US" sz="3000" dirty="0"/>
+          </a:p>
+        </p:txBody>
+      </p:sp>
+      <p:sp>
+        <p:nvSpPr>
+          <p:cNvPr id="8" name="Text 6"/>
+          <p:cNvSpPr/>
+          <p:nvPr/>
+        </p:nvSpPr>
+        <p:spPr>
+          <a:xfrm>
+            <a:off x="1892808" y="3154680"/>
+            <a:ext cx="1920240" cy="320040"/>
+          </a:xfrm>
+          <a:prstGeom prst="rect">
+            <a:avLst/>
+          </a:prstGeom>
+          <a:noFill/>
+          <a:ln/>
+        </p:spPr>
+        <p:txBody>
+          <a:bodyPr wrap="square" lIns="0" tIns="0" rIns="0" bIns="0" rtlCol="0" anchor="ctr"/>
+          <a:lstStyle/>
+          <a:p>
+            <a:pPr indent="0" marL="0">
+              <a:buNone/>
+            </a:pPr>
+            <a:r>
+              <a:rPr lang="en-US" sz="1100" b="1" spc="100" kern="0" dirty="0">
+                <a:solidFill>
+                  <a:srgbClr val="68786F"/>
+                </a:solidFill>
+                <a:latin typeface="Calibri" pitchFamily="34" charset="0"/>
+                <a:ea typeface="Calibri" pitchFamily="34" charset="-122"/>
+                <a:cs typeface="Calibri" pitchFamily="34" charset="-120"/>
+              </a:rPr>
+              <a:t>The ask</a:t>
+            </a:r>
+            <a:endParaRPr lang="en-US" sz="1100" dirty="0"/>
+          </a:p>
+        </p:txBody>
+      </p:sp>
+      <p:sp>
+        <p:nvSpPr>
+          <p:cNvPr id="9" name="Text 7"/>
+          <p:cNvSpPr/>
+          <p:nvPr/>
+        </p:nvSpPr>
+        <p:spPr>
+          <a:xfrm>
+            <a:off x="1892808" y="3429000"/>
+            <a:ext cx="1920240" cy="457200"/>
+          </a:xfrm>
+          <a:prstGeom prst="rect">
+            <a:avLst/>
+          </a:prstGeom>
+          <a:noFill/>
+          <a:ln/>
+        </p:spPr>
+        <p:txBody>
+          <a:bodyPr wrap="square" lIns="0" tIns="0" rIns="0" bIns="0" rtlCol="0" anchor="ctr"/>
+          <a:lstStyle/>
+          <a:p>
+            <a:pPr indent="0" marL="0">
+              <a:buNone/>
+            </a:pPr>
+            <a:r>
+              <a:rPr lang="en-US" sz="1550" b="1" dirty="0">
+                <a:solidFill>
+                  <a:srgbClr val="123024"/>
+                </a:solidFill>
+                <a:latin typeface="Calibri" pitchFamily="34" charset="0"/>
+                <a:ea typeface="Calibri" pitchFamily="34" charset="-122"/>
+                <a:cs typeface="Calibri" pitchFamily="34" charset="-120"/>
+              </a:rPr>
+              <a:t>By a single text</a:t>
+            </a:r>
+            <a:endParaRPr lang="en-US" sz="1550" dirty="0"/>
+          </a:p>
+        </p:txBody>
+      </p:sp>
+      <p:sp>
+        <p:nvSpPr>
+          <p:cNvPr id="10" name="Text 8"/>
+          <p:cNvSpPr/>
+          <p:nvPr/>
+        </p:nvSpPr>
+        <p:spPr>
+          <a:xfrm>
+            <a:off x="978408" y="4251960"/>
+            <a:ext cx="2743200" cy="1280160"/>
+          </a:xfrm>
+          <a:prstGeom prst="rect">
+            <a:avLst/>
+          </a:prstGeom>
+          <a:noFill/>
+          <a:ln/>
+        </p:spPr>
+        <p:txBody>
+          <a:bodyPr wrap="square" lIns="0" tIns="0" rIns="0" bIns="0" rtlCol="0" anchor="ctr"/>
+          <a:lstStyle/>
+          <a:p>
+            <a:pPr indent="0" marL="0">
+              <a:lnSpc>
+                <a:spcPct val="118000"/>
+              </a:lnSpc>
+              <a:buNone/>
+            </a:pPr>
+            <a:r>
+              <a:rPr lang="en-US" sz="1280" dirty="0">
+                <a:solidFill>
+                  <a:srgbClr val="68786F"/>
+                </a:solidFill>
+                <a:latin typeface="Calibri" pitchFamily="34" charset="0"/>
+                <a:ea typeface="Calibri" pitchFamily="34" charset="-122"/>
+                <a:cs typeface="Calibri" pitchFamily="34" charset="-120"/>
+              </a:rPr>
+              <a:t>“Agripals, secure 20 tons of sun-dried tomatoes for the year.” The AI splits it across the farms that can actually grow it, at the price that works.</a:t>
+            </a:r>
+            <a:endParaRPr lang="en-US" sz="1280" dirty="0"/>
+          </a:p>
+        </p:txBody>
+      </p:sp>
+      <p:sp>
+        <p:nvSpPr>
+          <p:cNvPr id="11" name="Shape 9"/>
+          <p:cNvSpPr/>
+          <p:nvPr/>
+        </p:nvSpPr>
+        <p:spPr>
+          <a:xfrm>
+            <a:off x="4334256" y="2743200"/>
+            <a:ext cx="3383280" cy="3017520"/>
+          </a:xfrm>
+          <a:prstGeom prst="roundRect">
+            <a:avLst>
+              <a:gd name="adj" fmla="val 4242"/>
+            </a:avLst>
+          </a:prstGeom>
+          <a:solidFill>
+            <a:srgbClr val="FFFFFF"/>
+          </a:solidFill>
+          <a:ln/>
+          <a:effectLst>
+            <a:outerShdw sx="100000" sy="100000" kx="0" ky="0" algn="bl" rotWithShape="0" blurRad="127000" dist="38100" dir="5400000">
+              <a:srgbClr val="1B3A2E">
+                <a:alpha val="16000"/>
+              </a:srgbClr>
+            </a:outerShdw>
+          </a:effectLst>
+        </p:spPr>
+        <p:txBody>
+          <a:bodyPr/>
+          <a:p/>
+        </p:txBody>
+      </p:sp>
+      <p:sp>
+        <p:nvSpPr>
+          <p:cNvPr id="12" name="Shape 10"/>
+          <p:cNvSpPr/>
+          <p:nvPr/>
+        </p:nvSpPr>
+        <p:spPr>
+          <a:xfrm>
+            <a:off x="4654296" y="3090672"/>
+            <a:ext cx="777240" cy="777240"/>
+          </a:xfrm>
+          <a:prstGeom prst="ellipse">
+            <a:avLst/>
+          </a:prstGeom>
+          <a:solidFill>
+            <a:srgbClr val="37A278"/>
+          </a:solidFill>
+          <a:ln/>
+        </p:spPr>
+        <p:txBody>
+          <a:bodyPr/>
+          <a:p/>
+        </p:txBody>
+      </p:sp>
+      <p:sp>
+        <p:nvSpPr>
+          <p:cNvPr id="13" name="Text 11"/>
+          <p:cNvSpPr/>
+          <p:nvPr/>
+        </p:nvSpPr>
+        <p:spPr>
+          <a:xfrm>
+            <a:off x="4654296" y="3090672"/>
+            <a:ext cx="777240" cy="777240"/>
+          </a:xfrm>
+          <a:prstGeom prst="rect">
+            <a:avLst/>
+          </a:prstGeom>
+          <a:noFill/>
+          <a:ln/>
+        </p:spPr>
+        <p:txBody>
+          <a:bodyPr wrap="square" lIns="0" tIns="0" rIns="0" bIns="0" rtlCol="0" anchor="ctr"/>
+          <a:lstStyle/>
+          <a:p>
+            <a:pPr algn="ctr" indent="0" marL="0">
+              <a:buNone/>
+            </a:pPr>
+            <a:r>
+              <a:rPr lang="en-US" sz="3000" b="1" dirty="0">
+                <a:solidFill>
+                  <a:srgbClr val="FFFFFF"/>
+                </a:solidFill>
+                <a:latin typeface="Calibri" pitchFamily="34" charset="0"/>
+                <a:ea typeface="Calibri" pitchFamily="34" charset="-122"/>
+                <a:cs typeface="Calibri" pitchFamily="34" charset="-120"/>
+              </a:rPr>
+              <a:t>2</a:t>
+            </a:r>
+            <a:endParaRPr lang="en-US" sz="3000" dirty="0"/>
+          </a:p>
+        </p:txBody>
+      </p:sp>
+      <p:sp>
+        <p:nvSpPr>
+          <p:cNvPr id="14" name="Text 12"/>
+          <p:cNvSpPr/>
+          <p:nvPr/>
+        </p:nvSpPr>
+        <p:spPr>
+          <a:xfrm>
+            <a:off x="5568696" y="3154680"/>
+            <a:ext cx="1920240" cy="320040"/>
+          </a:xfrm>
+          <a:prstGeom prst="rect">
+            <a:avLst/>
+          </a:prstGeom>
+          <a:noFill/>
+          <a:ln/>
+        </p:spPr>
+        <p:txBody>
+          <a:bodyPr wrap="square" lIns="0" tIns="0" rIns="0" bIns="0" rtlCol="0" anchor="ctr"/>
+          <a:lstStyle/>
+          <a:p>
+            <a:pPr indent="0" marL="0">
+              <a:buNone/>
+            </a:pPr>
+            <a:r>
+              <a:rPr lang="en-US" sz="1100" b="1" spc="100" kern="0" dirty="0">
+                <a:solidFill>
+                  <a:srgbClr val="68786F"/>
+                </a:solidFill>
+                <a:latin typeface="Calibri" pitchFamily="34" charset="0"/>
+                <a:ea typeface="Calibri" pitchFamily="34" charset="-122"/>
+                <a:cs typeface="Calibri" pitchFamily="34" charset="-120"/>
+              </a:rPr>
+              <a:t>The hard part, solved</a:t>
+            </a:r>
+            <a:endParaRPr lang="en-US" sz="1100" dirty="0"/>
+          </a:p>
+        </p:txBody>
+      </p:sp>
+      <p:sp>
+        <p:nvSpPr>
+          <p:cNvPr id="15" name="Text 13"/>
+          <p:cNvSpPr/>
+          <p:nvPr/>
+        </p:nvSpPr>
+        <p:spPr>
+          <a:xfrm>
+            <a:off x="5568696" y="3429000"/>
+            <a:ext cx="1920240" cy="457200"/>
+          </a:xfrm>
+          <a:prstGeom prst="rect">
+            <a:avLst/>
+          </a:prstGeom>
+          <a:noFill/>
+          <a:ln/>
+        </p:spPr>
+        <p:txBody>
+          <a:bodyPr wrap="square" lIns="0" tIns="0" rIns="0" bIns="0" rtlCol="0" anchor="ctr"/>
+          <a:lstStyle/>
+          <a:p>
+            <a:pPr indent="0" marL="0">
+              <a:buNone/>
+            </a:pPr>
+            <a:r>
+              <a:rPr lang="en-US" sz="1550" b="1" dirty="0">
+                <a:solidFill>
+                  <a:srgbClr val="123024"/>
+                </a:solidFill>
+                <a:latin typeface="Calibri" pitchFamily="34" charset="0"/>
+                <a:ea typeface="Calibri" pitchFamily="34" charset="-122"/>
+                <a:cs typeface="Calibri" pitchFamily="34" charset="-120"/>
+              </a:rPr>
+              <a:t>Many farms, coordinated</a:t>
+            </a:r>
+            <a:endParaRPr lang="en-US" sz="1550" dirty="0"/>
+          </a:p>
+        </p:txBody>
+      </p:sp>
+      <p:sp>
+        <p:nvSpPr>
+          <p:cNvPr id="16" name="Text 14"/>
+          <p:cNvSpPr/>
+          <p:nvPr/>
+        </p:nvSpPr>
+        <p:spPr>
+          <a:xfrm>
+            <a:off x="4654296" y="4251960"/>
+            <a:ext cx="2743200" cy="1280160"/>
+          </a:xfrm>
+          <a:prstGeom prst="rect">
+            <a:avLst/>
+          </a:prstGeom>
+          <a:noFill/>
+          <a:ln/>
+        </p:spPr>
+        <p:txBody>
+          <a:bodyPr wrap="square" lIns="0" tIns="0" rIns="0" bIns="0" rtlCol="0" anchor="ctr"/>
+          <a:lstStyle/>
+          <a:p>
+            <a:pPr indent="0" marL="0">
+              <a:lnSpc>
+                <a:spcPct val="118000"/>
+              </a:lnSpc>
+              <a:buNone/>
+            </a:pPr>
+            <a:r>
+              <a:rPr lang="en-US" sz="1280" dirty="0">
+                <a:solidFill>
+                  <a:srgbClr val="68786F"/>
+                </a:solidFill>
+                <a:latin typeface="Calibri" pitchFamily="34" charset="0"/>
+                <a:ea typeface="Calibri" pitchFamily="34" charset="-122"/>
+                <a:cs typeface="Calibri" pitchFamily="34" charset="-120"/>
+              </a:rPr>
+              <a:t>Chains like Chipotle already want direct, multi-year farmer contracts — but wrangling 20+ small farms is the barrier. AI handles sourcing, pricing and the paperwork.</a:t>
+            </a:r>
+            <a:endParaRPr lang="en-US" sz="1280" dirty="0"/>
+          </a:p>
+        </p:txBody>
+      </p:sp>
+      <p:sp>
+        <p:nvSpPr>
+          <p:cNvPr id="17" name="Shape 15"/>
+          <p:cNvSpPr/>
+          <p:nvPr/>
+        </p:nvSpPr>
+        <p:spPr>
+          <a:xfrm>
+            <a:off x="8010144" y="2743200"/>
+            <a:ext cx="3383280" cy="3017520"/>
+          </a:xfrm>
+          <a:prstGeom prst="roundRect">
+            <a:avLst>
+              <a:gd name="adj" fmla="val 4242"/>
+            </a:avLst>
+          </a:prstGeom>
+          <a:solidFill>
+            <a:srgbClr val="FFFFFF"/>
+          </a:solidFill>
+          <a:ln/>
+          <a:effectLst>
+            <a:outerShdw sx="100000" sy="100000" kx="0" ky="0" algn="bl" rotWithShape="0" blurRad="127000" dist="38100" dir="5400000">
+              <a:srgbClr val="1B3A2E">
+                <a:alpha val="16000"/>
+              </a:srgbClr>
+            </a:outerShdw>
+          </a:effectLst>
+        </p:spPr>
+        <p:txBody>
+          <a:bodyPr/>
+          <a:p/>
+        </p:txBody>
+      </p:sp>
+      <p:sp>
+        <p:nvSpPr>
+          <p:cNvPr id="18" name="Shape 16"/>
+          <p:cNvSpPr/>
+          <p:nvPr/>
+        </p:nvSpPr>
+        <p:spPr>
+          <a:xfrm>
+            <a:off x="8330184" y="3090672"/>
+            <a:ext cx="777240" cy="777240"/>
+          </a:xfrm>
+          <a:prstGeom prst="ellipse">
+            <a:avLst/>
+          </a:prstGeom>
+          <a:solidFill>
+            <a:srgbClr val="4CC499"/>
+          </a:solidFill>
+          <a:ln/>
+        </p:spPr>
+        <p:txBody>
+          <a:bodyPr/>
+          <a:p/>
+        </p:txBody>
+      </p:sp>
+      <p:sp>
+        <p:nvSpPr>
+          <p:cNvPr id="19" name="Text 17"/>
+          <p:cNvSpPr/>
+          <p:nvPr/>
+        </p:nvSpPr>
+        <p:spPr>
+          <a:xfrm>
+            <a:off x="8330184" y="3090672"/>
+            <a:ext cx="777240" cy="777240"/>
+          </a:xfrm>
+          <a:prstGeom prst="rect">
+            <a:avLst/>
+          </a:prstGeom>
+          <a:noFill/>
+          <a:ln/>
+        </p:spPr>
+        <p:txBody>
+          <a:bodyPr wrap="square" lIns="0" tIns="0" rIns="0" bIns="0" rtlCol="0" anchor="ctr"/>
+          <a:lstStyle/>
+          <a:p>
+            <a:pPr algn="ctr" indent="0" marL="0">
+              <a:buNone/>
+            </a:pPr>
+            <a:r>
+              <a:rPr lang="en-US" sz="3000" b="1" dirty="0">
+                <a:solidFill>
+                  <a:srgbClr val="FFFFFF"/>
+                </a:solidFill>
+                <a:latin typeface="Calibri" pitchFamily="34" charset="0"/>
+                <a:ea typeface="Calibri" pitchFamily="34" charset="-122"/>
+                <a:cs typeface="Calibri" pitchFamily="34" charset="-120"/>
+              </a:rPr>
+              <a:t>3</a:t>
+            </a:r>
+            <a:endParaRPr lang="en-US" sz="3000" dirty="0"/>
+          </a:p>
+        </p:txBody>
+      </p:sp>
+      <p:sp>
+        <p:nvSpPr>
+          <p:cNvPr id="20" name="Text 18"/>
+          <p:cNvSpPr/>
+          <p:nvPr/>
+        </p:nvSpPr>
+        <p:spPr>
+          <a:xfrm>
+            <a:off x="9244584" y="3154680"/>
+            <a:ext cx="1920240" cy="320040"/>
+          </a:xfrm>
+          <a:prstGeom prst="rect">
+            <a:avLst/>
+          </a:prstGeom>
+          <a:noFill/>
+          <a:ln/>
+        </p:spPr>
+        <p:txBody>
+          <a:bodyPr wrap="square" lIns="0" tIns="0" rIns="0" bIns="0" rtlCol="0" anchor="ctr"/>
+          <a:lstStyle/>
+          <a:p>
+            <a:pPr indent="0" marL="0">
+              <a:buNone/>
+            </a:pPr>
+            <a:r>
+              <a:rPr lang="en-US" sz="1100" b="1" spc="100" kern="0" dirty="0">
+                <a:solidFill>
+                  <a:srgbClr val="68786F"/>
+                </a:solidFill>
+                <a:latin typeface="Calibri" pitchFamily="34" charset="0"/>
+                <a:ea typeface="Calibri" pitchFamily="34" charset="-122"/>
+                <a:cs typeface="Calibri" pitchFamily="34" charset="-120"/>
+              </a:rPr>
+              <a:t>The market</a:t>
+            </a:r>
+            <a:endParaRPr lang="en-US" sz="1100" dirty="0"/>
+          </a:p>
+        </p:txBody>
+      </p:sp>
+      <p:sp>
+        <p:nvSpPr>
+          <p:cNvPr id="21" name="Text 19"/>
+          <p:cNvSpPr/>
+          <p:nvPr/>
+        </p:nvSpPr>
+        <p:spPr>
+          <a:xfrm>
+            <a:off x="9244584" y="3429000"/>
+            <a:ext cx="1920240" cy="457200"/>
+          </a:xfrm>
+          <a:prstGeom prst="rect">
+            <a:avLst/>
+          </a:prstGeom>
+          <a:noFill/>
+          <a:ln/>
+        </p:spPr>
+        <p:txBody>
+          <a:bodyPr wrap="square" lIns="0" tIns="0" rIns="0" bIns="0" rtlCol="0" anchor="ctr"/>
+          <a:lstStyle/>
+          <a:p>
+            <a:pPr indent="0" marL="0">
+              <a:buNone/>
+            </a:pPr>
+            <a:r>
+              <a:rPr lang="en-US" sz="1550" b="1" dirty="0">
+                <a:solidFill>
+                  <a:srgbClr val="123024"/>
+                </a:solidFill>
+                <a:latin typeface="Calibri" pitchFamily="34" charset="0"/>
+                <a:ea typeface="Calibri" pitchFamily="34" charset="-122"/>
+                <a:cs typeface="Calibri" pitchFamily="34" charset="-120"/>
+              </a:rPr>
+              <a:t>A $62B layer to own</a:t>
+            </a:r>
+            <a:endParaRPr lang="en-US" sz="1550" dirty="0"/>
+          </a:p>
+        </p:txBody>
+      </p:sp>
+      <p:sp>
+        <p:nvSpPr>
+          <p:cNvPr id="22" name="Text 20"/>
+          <p:cNvSpPr/>
+          <p:nvPr/>
+        </p:nvSpPr>
+        <p:spPr>
+          <a:xfrm>
+            <a:off x="8330184" y="4251960"/>
+            <a:ext cx="2743200" cy="1280160"/>
+          </a:xfrm>
+          <a:prstGeom prst="rect">
+            <a:avLst/>
+          </a:prstGeom>
+          <a:noFill/>
+          <a:ln/>
+        </p:spPr>
+        <p:txBody>
+          <a:bodyPr wrap="square" lIns="0" tIns="0" rIns="0" bIns="0" rtlCol="0" anchor="ctr"/>
+          <a:lstStyle/>
+          <a:p>
+            <a:pPr indent="0" marL="0">
+              <a:lnSpc>
+                <a:spcPct val="118000"/>
+              </a:lnSpc>
+              <a:buNone/>
+            </a:pPr>
+            <a:r>
+              <a:rPr lang="en-US" sz="1280" dirty="0">
+                <a:solidFill>
+                  <a:srgbClr val="68786F"/>
+                </a:solidFill>
+                <a:latin typeface="Calibri" pitchFamily="34" charset="0"/>
+                <a:ea typeface="Calibri" pitchFamily="34" charset="-122"/>
+                <a:cs typeface="Calibri" pitchFamily="34" charset="-120"/>
+              </a:rPr>
+              <a:t>Contract farming is a $62B global market. Agripals becomes the layer where big buyers and small farms meet — and we take a cut of every ton.</a:t>
+            </a:r>
+            <a:endParaRPr lang="en-US" sz="1280" dirty="0"/>
+          </a:p>
+        </p:txBody>
+      </p:sp>
+      <p:sp>
+        <p:nvSpPr>
+          <p:cNvPr id="23" name="Text 21"/>
+          <p:cNvSpPr/>
+          <p:nvPr/>
+        </p:nvSpPr>
+        <p:spPr>
+          <a:xfrm>
+            <a:off x="11183112" y="6355080"/>
+            <a:ext cx="548640" cy="274320"/>
+          </a:xfrm>
+          <a:prstGeom prst="rect">
+            <a:avLst/>
+          </a:prstGeom>
+          <a:noFill/>
+          <a:ln/>
+        </p:spPr>
+        <p:txBody>
+          <a:bodyPr wrap="square" lIns="0" tIns="0" rIns="0" bIns="0" rtlCol="0" anchor="ctr"/>
+          <a:lstStyle/>
+          <a:p>
+            <a:pPr algn="r" indent="0" marL="0">
+              <a:buNone/>
+            </a:pPr>
+            <a:r>
+              <a:rPr lang="en-US" sz="1000" dirty="0">
+                <a:solidFill>
+                  <a:srgbClr val="68786F"/>
+                </a:solidFill>
+                <a:latin typeface="Calibri" pitchFamily="34" charset="0"/>
+                <a:ea typeface="Calibri" pitchFamily="34" charset="-122"/>
+                <a:cs typeface="Calibri" pitchFamily="34" charset="-120"/>
+              </a:rPr>
+              <a:t>20</a:t>
+            </a:r>
+            <a:endParaRPr lang="en-US" sz="1000" dirty="0"/>
+          </a:p>
+        </p:txBody>
+      </p:sp>
+      <p:sp>
+        <p:nvSpPr>
+          <p:cNvPr id="24" name="Text 22"/>
+          <p:cNvSpPr/>
+          <p:nvPr/>
+        </p:nvSpPr>
+        <p:spPr>
+          <a:xfrm>
+            <a:off x="658368" y="6355080"/>
+            <a:ext cx="2743200" cy="274320"/>
+          </a:xfrm>
+          <a:prstGeom prst="rect">
+            <a:avLst/>
+          </a:prstGeom>
+          <a:noFill/>
+          <a:ln/>
+        </p:spPr>
+        <p:txBody>
+          <a:bodyPr wrap="square" lIns="0" tIns="0" rIns="0" bIns="0" rtlCol="0" anchor="ctr"/>
+          <a:lstStyle/>
+          <a:p>
+            <a:pPr indent="0" marL="0">
+              <a:buNone/>
+            </a:pPr>
+            <a:r>
+              <a:rPr lang="en-US" sz="1000" b="1" dirty="0">
+                <a:solidFill>
+                  <a:srgbClr val="68786F"/>
+                </a:solidFill>
+                <a:latin typeface="Calibri" pitchFamily="34" charset="0"/>
+                <a:ea typeface="Calibri" pitchFamily="34" charset="-122"/>
+                <a:cs typeface="Calibri" pitchFamily="34" charset="-120"/>
+              </a:rPr>
+              <a:t>Agripals</a:t>
+            </a:r>
+            <a:endParaRPr lang="en-US" sz="1000" dirty="0"/>
+          </a:p>
+        </p:txBody>
+      </p:sp>
+    </p:spTree>
+  </p:cSld>
+  <p:clrMapOvr>
+    <a:masterClrMapping/>
+  </p:clrMapOvr>
+</p:sld>
+</file>
+
+<file path=ppt/slides/slide21.xml><?xml version="1.0" encoding="utf-8"?>
+<p:sld xmlns:a="http://schemas.openxmlformats.org/drawingml/2006/main" xmlns:r="http://schemas.openxmlformats.org/officeDocument/2006/relationships" xmlns:p="http://schemas.openxmlformats.org/presentationml/2006/main">
   <p:cSld name="Slide 14">
     <p:bg>
       <p:bgPr>
